--- a/Fase 2/Evidencias Proyecto/Presentación Proyecto.pptx
+++ b/Fase 2/Evidencias Proyecto/Presentación Proyecto.pptx
@@ -2342,7 +2342,7 @@
           <a:p>
             <a:fld id="{48A87A34-81AB-432B-8DAE-1953F412C126}" type="datetimeFigureOut">
               <a:rPr lang="en-US" smtClean="0"/>
-              <a:t>9/4/2025</a:t>
+              <a:t>10/23/2025</a:t>
             </a:fld>
             <a:endParaRPr lang="en-US" dirty="0"/>
           </a:p>
@@ -2554,7 +2554,7 @@
           <a:p>
             <a:fld id="{48A87A34-81AB-432B-8DAE-1953F412C126}" type="datetimeFigureOut">
               <a:rPr lang="en-US" smtClean="0"/>
-              <a:t>9/4/2025</a:t>
+              <a:t>10/23/2025</a:t>
             </a:fld>
             <a:endParaRPr lang="en-US" dirty="0"/>
           </a:p>
@@ -2770,7 +2770,7 @@
           <a:p>
             <a:fld id="{48A87A34-81AB-432B-8DAE-1953F412C126}" type="datetimeFigureOut">
               <a:rPr lang="en-US" smtClean="0"/>
-              <a:t>9/4/2025</a:t>
+              <a:t>10/23/2025</a:t>
             </a:fld>
             <a:endParaRPr lang="en-US" dirty="0"/>
           </a:p>
@@ -3212,7 +3212,7 @@
           <a:p>
             <a:fld id="{48A87A34-81AB-432B-8DAE-1953F412C126}" type="datetimeFigureOut">
               <a:rPr lang="en-US" smtClean="0"/>
-              <a:t>9/4/2025</a:t>
+              <a:t>10/23/2025</a:t>
             </a:fld>
             <a:endParaRPr lang="en-US" dirty="0"/>
           </a:p>
@@ -3552,7 +3552,7 @@
           <a:p>
             <a:fld id="{48A87A34-81AB-432B-8DAE-1953F412C126}" type="datetimeFigureOut">
               <a:rPr lang="en-US" smtClean="0"/>
-              <a:t>9/4/2025</a:t>
+              <a:t>10/23/2025</a:t>
             </a:fld>
             <a:endParaRPr lang="en-US" dirty="0"/>
           </a:p>
@@ -3821,7 +3821,7 @@
           <a:p>
             <a:fld id="{48A87A34-81AB-432B-8DAE-1953F412C126}" type="datetimeFigureOut">
               <a:rPr lang="en-US" smtClean="0"/>
-              <a:t>9/4/2025</a:t>
+              <a:t>10/23/2025</a:t>
             </a:fld>
             <a:endParaRPr lang="en-US" dirty="0"/>
           </a:p>
@@ -4238,7 +4238,7 @@
           <a:p>
             <a:fld id="{48A87A34-81AB-432B-8DAE-1953F412C126}" type="datetimeFigureOut">
               <a:rPr lang="en-US" smtClean="0"/>
-              <a:t>9/4/2025</a:t>
+              <a:t>10/23/2025</a:t>
             </a:fld>
             <a:endParaRPr lang="en-US" dirty="0"/>
           </a:p>
@@ -4388,7 +4388,7 @@
           <a:p>
             <a:fld id="{48A87A34-81AB-432B-8DAE-1953F412C126}" type="datetimeFigureOut">
               <a:rPr lang="en-US" smtClean="0"/>
-              <a:t>9/4/2025</a:t>
+              <a:t>10/23/2025</a:t>
             </a:fld>
             <a:endParaRPr lang="en-US" dirty="0"/>
           </a:p>
@@ -4515,7 +4515,7 @@
           <a:p>
             <a:fld id="{48A87A34-81AB-432B-8DAE-1953F412C126}" type="datetimeFigureOut">
               <a:rPr lang="en-US" smtClean="0"/>
-              <a:t>9/4/2025</a:t>
+              <a:t>10/23/2025</a:t>
             </a:fld>
             <a:endParaRPr lang="en-US" dirty="0"/>
           </a:p>
@@ -4767,7 +4767,7 @@
           <a:p>
             <a:fld id="{48A87A34-81AB-432B-8DAE-1953F412C126}" type="datetimeFigureOut">
               <a:rPr lang="en-US" smtClean="0"/>
-              <a:t>9/4/2025</a:t>
+              <a:t>10/23/2025</a:t>
             </a:fld>
             <a:endParaRPr lang="en-US" dirty="0"/>
           </a:p>
@@ -5214,7 +5214,7 @@
             <a:fld id="{48A87A34-81AB-432B-8DAE-1953F412C126}" type="datetimeFigureOut">
               <a:rPr lang="en-US" smtClean="0"/>
               <a:pPr/>
-              <a:t>9/4/2025</a:t>
+              <a:t>10/23/2025</a:t>
             </a:fld>
             <a:endParaRPr lang="en-US" dirty="0"/>
           </a:p>
@@ -5382,6 +5382,13 @@
             <a:schemeClr val="lt1"/>
           </a:fontRef>
         </p:style>
+        <p:txBody>
+          <a:bodyPr/>
+          <a:lstStyle/>
+          <a:p>
+            <a:endParaRPr lang="es-419"/>
+          </a:p>
+        </p:txBody>
       </p:sp>
       <p:pic>
         <p:nvPicPr>
@@ -5543,7 +5550,7 @@
             <a:fld id="{48A87A34-81AB-432B-8DAE-1953F412C126}" type="datetimeFigureOut">
               <a:rPr lang="en-US" smtClean="0"/>
               <a:pPr/>
-              <a:t>9/4/2025</a:t>
+              <a:t>10/23/2025</a:t>
             </a:fld>
             <a:endParaRPr lang="en-US" dirty="0"/>
           </a:p>
@@ -9620,7 +9627,7 @@
         <p:spPr>
           <a:xfrm>
             <a:off x="837724" y="754975"/>
-            <a:ext cx="9756458" cy="633651"/>
+            <a:ext cx="10223566" cy="1693257"/>
           </a:xfrm>
           <a:prstGeom prst="rect">
             <a:avLst/>
@@ -9647,9 +9654,8 @@
                 <a:ea typeface="Source Serif 4 Semi Bold" pitchFamily="34" charset="-122"/>
                 <a:cs typeface="Source Serif 4 Semi Bold" pitchFamily="34" charset="-120"/>
               </a:rPr>
-              <a:t>El Desafío Actual en la Gestión Sanitaria</a:t>
-            </a:r>
-            <a:endParaRPr lang="es-419" sz="3950" noProof="0" dirty="0"/>
+              <a:t>Objetivo General</a:t>
+            </a:r>
           </a:p>
         </p:txBody>
       </p:sp>
@@ -9685,8 +9691,8 @@
         </p:nvSpPr>
         <p:spPr>
           <a:xfrm>
-            <a:off x="7585591" y="1927146"/>
-            <a:ext cx="4088130" cy="506849"/>
+            <a:off x="7315200" y="754976"/>
+            <a:ext cx="6477475" cy="5291864"/>
           </a:xfrm>
           <a:prstGeom prst="rect">
             <a:avLst/>
@@ -9716,145 +9722,6 @@
               <a:t>Contexto y Problema</a:t>
             </a:r>
             <a:endParaRPr lang="es-419" sz="3150" noProof="0" dirty="0"/>
-          </a:p>
-        </p:txBody>
-      </p:sp>
-      <p:sp>
-        <p:nvSpPr>
-          <p:cNvPr id="5" name="Text 2"/>
-          <p:cNvSpPr/>
-          <p:nvPr/>
-        </p:nvSpPr>
-        <p:spPr>
-          <a:xfrm>
-            <a:off x="7585591" y="2649379"/>
-            <a:ext cx="6214705" cy="689134"/>
-          </a:xfrm>
-          <a:prstGeom prst="rect">
-            <a:avLst/>
-          </a:prstGeom>
-          <a:noFill/>
-          <a:ln/>
-        </p:spPr>
-        <p:txBody>
-          <a:bodyPr wrap="square" lIns="0" tIns="0" rIns="0" bIns="0" rtlCol="0" anchor="t"/>
-          <a:lstStyle/>
-          <a:p>
-            <a:pPr marL="0" indent="0" algn="l">
-              <a:lnSpc>
-                <a:spcPts val="2700"/>
-              </a:lnSpc>
-              <a:buNone/>
-            </a:pPr>
-            <a:r>
-              <a:rPr lang="es-419" sz="1650" noProof="0" dirty="0">
-                <a:solidFill>
-                  <a:srgbClr val="D75BE2"/>
-                </a:solidFill>
-                <a:latin typeface="Source Sans 3" pitchFamily="34" charset="0"/>
-                <a:ea typeface="Source Sans 3" pitchFamily="34" charset="-122"/>
-                <a:cs typeface="Source Sans 3" pitchFamily="34" charset="-120"/>
-              </a:rPr>
-              <a:t>Sobrecarga y mala orientación</a:t>
-            </a:r>
-            <a:r>
-              <a:rPr lang="es-419" sz="1650" noProof="0" dirty="0">
-                <a:solidFill>
-                  <a:srgbClr val="272525"/>
-                </a:solidFill>
-                <a:latin typeface="Source Sans 3" pitchFamily="34" charset="0"/>
-                <a:ea typeface="Source Sans 3" pitchFamily="34" charset="-122"/>
-                <a:cs typeface="Source Sans 3" pitchFamily="34" charset="-120"/>
-              </a:rPr>
-              <a:t> en agendas médicas: un problema generalizado que afecta a pacientes y profesionales.</a:t>
-            </a:r>
-            <a:endParaRPr lang="es-419" sz="1650" noProof="0" dirty="0"/>
-          </a:p>
-        </p:txBody>
-      </p:sp>
-      <p:sp>
-        <p:nvSpPr>
-          <p:cNvPr id="6" name="Text 3"/>
-          <p:cNvSpPr/>
-          <p:nvPr/>
-        </p:nvSpPr>
-        <p:spPr>
-          <a:xfrm>
-            <a:off x="7585591" y="3532346"/>
-            <a:ext cx="6214705" cy="689134"/>
-          </a:xfrm>
-          <a:prstGeom prst="rect">
-            <a:avLst/>
-          </a:prstGeom>
-          <a:noFill/>
-          <a:ln/>
-        </p:spPr>
-        <p:txBody>
-          <a:bodyPr wrap="square" lIns="0" tIns="0" rIns="0" bIns="0" rtlCol="0" anchor="t"/>
-          <a:lstStyle/>
-          <a:p>
-            <a:pPr marL="342900" indent="-342900" algn="l">
-              <a:lnSpc>
-                <a:spcPts val="2700"/>
-              </a:lnSpc>
-              <a:buSzPct val="100000"/>
-              <a:buChar char="•"/>
-            </a:pPr>
-            <a:r>
-              <a:rPr lang="es-419" sz="1650" noProof="0" dirty="0">
-                <a:solidFill>
-                  <a:srgbClr val="272525"/>
-                </a:solidFill>
-                <a:latin typeface="Source Sans 3" pitchFamily="34" charset="0"/>
-                <a:ea typeface="Source Sans 3" pitchFamily="34" charset="-122"/>
-                <a:cs typeface="Source Sans 3" pitchFamily="34" charset="-120"/>
-              </a:rPr>
-              <a:t>Pacientes que reservan citas en especialidades incorrectas, retrasando diagnósticos.</a:t>
-            </a:r>
-            <a:endParaRPr lang="es-419" sz="1650" noProof="0" dirty="0"/>
-          </a:p>
-        </p:txBody>
-      </p:sp>
-      <p:sp>
-        <p:nvSpPr>
-          <p:cNvPr id="7" name="Text 4"/>
-          <p:cNvSpPr/>
-          <p:nvPr/>
-        </p:nvSpPr>
-        <p:spPr>
-          <a:xfrm>
-            <a:off x="7585591" y="4296847"/>
-            <a:ext cx="6214705" cy="689134"/>
-          </a:xfrm>
-          <a:prstGeom prst="rect">
-            <a:avLst/>
-          </a:prstGeom>
-          <a:noFill/>
-          <a:ln/>
-        </p:spPr>
-        <p:txBody>
-          <a:bodyPr wrap="square" lIns="0" tIns="0" rIns="0" bIns="0" rtlCol="0" anchor="t"/>
-          <a:lstStyle/>
-          <a:p>
-            <a:pPr marL="342900" indent="-342900" algn="l">
-              <a:lnSpc>
-                <a:spcPts val="2700"/>
-              </a:lnSpc>
-              <a:buSzPct val="100000"/>
-              <a:buChar char="•"/>
-            </a:pPr>
-            <a:r>
-              <a:rPr lang="es-419" sz="1650" noProof="0" dirty="0">
-                <a:solidFill>
-                  <a:srgbClr val="272525"/>
-                </a:solidFill>
-                <a:latin typeface="Source Sans 3" pitchFamily="34" charset="0"/>
-                <a:ea typeface="Source Sans 3" pitchFamily="34" charset="-122"/>
-                <a:cs typeface="Source Sans 3" pitchFamily="34" charset="-120"/>
-              </a:rPr>
-              <a:t>Ineficiencia en la gestión de recursos médicos, generando esperas innecesarias.</a:t>
-            </a:r>
-            <a:endParaRPr lang="es-419" sz="1650" noProof="0" dirty="0"/>
           </a:p>
         </p:txBody>
       </p:sp>

--- a/Fase 2/Evidencias Proyecto/Presentación Proyecto.pptx
+++ b/Fase 2/Evidencias Proyecto/Presentación Proyecto.pptx
@@ -5,7 +5,7 @@
     <p:sldMasterId id="2147483726" r:id="rId1"/>
   </p:sldMasterIdLst>
   <p:notesMasterIdLst>
-    <p:notesMasterId r:id="rId22"/>
+    <p:notesMasterId r:id="rId17"/>
   </p:notesMasterIdLst>
   <p:sldIdLst>
     <p:sldId id="256" r:id="rId2"/>
@@ -13,46 +13,41 @@
     <p:sldId id="258" r:id="rId4"/>
     <p:sldId id="259" r:id="rId5"/>
     <p:sldId id="260" r:id="rId6"/>
-    <p:sldId id="261" r:id="rId7"/>
-    <p:sldId id="262" r:id="rId8"/>
-    <p:sldId id="263" r:id="rId9"/>
+    <p:sldId id="265" r:id="rId7"/>
+    <p:sldId id="261" r:id="rId8"/>
+    <p:sldId id="262" r:id="rId9"/>
     <p:sldId id="264" r:id="rId10"/>
-    <p:sldId id="265" r:id="rId11"/>
+    <p:sldId id="278" r:id="rId11"/>
     <p:sldId id="270" r:id="rId12"/>
-    <p:sldId id="271" r:id="rId13"/>
-    <p:sldId id="276" r:id="rId14"/>
-    <p:sldId id="273" r:id="rId15"/>
-    <p:sldId id="277" r:id="rId16"/>
-    <p:sldId id="275" r:id="rId17"/>
-    <p:sldId id="278" r:id="rId18"/>
-    <p:sldId id="279" r:id="rId19"/>
-    <p:sldId id="269" r:id="rId20"/>
-    <p:sldId id="274" r:id="rId21"/>
+    <p:sldId id="280" r:id="rId13"/>
+    <p:sldId id="282" r:id="rId14"/>
+    <p:sldId id="269" r:id="rId15"/>
+    <p:sldId id="274" r:id="rId16"/>
   </p:sldIdLst>
   <p:sldSz cx="14630400" cy="8229600"/>
   <p:notesSz cx="8229600" cy="14630400"/>
   <p:embeddedFontLst>
     <p:embeddedFont>
       <p:font typeface="Aptos Narrow" panose="020B0004020202020204" pitchFamily="34" charset="0"/>
-      <p:regular r:id="rId23"/>
-      <p:bold r:id="rId24"/>
-      <p:italic r:id="rId25"/>
-      <p:boldItalic r:id="rId26"/>
+      <p:regular r:id="rId18"/>
+      <p:bold r:id="rId19"/>
+      <p:italic r:id="rId20"/>
+      <p:boldItalic r:id="rId21"/>
     </p:embeddedFont>
     <p:embeddedFont>
       <p:font typeface="Gill Sans MT" panose="020B0502020104020203" pitchFamily="34" charset="0"/>
-      <p:regular r:id="rId27"/>
-      <p:bold r:id="rId28"/>
-      <p:italic r:id="rId29"/>
-      <p:boldItalic r:id="rId30"/>
+      <p:regular r:id="rId22"/>
+      <p:bold r:id="rId23"/>
+      <p:italic r:id="rId24"/>
+      <p:boldItalic r:id="rId25"/>
     </p:embeddedFont>
     <p:embeddedFont>
       <p:font typeface="Source Sans 3" panose="020B0604020202020204" charset="0"/>
-      <p:regular r:id="rId31"/>
+      <p:regular r:id="rId26"/>
     </p:embeddedFont>
     <p:embeddedFont>
       <p:font typeface="Source Serif 4 Semi Bold" panose="020B0604020202020204" charset="0"/>
-      <p:regular r:id="rId32"/>
+      <p:regular r:id="rId27"/>
     </p:embeddedFont>
   </p:embeddedFontLst>
   <p:defaultTextStyle>
@@ -311,6 +306,13 @@
           </p:nvPr>
         </p:nvSpPr>
         <p:spPr/>
+        <p:txBody>
+          <a:bodyPr/>
+          <a:lstStyle/>
+          <a:p>
+            <a:endParaRPr lang="es-419"/>
+          </a:p>
+        </p:txBody>
       </p:sp>
       <p:sp>
         <p:nvSpPr>
@@ -372,7 +374,13 @@
   <p:cSld>
     <p:spTree>
       <p:nvGrpSpPr>
-        <p:cNvPr id="1" name=""/>
+        <p:cNvPr id="1" name="">
+          <a:extLst>
+            <a:ext uri="{FF2B5EF4-FFF2-40B4-BE49-F238E27FC236}">
+              <a16:creationId xmlns:a16="http://schemas.microsoft.com/office/drawing/2014/main" id="{33509077-8BD8-E8F5-525A-57DB78E1148D}"/>
+            </a:ext>
+          </a:extLst>
+        </p:cNvPr>
         <p:cNvGrpSpPr/>
         <p:nvPr/>
       </p:nvGrpSpPr>
@@ -386,7 +394,13 @@
       </p:grpSpPr>
       <p:sp>
         <p:nvSpPr>
-          <p:cNvPr id="2" name="Slide Image Placeholder 1"/>
+          <p:cNvPr id="2" name="Slide Image Placeholder 1">
+            <a:extLst>
+              <a:ext uri="{FF2B5EF4-FFF2-40B4-BE49-F238E27FC236}">
+                <a16:creationId xmlns:a16="http://schemas.microsoft.com/office/drawing/2014/main" id="{AF95D433-7BCD-5991-DA02-7827CA24E468}"/>
+              </a:ext>
+            </a:extLst>
+          </p:cNvPr>
           <p:cNvSpPr>
             <a:spLocks noGrp="1" noRot="1" noChangeAspect="1"/>
           </p:cNvSpPr>
@@ -395,10 +409,23 @@
           </p:nvPr>
         </p:nvSpPr>
         <p:spPr/>
-      </p:sp>
-      <p:sp>
-        <p:nvSpPr>
-          <p:cNvPr id="3" name="Notes Placeholder 2"/>
+        <p:txBody>
+          <a:bodyPr/>
+          <a:lstStyle/>
+          <a:p>
+            <a:endParaRPr lang="es-419"/>
+          </a:p>
+        </p:txBody>
+      </p:sp>
+      <p:sp>
+        <p:nvSpPr>
+          <p:cNvPr id="3" name="Notes Placeholder 2">
+            <a:extLst>
+              <a:ext uri="{FF2B5EF4-FFF2-40B4-BE49-F238E27FC236}">
+                <a16:creationId xmlns:a16="http://schemas.microsoft.com/office/drawing/2014/main" id="{1AAEACBA-F05D-8ACF-A19C-E6829AB0C2D4}"/>
+              </a:ext>
+            </a:extLst>
+          </p:cNvPr>
           <p:cNvSpPr>
             <a:spLocks noGrp="1"/>
           </p:cNvSpPr>
@@ -417,7 +444,13 @@
       </p:sp>
       <p:sp>
         <p:nvSpPr>
-          <p:cNvPr id="4" name="Slide Number Placeholder 3"/>
+          <p:cNvPr id="4" name="Slide Number Placeholder 3">
+            <a:extLst>
+              <a:ext uri="{FF2B5EF4-FFF2-40B4-BE49-F238E27FC236}">
+                <a16:creationId xmlns:a16="http://schemas.microsoft.com/office/drawing/2014/main" id="{21DEF734-1648-DF2F-61DD-EB4297CD7101}"/>
+              </a:ext>
+            </a:extLst>
+          </p:cNvPr>
           <p:cNvSpPr>
             <a:spLocks noGrp="1"/>
           </p:cNvSpPr>
@@ -441,7 +474,7 @@
     </p:spTree>
     <p:extLst>
       <p:ext uri="{BB962C8B-B14F-4D97-AF65-F5344CB8AC3E}">
-        <p14:creationId xmlns:p14="http://schemas.microsoft.com/office/powerpoint/2010/main" val="1024086991"/>
+        <p14:creationId xmlns:p14="http://schemas.microsoft.com/office/powerpoint/2010/main" val="1635612145"/>
       </p:ext>
     </p:extLst>
   </p:cSld>
@@ -491,6 +524,13 @@
           </p:nvPr>
         </p:nvSpPr>
         <p:spPr/>
+        <p:txBody>
+          <a:bodyPr/>
+          <a:lstStyle/>
+          <a:p>
+            <a:endParaRPr lang="es-419"/>
+          </a:p>
+        </p:txBody>
       </p:sp>
       <p:sp>
         <p:nvSpPr>
@@ -567,7 +607,7 @@
         <p:cNvPr id="1" name="">
           <a:extLst>
             <a:ext uri="{FF2B5EF4-FFF2-40B4-BE49-F238E27FC236}">
-              <a16:creationId xmlns:a16="http://schemas.microsoft.com/office/drawing/2014/main" id="{261123FC-9869-C4D8-C28D-74E9A56A516E}"/>
+              <a16:creationId xmlns:a16="http://schemas.microsoft.com/office/drawing/2014/main" id="{0031F86E-F4B1-9B0E-FD89-4FF5415A1F11}"/>
             </a:ext>
           </a:extLst>
         </p:cNvPr>
@@ -587,7 +627,7 @@
           <p:cNvPr id="2" name="Slide Image Placeholder 1">
             <a:extLst>
               <a:ext uri="{FF2B5EF4-FFF2-40B4-BE49-F238E27FC236}">
-                <a16:creationId xmlns:a16="http://schemas.microsoft.com/office/drawing/2014/main" id="{7A808E3F-C1C2-96FF-FBF9-193618DCC31C}"/>
+                <a16:creationId xmlns:a16="http://schemas.microsoft.com/office/drawing/2014/main" id="{B1314310-F383-DEA7-6F3E-A56CFF8E529C}"/>
               </a:ext>
             </a:extLst>
           </p:cNvPr>
@@ -599,13 +639,20 @@
           </p:nvPr>
         </p:nvSpPr>
         <p:spPr/>
+        <p:txBody>
+          <a:bodyPr/>
+          <a:lstStyle/>
+          <a:p>
+            <a:endParaRPr lang="es-419"/>
+          </a:p>
+        </p:txBody>
       </p:sp>
       <p:sp>
         <p:nvSpPr>
           <p:cNvPr id="3" name="Notes Placeholder 2">
             <a:extLst>
               <a:ext uri="{FF2B5EF4-FFF2-40B4-BE49-F238E27FC236}">
-                <a16:creationId xmlns:a16="http://schemas.microsoft.com/office/drawing/2014/main" id="{804DB80F-194C-74CA-580F-344D60FC2F6F}"/>
+                <a16:creationId xmlns:a16="http://schemas.microsoft.com/office/drawing/2014/main" id="{22175235-733D-FB16-1943-9B0DE0689BF2}"/>
               </a:ext>
             </a:extLst>
           </p:cNvPr>
@@ -630,7 +677,7 @@
           <p:cNvPr id="4" name="Slide Number Placeholder 3">
             <a:extLst>
               <a:ext uri="{FF2B5EF4-FFF2-40B4-BE49-F238E27FC236}">
-                <a16:creationId xmlns:a16="http://schemas.microsoft.com/office/drawing/2014/main" id="{2F2CA20B-D460-B49D-B980-9236970C2E28}"/>
+                <a16:creationId xmlns:a16="http://schemas.microsoft.com/office/drawing/2014/main" id="{191C16BB-1996-0963-56AE-6415A9EF9C77}"/>
               </a:ext>
             </a:extLst>
           </p:cNvPr>
@@ -657,7 +704,7 @@
     </p:spTree>
     <p:extLst>
       <p:ext uri="{BB962C8B-B14F-4D97-AF65-F5344CB8AC3E}">
-        <p14:creationId xmlns:p14="http://schemas.microsoft.com/office/powerpoint/2010/main" val="2231007273"/>
+        <p14:creationId xmlns:p14="http://schemas.microsoft.com/office/powerpoint/2010/main" val="1436841967"/>
       </p:ext>
     </p:extLst>
   </p:cSld>
@@ -675,7 +722,7 @@
         <p:cNvPr id="1" name="">
           <a:extLst>
             <a:ext uri="{FF2B5EF4-FFF2-40B4-BE49-F238E27FC236}">
-              <a16:creationId xmlns:a16="http://schemas.microsoft.com/office/drawing/2014/main" id="{64B28315-DA0B-CC79-1307-DA205E77FDB5}"/>
+              <a16:creationId xmlns:a16="http://schemas.microsoft.com/office/drawing/2014/main" id="{49CBE5AD-A486-62ED-AB6C-ECD1210E13C3}"/>
             </a:ext>
           </a:extLst>
         </p:cNvPr>
@@ -695,7 +742,7 @@
           <p:cNvPr id="2" name="Slide Image Placeholder 1">
             <a:extLst>
               <a:ext uri="{FF2B5EF4-FFF2-40B4-BE49-F238E27FC236}">
-                <a16:creationId xmlns:a16="http://schemas.microsoft.com/office/drawing/2014/main" id="{E164199A-FED6-68AD-46E4-EAA4B1A122FE}"/>
+                <a16:creationId xmlns:a16="http://schemas.microsoft.com/office/drawing/2014/main" id="{8891FADD-28A9-32F8-11FF-AB30DE8F0859}"/>
               </a:ext>
             </a:extLst>
           </p:cNvPr>
@@ -707,13 +754,20 @@
           </p:nvPr>
         </p:nvSpPr>
         <p:spPr/>
+        <p:txBody>
+          <a:bodyPr/>
+          <a:lstStyle/>
+          <a:p>
+            <a:endParaRPr lang="es-419"/>
+          </a:p>
+        </p:txBody>
       </p:sp>
       <p:sp>
         <p:nvSpPr>
           <p:cNvPr id="3" name="Notes Placeholder 2">
             <a:extLst>
               <a:ext uri="{FF2B5EF4-FFF2-40B4-BE49-F238E27FC236}">
-                <a16:creationId xmlns:a16="http://schemas.microsoft.com/office/drawing/2014/main" id="{D05347C5-AC63-9791-441C-6A555B2CA862}"/>
+                <a16:creationId xmlns:a16="http://schemas.microsoft.com/office/drawing/2014/main" id="{22A4E8A1-3D16-9BF0-2131-127076B3D5D4}"/>
               </a:ext>
             </a:extLst>
           </p:cNvPr>
@@ -738,7 +792,7 @@
           <p:cNvPr id="4" name="Slide Number Placeholder 3">
             <a:extLst>
               <a:ext uri="{FF2B5EF4-FFF2-40B4-BE49-F238E27FC236}">
-                <a16:creationId xmlns:a16="http://schemas.microsoft.com/office/drawing/2014/main" id="{CD9A820E-26D1-DF9F-C36A-9698FA229F91}"/>
+                <a16:creationId xmlns:a16="http://schemas.microsoft.com/office/drawing/2014/main" id="{0E189FD4-D5B3-A0E2-7547-6247F5B1BBDA}"/>
               </a:ext>
             </a:extLst>
           </p:cNvPr>
@@ -765,7 +819,7 @@
     </p:spTree>
     <p:extLst>
       <p:ext uri="{BB962C8B-B14F-4D97-AF65-F5344CB8AC3E}">
-        <p14:creationId xmlns:p14="http://schemas.microsoft.com/office/powerpoint/2010/main" val="1532590222"/>
+        <p14:creationId xmlns:p14="http://schemas.microsoft.com/office/powerpoint/2010/main" val="3114926689"/>
       </p:ext>
     </p:extLst>
   </p:cSld>
@@ -776,546 +830,6 @@
 </file>
 
 <file path=ppt/notesSlides/notesSlide14.xml><?xml version="1.0" encoding="utf-8"?>
-<p:notes xmlns:a="http://schemas.openxmlformats.org/drawingml/2006/main" xmlns:r="http://schemas.openxmlformats.org/officeDocument/2006/relationships" xmlns:p="http://schemas.openxmlformats.org/presentationml/2006/main">
-  <p:cSld>
-    <p:spTree>
-      <p:nvGrpSpPr>
-        <p:cNvPr id="1" name="">
-          <a:extLst>
-            <a:ext uri="{FF2B5EF4-FFF2-40B4-BE49-F238E27FC236}">
-              <a16:creationId xmlns:a16="http://schemas.microsoft.com/office/drawing/2014/main" id="{B823CF9F-B496-1049-8236-E1F216F587F5}"/>
-            </a:ext>
-          </a:extLst>
-        </p:cNvPr>
-        <p:cNvGrpSpPr/>
-        <p:nvPr/>
-      </p:nvGrpSpPr>
-      <p:grpSpPr>
-        <a:xfrm>
-          <a:off x="0" y="0"/>
-          <a:ext cx="0" cy="0"/>
-          <a:chOff x="0" y="0"/>
-          <a:chExt cx="0" cy="0"/>
-        </a:xfrm>
-      </p:grpSpPr>
-      <p:sp>
-        <p:nvSpPr>
-          <p:cNvPr id="2" name="Slide Image Placeholder 1">
-            <a:extLst>
-              <a:ext uri="{FF2B5EF4-FFF2-40B4-BE49-F238E27FC236}">
-                <a16:creationId xmlns:a16="http://schemas.microsoft.com/office/drawing/2014/main" id="{AFADA388-15E8-4827-EE54-6D499F79486B}"/>
-              </a:ext>
-            </a:extLst>
-          </p:cNvPr>
-          <p:cNvSpPr>
-            <a:spLocks noGrp="1" noRot="1" noChangeAspect="1"/>
-          </p:cNvSpPr>
-          <p:nvPr>
-            <p:ph type="sldImg"/>
-          </p:nvPr>
-        </p:nvSpPr>
-        <p:spPr/>
-      </p:sp>
-      <p:sp>
-        <p:nvSpPr>
-          <p:cNvPr id="3" name="Notes Placeholder 2">
-            <a:extLst>
-              <a:ext uri="{FF2B5EF4-FFF2-40B4-BE49-F238E27FC236}">
-                <a16:creationId xmlns:a16="http://schemas.microsoft.com/office/drawing/2014/main" id="{41F5183C-F598-EA00-085C-CC8812B4CBB5}"/>
-              </a:ext>
-            </a:extLst>
-          </p:cNvPr>
-          <p:cNvSpPr>
-            <a:spLocks noGrp="1"/>
-          </p:cNvSpPr>
-          <p:nvPr>
-            <p:ph type="body" idx="1"/>
-          </p:nvPr>
-        </p:nvSpPr>
-        <p:spPr/>
-        <p:txBody>
-          <a:bodyPr/>
-          <a:lstStyle/>
-          <a:p>
-            <a:endParaRPr lang="en-US" dirty="0"/>
-          </a:p>
-        </p:txBody>
-      </p:sp>
-      <p:sp>
-        <p:nvSpPr>
-          <p:cNvPr id="4" name="Slide Number Placeholder 3">
-            <a:extLst>
-              <a:ext uri="{FF2B5EF4-FFF2-40B4-BE49-F238E27FC236}">
-                <a16:creationId xmlns:a16="http://schemas.microsoft.com/office/drawing/2014/main" id="{98CFE232-92A2-DAB2-7FEC-63C49F4E3A7E}"/>
-              </a:ext>
-            </a:extLst>
-          </p:cNvPr>
-          <p:cNvSpPr>
-            <a:spLocks noGrp="1"/>
-          </p:cNvSpPr>
-          <p:nvPr>
-            <p:ph type="sldNum" sz="quarter" idx="10"/>
-          </p:nvPr>
-        </p:nvSpPr>
-        <p:spPr/>
-        <p:txBody>
-          <a:bodyPr/>
-          <a:lstStyle/>
-          <a:p>
-            <a:fld id="{F7021451-1387-4CA6-816F-3879F97B5CBC}" type="slidenum">
-              <a:rPr lang="en-US"/>
-              <a:t>14</a:t>
-            </a:fld>
-            <a:endParaRPr lang="en-US"/>
-          </a:p>
-        </p:txBody>
-      </p:sp>
-    </p:spTree>
-    <p:extLst>
-      <p:ext uri="{BB962C8B-B14F-4D97-AF65-F5344CB8AC3E}">
-        <p14:creationId xmlns:p14="http://schemas.microsoft.com/office/powerpoint/2010/main" val="3112221012"/>
-      </p:ext>
-    </p:extLst>
-  </p:cSld>
-  <p:clrMapOvr>
-    <a:masterClrMapping/>
-  </p:clrMapOvr>
-</p:notes>
-</file>
-
-<file path=ppt/notesSlides/notesSlide15.xml><?xml version="1.0" encoding="utf-8"?>
-<p:notes xmlns:a="http://schemas.openxmlformats.org/drawingml/2006/main" xmlns:r="http://schemas.openxmlformats.org/officeDocument/2006/relationships" xmlns:p="http://schemas.openxmlformats.org/presentationml/2006/main">
-  <p:cSld>
-    <p:spTree>
-      <p:nvGrpSpPr>
-        <p:cNvPr id="1" name="">
-          <a:extLst>
-            <a:ext uri="{FF2B5EF4-FFF2-40B4-BE49-F238E27FC236}">
-              <a16:creationId xmlns:a16="http://schemas.microsoft.com/office/drawing/2014/main" id="{27A08C35-FC1D-F62D-E47B-2EA2C5AFDE6A}"/>
-            </a:ext>
-          </a:extLst>
-        </p:cNvPr>
-        <p:cNvGrpSpPr/>
-        <p:nvPr/>
-      </p:nvGrpSpPr>
-      <p:grpSpPr>
-        <a:xfrm>
-          <a:off x="0" y="0"/>
-          <a:ext cx="0" cy="0"/>
-          <a:chOff x="0" y="0"/>
-          <a:chExt cx="0" cy="0"/>
-        </a:xfrm>
-      </p:grpSpPr>
-      <p:sp>
-        <p:nvSpPr>
-          <p:cNvPr id="2" name="Slide Image Placeholder 1">
-            <a:extLst>
-              <a:ext uri="{FF2B5EF4-FFF2-40B4-BE49-F238E27FC236}">
-                <a16:creationId xmlns:a16="http://schemas.microsoft.com/office/drawing/2014/main" id="{FDAFAFD1-C1C1-AAC0-014D-5A77EDD91061}"/>
-              </a:ext>
-            </a:extLst>
-          </p:cNvPr>
-          <p:cNvSpPr>
-            <a:spLocks noGrp="1" noRot="1" noChangeAspect="1"/>
-          </p:cNvSpPr>
-          <p:nvPr>
-            <p:ph type="sldImg"/>
-          </p:nvPr>
-        </p:nvSpPr>
-        <p:spPr/>
-      </p:sp>
-      <p:sp>
-        <p:nvSpPr>
-          <p:cNvPr id="3" name="Notes Placeholder 2">
-            <a:extLst>
-              <a:ext uri="{FF2B5EF4-FFF2-40B4-BE49-F238E27FC236}">
-                <a16:creationId xmlns:a16="http://schemas.microsoft.com/office/drawing/2014/main" id="{BD02E5E9-E2CF-4AE5-2938-D14DCE96778A}"/>
-              </a:ext>
-            </a:extLst>
-          </p:cNvPr>
-          <p:cNvSpPr>
-            <a:spLocks noGrp="1"/>
-          </p:cNvSpPr>
-          <p:nvPr>
-            <p:ph type="body" idx="1"/>
-          </p:nvPr>
-        </p:nvSpPr>
-        <p:spPr/>
-        <p:txBody>
-          <a:bodyPr/>
-          <a:lstStyle/>
-          <a:p>
-            <a:endParaRPr lang="en-US" dirty="0"/>
-          </a:p>
-        </p:txBody>
-      </p:sp>
-      <p:sp>
-        <p:nvSpPr>
-          <p:cNvPr id="4" name="Slide Number Placeholder 3">
-            <a:extLst>
-              <a:ext uri="{FF2B5EF4-FFF2-40B4-BE49-F238E27FC236}">
-                <a16:creationId xmlns:a16="http://schemas.microsoft.com/office/drawing/2014/main" id="{EDB96E94-95C7-5319-E05F-D32F609EE69B}"/>
-              </a:ext>
-            </a:extLst>
-          </p:cNvPr>
-          <p:cNvSpPr>
-            <a:spLocks noGrp="1"/>
-          </p:cNvSpPr>
-          <p:nvPr>
-            <p:ph type="sldNum" sz="quarter" idx="10"/>
-          </p:nvPr>
-        </p:nvSpPr>
-        <p:spPr/>
-        <p:txBody>
-          <a:bodyPr/>
-          <a:lstStyle/>
-          <a:p>
-            <a:fld id="{F7021451-1387-4CA6-816F-3879F97B5CBC}" type="slidenum">
-              <a:rPr lang="en-US"/>
-              <a:t>15</a:t>
-            </a:fld>
-            <a:endParaRPr lang="en-US"/>
-          </a:p>
-        </p:txBody>
-      </p:sp>
-    </p:spTree>
-    <p:extLst>
-      <p:ext uri="{BB962C8B-B14F-4D97-AF65-F5344CB8AC3E}">
-        <p14:creationId xmlns:p14="http://schemas.microsoft.com/office/powerpoint/2010/main" val="1843160749"/>
-      </p:ext>
-    </p:extLst>
-  </p:cSld>
-  <p:clrMapOvr>
-    <a:masterClrMapping/>
-  </p:clrMapOvr>
-</p:notes>
-</file>
-
-<file path=ppt/notesSlides/notesSlide16.xml><?xml version="1.0" encoding="utf-8"?>
-<p:notes xmlns:a="http://schemas.openxmlformats.org/drawingml/2006/main" xmlns:r="http://schemas.openxmlformats.org/officeDocument/2006/relationships" xmlns:p="http://schemas.openxmlformats.org/presentationml/2006/main">
-  <p:cSld>
-    <p:spTree>
-      <p:nvGrpSpPr>
-        <p:cNvPr id="1" name="">
-          <a:extLst>
-            <a:ext uri="{FF2B5EF4-FFF2-40B4-BE49-F238E27FC236}">
-              <a16:creationId xmlns:a16="http://schemas.microsoft.com/office/drawing/2014/main" id="{D58D6645-C247-C52E-7832-714573EAAD87}"/>
-            </a:ext>
-          </a:extLst>
-        </p:cNvPr>
-        <p:cNvGrpSpPr/>
-        <p:nvPr/>
-      </p:nvGrpSpPr>
-      <p:grpSpPr>
-        <a:xfrm>
-          <a:off x="0" y="0"/>
-          <a:ext cx="0" cy="0"/>
-          <a:chOff x="0" y="0"/>
-          <a:chExt cx="0" cy="0"/>
-        </a:xfrm>
-      </p:grpSpPr>
-      <p:sp>
-        <p:nvSpPr>
-          <p:cNvPr id="2" name="Slide Image Placeholder 1">
-            <a:extLst>
-              <a:ext uri="{FF2B5EF4-FFF2-40B4-BE49-F238E27FC236}">
-                <a16:creationId xmlns:a16="http://schemas.microsoft.com/office/drawing/2014/main" id="{3C0B7F29-35E4-6619-B327-F95E19634A8F}"/>
-              </a:ext>
-            </a:extLst>
-          </p:cNvPr>
-          <p:cNvSpPr>
-            <a:spLocks noGrp="1" noRot="1" noChangeAspect="1"/>
-          </p:cNvSpPr>
-          <p:nvPr>
-            <p:ph type="sldImg"/>
-          </p:nvPr>
-        </p:nvSpPr>
-        <p:spPr/>
-      </p:sp>
-      <p:sp>
-        <p:nvSpPr>
-          <p:cNvPr id="3" name="Notes Placeholder 2">
-            <a:extLst>
-              <a:ext uri="{FF2B5EF4-FFF2-40B4-BE49-F238E27FC236}">
-                <a16:creationId xmlns:a16="http://schemas.microsoft.com/office/drawing/2014/main" id="{173F7619-012B-A313-5B4D-AB5C319E1006}"/>
-              </a:ext>
-            </a:extLst>
-          </p:cNvPr>
-          <p:cNvSpPr>
-            <a:spLocks noGrp="1"/>
-          </p:cNvSpPr>
-          <p:nvPr>
-            <p:ph type="body" idx="1"/>
-          </p:nvPr>
-        </p:nvSpPr>
-        <p:spPr/>
-        <p:txBody>
-          <a:bodyPr/>
-          <a:lstStyle/>
-          <a:p>
-            <a:endParaRPr lang="en-US" dirty="0"/>
-          </a:p>
-        </p:txBody>
-      </p:sp>
-      <p:sp>
-        <p:nvSpPr>
-          <p:cNvPr id="4" name="Slide Number Placeholder 3">
-            <a:extLst>
-              <a:ext uri="{FF2B5EF4-FFF2-40B4-BE49-F238E27FC236}">
-                <a16:creationId xmlns:a16="http://schemas.microsoft.com/office/drawing/2014/main" id="{2E5759EB-CF44-764B-1745-562FAC9297C3}"/>
-              </a:ext>
-            </a:extLst>
-          </p:cNvPr>
-          <p:cNvSpPr>
-            <a:spLocks noGrp="1"/>
-          </p:cNvSpPr>
-          <p:nvPr>
-            <p:ph type="sldNum" sz="quarter" idx="10"/>
-          </p:nvPr>
-        </p:nvSpPr>
-        <p:spPr/>
-        <p:txBody>
-          <a:bodyPr/>
-          <a:lstStyle/>
-          <a:p>
-            <a:fld id="{F7021451-1387-4CA6-816F-3879F97B5CBC}" type="slidenum">
-              <a:rPr lang="en-US"/>
-              <a:t>16</a:t>
-            </a:fld>
-            <a:endParaRPr lang="en-US"/>
-          </a:p>
-        </p:txBody>
-      </p:sp>
-    </p:spTree>
-    <p:extLst>
-      <p:ext uri="{BB962C8B-B14F-4D97-AF65-F5344CB8AC3E}">
-        <p14:creationId xmlns:p14="http://schemas.microsoft.com/office/powerpoint/2010/main" val="707824393"/>
-      </p:ext>
-    </p:extLst>
-  </p:cSld>
-  <p:clrMapOvr>
-    <a:masterClrMapping/>
-  </p:clrMapOvr>
-</p:notes>
-</file>
-
-<file path=ppt/notesSlides/notesSlide17.xml><?xml version="1.0" encoding="utf-8"?>
-<p:notes xmlns:a="http://schemas.openxmlformats.org/drawingml/2006/main" xmlns:r="http://schemas.openxmlformats.org/officeDocument/2006/relationships" xmlns:p="http://schemas.openxmlformats.org/presentationml/2006/main">
-  <p:cSld>
-    <p:spTree>
-      <p:nvGrpSpPr>
-        <p:cNvPr id="1" name="">
-          <a:extLst>
-            <a:ext uri="{FF2B5EF4-FFF2-40B4-BE49-F238E27FC236}">
-              <a16:creationId xmlns:a16="http://schemas.microsoft.com/office/drawing/2014/main" id="{33509077-8BD8-E8F5-525A-57DB78E1148D}"/>
-            </a:ext>
-          </a:extLst>
-        </p:cNvPr>
-        <p:cNvGrpSpPr/>
-        <p:nvPr/>
-      </p:nvGrpSpPr>
-      <p:grpSpPr>
-        <a:xfrm>
-          <a:off x="0" y="0"/>
-          <a:ext cx="0" cy="0"/>
-          <a:chOff x="0" y="0"/>
-          <a:chExt cx="0" cy="0"/>
-        </a:xfrm>
-      </p:grpSpPr>
-      <p:sp>
-        <p:nvSpPr>
-          <p:cNvPr id="2" name="Slide Image Placeholder 1">
-            <a:extLst>
-              <a:ext uri="{FF2B5EF4-FFF2-40B4-BE49-F238E27FC236}">
-                <a16:creationId xmlns:a16="http://schemas.microsoft.com/office/drawing/2014/main" id="{AF95D433-7BCD-5991-DA02-7827CA24E468}"/>
-              </a:ext>
-            </a:extLst>
-          </p:cNvPr>
-          <p:cNvSpPr>
-            <a:spLocks noGrp="1" noRot="1" noChangeAspect="1"/>
-          </p:cNvSpPr>
-          <p:nvPr>
-            <p:ph type="sldImg"/>
-          </p:nvPr>
-        </p:nvSpPr>
-        <p:spPr/>
-      </p:sp>
-      <p:sp>
-        <p:nvSpPr>
-          <p:cNvPr id="3" name="Notes Placeholder 2">
-            <a:extLst>
-              <a:ext uri="{FF2B5EF4-FFF2-40B4-BE49-F238E27FC236}">
-                <a16:creationId xmlns:a16="http://schemas.microsoft.com/office/drawing/2014/main" id="{1AAEACBA-F05D-8ACF-A19C-E6829AB0C2D4}"/>
-              </a:ext>
-            </a:extLst>
-          </p:cNvPr>
-          <p:cNvSpPr>
-            <a:spLocks noGrp="1"/>
-          </p:cNvSpPr>
-          <p:nvPr>
-            <p:ph type="body" idx="1"/>
-          </p:nvPr>
-        </p:nvSpPr>
-        <p:spPr/>
-        <p:txBody>
-          <a:bodyPr/>
-          <a:lstStyle/>
-          <a:p>
-            <a:endParaRPr lang="en-US" dirty="0"/>
-          </a:p>
-        </p:txBody>
-      </p:sp>
-      <p:sp>
-        <p:nvSpPr>
-          <p:cNvPr id="4" name="Slide Number Placeholder 3">
-            <a:extLst>
-              <a:ext uri="{FF2B5EF4-FFF2-40B4-BE49-F238E27FC236}">
-                <a16:creationId xmlns:a16="http://schemas.microsoft.com/office/drawing/2014/main" id="{21DEF734-1648-DF2F-61DD-EB4297CD7101}"/>
-              </a:ext>
-            </a:extLst>
-          </p:cNvPr>
-          <p:cNvSpPr>
-            <a:spLocks noGrp="1"/>
-          </p:cNvSpPr>
-          <p:nvPr>
-            <p:ph type="sldNum" sz="quarter" idx="10"/>
-          </p:nvPr>
-        </p:nvSpPr>
-        <p:spPr/>
-        <p:txBody>
-          <a:bodyPr/>
-          <a:lstStyle/>
-          <a:p>
-            <a:fld id="{F7021451-1387-4CA6-816F-3879F97B5CBC}" type="slidenum">
-              <a:rPr lang="en-US"/>
-              <a:t>17</a:t>
-            </a:fld>
-            <a:endParaRPr lang="en-US"/>
-          </a:p>
-        </p:txBody>
-      </p:sp>
-    </p:spTree>
-    <p:extLst>
-      <p:ext uri="{BB962C8B-B14F-4D97-AF65-F5344CB8AC3E}">
-        <p14:creationId xmlns:p14="http://schemas.microsoft.com/office/powerpoint/2010/main" val="1635612145"/>
-      </p:ext>
-    </p:extLst>
-  </p:cSld>
-  <p:clrMapOvr>
-    <a:masterClrMapping/>
-  </p:clrMapOvr>
-</p:notes>
-</file>
-
-<file path=ppt/notesSlides/notesSlide18.xml><?xml version="1.0" encoding="utf-8"?>
-<p:notes xmlns:a="http://schemas.openxmlformats.org/drawingml/2006/main" xmlns:r="http://schemas.openxmlformats.org/officeDocument/2006/relationships" xmlns:p="http://schemas.openxmlformats.org/presentationml/2006/main">
-  <p:cSld>
-    <p:spTree>
-      <p:nvGrpSpPr>
-        <p:cNvPr id="1" name="">
-          <a:extLst>
-            <a:ext uri="{FF2B5EF4-FFF2-40B4-BE49-F238E27FC236}">
-              <a16:creationId xmlns:a16="http://schemas.microsoft.com/office/drawing/2014/main" id="{31CF46B0-2ECC-4849-23B3-21B4C3FAFC2C}"/>
-            </a:ext>
-          </a:extLst>
-        </p:cNvPr>
-        <p:cNvGrpSpPr/>
-        <p:nvPr/>
-      </p:nvGrpSpPr>
-      <p:grpSpPr>
-        <a:xfrm>
-          <a:off x="0" y="0"/>
-          <a:ext cx="0" cy="0"/>
-          <a:chOff x="0" y="0"/>
-          <a:chExt cx="0" cy="0"/>
-        </a:xfrm>
-      </p:grpSpPr>
-      <p:sp>
-        <p:nvSpPr>
-          <p:cNvPr id="2" name="Slide Image Placeholder 1">
-            <a:extLst>
-              <a:ext uri="{FF2B5EF4-FFF2-40B4-BE49-F238E27FC236}">
-                <a16:creationId xmlns:a16="http://schemas.microsoft.com/office/drawing/2014/main" id="{F8F2EE48-4DE6-724B-6210-6BEA42237D11}"/>
-              </a:ext>
-            </a:extLst>
-          </p:cNvPr>
-          <p:cNvSpPr>
-            <a:spLocks noGrp="1" noRot="1" noChangeAspect="1"/>
-          </p:cNvSpPr>
-          <p:nvPr>
-            <p:ph type="sldImg"/>
-          </p:nvPr>
-        </p:nvSpPr>
-        <p:spPr/>
-      </p:sp>
-      <p:sp>
-        <p:nvSpPr>
-          <p:cNvPr id="3" name="Notes Placeholder 2">
-            <a:extLst>
-              <a:ext uri="{FF2B5EF4-FFF2-40B4-BE49-F238E27FC236}">
-                <a16:creationId xmlns:a16="http://schemas.microsoft.com/office/drawing/2014/main" id="{42CC43D7-1E6C-8B09-F58F-F9E18CCCC276}"/>
-              </a:ext>
-            </a:extLst>
-          </p:cNvPr>
-          <p:cNvSpPr>
-            <a:spLocks noGrp="1"/>
-          </p:cNvSpPr>
-          <p:nvPr>
-            <p:ph type="body" idx="1"/>
-          </p:nvPr>
-        </p:nvSpPr>
-        <p:spPr/>
-        <p:txBody>
-          <a:bodyPr/>
-          <a:lstStyle/>
-          <a:p>
-            <a:endParaRPr lang="en-US" dirty="0"/>
-          </a:p>
-        </p:txBody>
-      </p:sp>
-      <p:sp>
-        <p:nvSpPr>
-          <p:cNvPr id="4" name="Slide Number Placeholder 3">
-            <a:extLst>
-              <a:ext uri="{FF2B5EF4-FFF2-40B4-BE49-F238E27FC236}">
-                <a16:creationId xmlns:a16="http://schemas.microsoft.com/office/drawing/2014/main" id="{7879E442-9FAA-88D5-88E3-2EE9128A2DE6}"/>
-              </a:ext>
-            </a:extLst>
-          </p:cNvPr>
-          <p:cNvSpPr>
-            <a:spLocks noGrp="1"/>
-          </p:cNvSpPr>
-          <p:nvPr>
-            <p:ph type="sldNum" sz="quarter" idx="10"/>
-          </p:nvPr>
-        </p:nvSpPr>
-        <p:spPr/>
-        <p:txBody>
-          <a:bodyPr/>
-          <a:lstStyle/>
-          <a:p>
-            <a:fld id="{F7021451-1387-4CA6-816F-3879F97B5CBC}" type="slidenum">
-              <a:rPr lang="en-US"/>
-              <a:t>18</a:t>
-            </a:fld>
-            <a:endParaRPr lang="en-US"/>
-          </a:p>
-        </p:txBody>
-      </p:sp>
-    </p:spTree>
-    <p:extLst>
-      <p:ext uri="{BB962C8B-B14F-4D97-AF65-F5344CB8AC3E}">
-        <p14:creationId xmlns:p14="http://schemas.microsoft.com/office/powerpoint/2010/main" val="2209662812"/>
-      </p:ext>
-    </p:extLst>
-  </p:cSld>
-  <p:clrMapOvr>
-    <a:masterClrMapping/>
-  </p:clrMapOvr>
-</p:notes>
-</file>
-
-<file path=ppt/notesSlides/notesSlide19.xml><?xml version="1.0" encoding="utf-8"?>
 <p:notes xmlns:a="http://schemas.openxmlformats.org/drawingml/2006/main" xmlns:r="http://schemas.openxmlformats.org/officeDocument/2006/relationships" xmlns:p="http://schemas.openxmlformats.org/presentationml/2006/main">
   <p:cSld>
     <p:spTree>
@@ -1355,6 +869,13 @@
           </p:nvPr>
         </p:nvSpPr>
         <p:spPr/>
+        <p:txBody>
+          <a:bodyPr/>
+          <a:lstStyle/>
+          <a:p>
+            <a:endParaRPr lang="es-419"/>
+          </a:p>
+        </p:txBody>
       </p:sp>
       <p:sp>
         <p:nvSpPr>
@@ -1404,7 +925,7 @@
           <a:p>
             <a:fld id="{F7021451-1387-4CA6-816F-3879F97B5CBC}" type="slidenum">
               <a:rPr lang="en-US"/>
-              <a:t>19</a:t>
+              <a:t>14</a:t>
             </a:fld>
             <a:endParaRPr lang="en-US"/>
           </a:p>
@@ -1414,6 +935,121 @@
     <p:extLst>
       <p:ext uri="{BB962C8B-B14F-4D97-AF65-F5344CB8AC3E}">
         <p14:creationId xmlns:p14="http://schemas.microsoft.com/office/powerpoint/2010/main" val="1694833441"/>
+      </p:ext>
+    </p:extLst>
+  </p:cSld>
+  <p:clrMapOvr>
+    <a:masterClrMapping/>
+  </p:clrMapOvr>
+</p:notes>
+</file>
+
+<file path=ppt/notesSlides/notesSlide15.xml><?xml version="1.0" encoding="utf-8"?>
+<p:notes xmlns:a="http://schemas.openxmlformats.org/drawingml/2006/main" xmlns:r="http://schemas.openxmlformats.org/officeDocument/2006/relationships" xmlns:p="http://schemas.openxmlformats.org/presentationml/2006/main">
+  <p:cSld>
+    <p:spTree>
+      <p:nvGrpSpPr>
+        <p:cNvPr id="1" name="">
+          <a:extLst>
+            <a:ext uri="{FF2B5EF4-FFF2-40B4-BE49-F238E27FC236}">
+              <a16:creationId xmlns:a16="http://schemas.microsoft.com/office/drawing/2014/main" id="{32783B39-1B24-EA80-035C-F03DBB7D16D4}"/>
+            </a:ext>
+          </a:extLst>
+        </p:cNvPr>
+        <p:cNvGrpSpPr/>
+        <p:nvPr/>
+      </p:nvGrpSpPr>
+      <p:grpSpPr>
+        <a:xfrm>
+          <a:off x="0" y="0"/>
+          <a:ext cx="0" cy="0"/>
+          <a:chOff x="0" y="0"/>
+          <a:chExt cx="0" cy="0"/>
+        </a:xfrm>
+      </p:grpSpPr>
+      <p:sp>
+        <p:nvSpPr>
+          <p:cNvPr id="2" name="Slide Image Placeholder 1">
+            <a:extLst>
+              <a:ext uri="{FF2B5EF4-FFF2-40B4-BE49-F238E27FC236}">
+                <a16:creationId xmlns:a16="http://schemas.microsoft.com/office/drawing/2014/main" id="{F078FB31-F90F-A214-8D93-CBFDE06C0938}"/>
+              </a:ext>
+            </a:extLst>
+          </p:cNvPr>
+          <p:cNvSpPr>
+            <a:spLocks noGrp="1" noRot="1" noChangeAspect="1"/>
+          </p:cNvSpPr>
+          <p:nvPr>
+            <p:ph type="sldImg"/>
+          </p:nvPr>
+        </p:nvSpPr>
+        <p:spPr/>
+        <p:txBody>
+          <a:bodyPr/>
+          <a:lstStyle/>
+          <a:p>
+            <a:endParaRPr lang="es-419"/>
+          </a:p>
+        </p:txBody>
+      </p:sp>
+      <p:sp>
+        <p:nvSpPr>
+          <p:cNvPr id="3" name="Notes Placeholder 2">
+            <a:extLst>
+              <a:ext uri="{FF2B5EF4-FFF2-40B4-BE49-F238E27FC236}">
+                <a16:creationId xmlns:a16="http://schemas.microsoft.com/office/drawing/2014/main" id="{4D686B29-ECD3-A788-E401-352BDB02FEDF}"/>
+              </a:ext>
+            </a:extLst>
+          </p:cNvPr>
+          <p:cNvSpPr>
+            <a:spLocks noGrp="1"/>
+          </p:cNvSpPr>
+          <p:nvPr>
+            <p:ph type="body" idx="1"/>
+          </p:nvPr>
+        </p:nvSpPr>
+        <p:spPr/>
+        <p:txBody>
+          <a:bodyPr/>
+          <a:lstStyle/>
+          <a:p>
+            <a:endParaRPr lang="en-US" dirty="0"/>
+          </a:p>
+        </p:txBody>
+      </p:sp>
+      <p:sp>
+        <p:nvSpPr>
+          <p:cNvPr id="4" name="Slide Number Placeholder 3">
+            <a:extLst>
+              <a:ext uri="{FF2B5EF4-FFF2-40B4-BE49-F238E27FC236}">
+                <a16:creationId xmlns:a16="http://schemas.microsoft.com/office/drawing/2014/main" id="{DF7D256B-DA5E-15EA-579A-1FFD24CF2D8B}"/>
+              </a:ext>
+            </a:extLst>
+          </p:cNvPr>
+          <p:cNvSpPr>
+            <a:spLocks noGrp="1"/>
+          </p:cNvSpPr>
+          <p:nvPr>
+            <p:ph type="sldNum" sz="quarter" idx="10"/>
+          </p:nvPr>
+        </p:nvSpPr>
+        <p:spPr/>
+        <p:txBody>
+          <a:bodyPr/>
+          <a:lstStyle/>
+          <a:p>
+            <a:fld id="{F7021451-1387-4CA6-816F-3879F97B5CBC}" type="slidenum">
+              <a:rPr lang="en-US"/>
+              <a:t>15</a:t>
+            </a:fld>
+            <a:endParaRPr lang="en-US"/>
+          </a:p>
+        </p:txBody>
+      </p:sp>
+    </p:spTree>
+    <p:extLst>
+      <p:ext uri="{BB962C8B-B14F-4D97-AF65-F5344CB8AC3E}">
+        <p14:creationId xmlns:p14="http://schemas.microsoft.com/office/powerpoint/2010/main" val="2740356989"/>
       </p:ext>
     </p:extLst>
   </p:cSld>
@@ -1451,6 +1087,13 @@
           </p:nvPr>
         </p:nvSpPr>
         <p:spPr/>
+        <p:txBody>
+          <a:bodyPr/>
+          <a:lstStyle/>
+          <a:p>
+            <a:endParaRPr lang="es-419"/>
+          </a:p>
+        </p:txBody>
       </p:sp>
       <p:sp>
         <p:nvSpPr>
@@ -1498,114 +1141,6 @@
     <p:extLst>
       <p:ext uri="{BB962C8B-B14F-4D97-AF65-F5344CB8AC3E}">
         <p14:creationId xmlns:p14="http://schemas.microsoft.com/office/powerpoint/2010/main" val="1024086991"/>
-      </p:ext>
-    </p:extLst>
-  </p:cSld>
-  <p:clrMapOvr>
-    <a:masterClrMapping/>
-  </p:clrMapOvr>
-</p:notes>
-</file>
-
-<file path=ppt/notesSlides/notesSlide20.xml><?xml version="1.0" encoding="utf-8"?>
-<p:notes xmlns:a="http://schemas.openxmlformats.org/drawingml/2006/main" xmlns:r="http://schemas.openxmlformats.org/officeDocument/2006/relationships" xmlns:p="http://schemas.openxmlformats.org/presentationml/2006/main">
-  <p:cSld>
-    <p:spTree>
-      <p:nvGrpSpPr>
-        <p:cNvPr id="1" name="">
-          <a:extLst>
-            <a:ext uri="{FF2B5EF4-FFF2-40B4-BE49-F238E27FC236}">
-              <a16:creationId xmlns:a16="http://schemas.microsoft.com/office/drawing/2014/main" id="{32783B39-1B24-EA80-035C-F03DBB7D16D4}"/>
-            </a:ext>
-          </a:extLst>
-        </p:cNvPr>
-        <p:cNvGrpSpPr/>
-        <p:nvPr/>
-      </p:nvGrpSpPr>
-      <p:grpSpPr>
-        <a:xfrm>
-          <a:off x="0" y="0"/>
-          <a:ext cx="0" cy="0"/>
-          <a:chOff x="0" y="0"/>
-          <a:chExt cx="0" cy="0"/>
-        </a:xfrm>
-      </p:grpSpPr>
-      <p:sp>
-        <p:nvSpPr>
-          <p:cNvPr id="2" name="Slide Image Placeholder 1">
-            <a:extLst>
-              <a:ext uri="{FF2B5EF4-FFF2-40B4-BE49-F238E27FC236}">
-                <a16:creationId xmlns:a16="http://schemas.microsoft.com/office/drawing/2014/main" id="{F078FB31-F90F-A214-8D93-CBFDE06C0938}"/>
-              </a:ext>
-            </a:extLst>
-          </p:cNvPr>
-          <p:cNvSpPr>
-            <a:spLocks noGrp="1" noRot="1" noChangeAspect="1"/>
-          </p:cNvSpPr>
-          <p:nvPr>
-            <p:ph type="sldImg"/>
-          </p:nvPr>
-        </p:nvSpPr>
-        <p:spPr/>
-      </p:sp>
-      <p:sp>
-        <p:nvSpPr>
-          <p:cNvPr id="3" name="Notes Placeholder 2">
-            <a:extLst>
-              <a:ext uri="{FF2B5EF4-FFF2-40B4-BE49-F238E27FC236}">
-                <a16:creationId xmlns:a16="http://schemas.microsoft.com/office/drawing/2014/main" id="{4D686B29-ECD3-A788-E401-352BDB02FEDF}"/>
-              </a:ext>
-            </a:extLst>
-          </p:cNvPr>
-          <p:cNvSpPr>
-            <a:spLocks noGrp="1"/>
-          </p:cNvSpPr>
-          <p:nvPr>
-            <p:ph type="body" idx="1"/>
-          </p:nvPr>
-        </p:nvSpPr>
-        <p:spPr/>
-        <p:txBody>
-          <a:bodyPr/>
-          <a:lstStyle/>
-          <a:p>
-            <a:endParaRPr lang="en-US" dirty="0"/>
-          </a:p>
-        </p:txBody>
-      </p:sp>
-      <p:sp>
-        <p:nvSpPr>
-          <p:cNvPr id="4" name="Slide Number Placeholder 3">
-            <a:extLst>
-              <a:ext uri="{FF2B5EF4-FFF2-40B4-BE49-F238E27FC236}">
-                <a16:creationId xmlns:a16="http://schemas.microsoft.com/office/drawing/2014/main" id="{DF7D256B-DA5E-15EA-579A-1FFD24CF2D8B}"/>
-              </a:ext>
-            </a:extLst>
-          </p:cNvPr>
-          <p:cNvSpPr>
-            <a:spLocks noGrp="1"/>
-          </p:cNvSpPr>
-          <p:nvPr>
-            <p:ph type="sldNum" sz="quarter" idx="10"/>
-          </p:nvPr>
-        </p:nvSpPr>
-        <p:spPr/>
-        <p:txBody>
-          <a:bodyPr/>
-          <a:lstStyle/>
-          <a:p>
-            <a:fld id="{F7021451-1387-4CA6-816F-3879F97B5CBC}" type="slidenum">
-              <a:rPr lang="en-US"/>
-              <a:t>20</a:t>
-            </a:fld>
-            <a:endParaRPr lang="en-US"/>
-          </a:p>
-        </p:txBody>
-      </p:sp>
-    </p:spTree>
-    <p:extLst>
-      <p:ext uri="{BB962C8B-B14F-4D97-AF65-F5344CB8AC3E}">
-        <p14:creationId xmlns:p14="http://schemas.microsoft.com/office/powerpoint/2010/main" val="2740356989"/>
       </p:ext>
     </p:extLst>
   </p:cSld>
@@ -1643,6 +1178,13 @@
           </p:nvPr>
         </p:nvSpPr>
         <p:spPr/>
+        <p:txBody>
+          <a:bodyPr/>
+          <a:lstStyle/>
+          <a:p>
+            <a:endParaRPr lang="es-419"/>
+          </a:p>
+        </p:txBody>
       </p:sp>
       <p:sp>
         <p:nvSpPr>
@@ -1727,6 +1269,13 @@
           </p:nvPr>
         </p:nvSpPr>
         <p:spPr/>
+        <p:txBody>
+          <a:bodyPr/>
+          <a:lstStyle/>
+          <a:p>
+            <a:endParaRPr lang="es-419"/>
+          </a:p>
+        </p:txBody>
       </p:sp>
       <p:sp>
         <p:nvSpPr>
@@ -1811,6 +1360,13 @@
           </p:nvPr>
         </p:nvSpPr>
         <p:spPr/>
+        <p:txBody>
+          <a:bodyPr/>
+          <a:lstStyle/>
+          <a:p>
+            <a:endParaRPr lang="es-419"/>
+          </a:p>
+        </p:txBody>
       </p:sp>
       <p:sp>
         <p:nvSpPr>
@@ -1895,6 +1451,13 @@
           </p:nvPr>
         </p:nvSpPr>
         <p:spPr/>
+        <p:txBody>
+          <a:bodyPr/>
+          <a:lstStyle/>
+          <a:p>
+            <a:endParaRPr lang="es-419"/>
+          </a:p>
+        </p:txBody>
       </p:sp>
       <p:sp>
         <p:nvSpPr>
@@ -1979,6 +1542,13 @@
           </p:nvPr>
         </p:nvSpPr>
         <p:spPr/>
+        <p:txBody>
+          <a:bodyPr/>
+          <a:lstStyle/>
+          <a:p>
+            <a:endParaRPr lang="es-419"/>
+          </a:p>
+        </p:txBody>
       </p:sp>
       <p:sp>
         <p:nvSpPr>
@@ -2063,6 +1633,13 @@
           </p:nvPr>
         </p:nvSpPr>
         <p:spPr/>
+        <p:txBody>
+          <a:bodyPr/>
+          <a:lstStyle/>
+          <a:p>
+            <a:endParaRPr lang="es-419"/>
+          </a:p>
+        </p:txBody>
       </p:sp>
       <p:sp>
         <p:nvSpPr>
@@ -2147,6 +1724,13 @@
           </p:nvPr>
         </p:nvSpPr>
         <p:spPr/>
+        <p:txBody>
+          <a:bodyPr/>
+          <a:lstStyle/>
+          <a:p>
+            <a:endParaRPr lang="es-419"/>
+          </a:p>
+        </p:txBody>
       </p:sp>
       <p:sp>
         <p:nvSpPr>
@@ -2342,7 +1926,7 @@
           <a:p>
             <a:fld id="{48A87A34-81AB-432B-8DAE-1953F412C126}" type="datetimeFigureOut">
               <a:rPr lang="en-US" smtClean="0"/>
-              <a:t>10/23/2025</a:t>
+              <a:t>11/6/2025</a:t>
             </a:fld>
             <a:endParaRPr lang="en-US" dirty="0"/>
           </a:p>
@@ -2554,7 +2138,7 @@
           <a:p>
             <a:fld id="{48A87A34-81AB-432B-8DAE-1953F412C126}" type="datetimeFigureOut">
               <a:rPr lang="en-US" smtClean="0"/>
-              <a:t>10/23/2025</a:t>
+              <a:t>11/6/2025</a:t>
             </a:fld>
             <a:endParaRPr lang="en-US" dirty="0"/>
           </a:p>
@@ -2770,7 +2354,7 @@
           <a:p>
             <a:fld id="{48A87A34-81AB-432B-8DAE-1953F412C126}" type="datetimeFigureOut">
               <a:rPr lang="en-US" smtClean="0"/>
-              <a:t>10/23/2025</a:t>
+              <a:t>11/6/2025</a:t>
             </a:fld>
             <a:endParaRPr lang="en-US" dirty="0"/>
           </a:p>
@@ -3075,7 +2659,7 @@
 
 <file path=ppt/slideLayouts/slideLayout19.xml><?xml version="1.0" encoding="utf-8"?>
 <p:sldLayout xmlns:a="http://schemas.openxmlformats.org/drawingml/2006/main" xmlns:r="http://schemas.openxmlformats.org/officeDocument/2006/relationships" xmlns:p="http://schemas.openxmlformats.org/presentationml/2006/main">
-  <p:cSld name="Slide 8 master">
+  <p:cSld name="Slide 9 master">
     <p:spTree>
       <p:nvGrpSpPr>
         <p:cNvPr id="1" name=""/>
@@ -3093,7 +2677,7 @@
     </p:spTree>
     <p:extLst>
       <p:ext uri="{BB962C8B-B14F-4D97-AF65-F5344CB8AC3E}">
-        <p14:creationId xmlns:p14="http://schemas.microsoft.com/office/powerpoint/2010/main" val="863669776"/>
+        <p14:creationId xmlns:p14="http://schemas.microsoft.com/office/powerpoint/2010/main" val="2472901343"/>
       </p:ext>
     </p:extLst>
   </p:cSld>
@@ -3212,7 +2796,7 @@
           <a:p>
             <a:fld id="{48A87A34-81AB-432B-8DAE-1953F412C126}" type="datetimeFigureOut">
               <a:rPr lang="en-US" smtClean="0"/>
-              <a:t>10/23/2025</a:t>
+              <a:t>11/6/2025</a:t>
             </a:fld>
             <a:endParaRPr lang="en-US" dirty="0"/>
           </a:p>
@@ -3306,36 +2890,6 @@
 </file>
 
 <file path=ppt/slideLayouts/slideLayout20.xml><?xml version="1.0" encoding="utf-8"?>
-<p:sldLayout xmlns:a="http://schemas.openxmlformats.org/drawingml/2006/main" xmlns:r="http://schemas.openxmlformats.org/officeDocument/2006/relationships" xmlns:p="http://schemas.openxmlformats.org/presentationml/2006/main">
-  <p:cSld name="Slide 9 master">
-    <p:spTree>
-      <p:nvGrpSpPr>
-        <p:cNvPr id="1" name=""/>
-        <p:cNvGrpSpPr/>
-        <p:nvPr/>
-      </p:nvGrpSpPr>
-      <p:grpSpPr>
-        <a:xfrm>
-          <a:off x="0" y="0"/>
-          <a:ext cx="0" cy="0"/>
-          <a:chOff x="0" y="0"/>
-          <a:chExt cx="0" cy="0"/>
-        </a:xfrm>
-      </p:grpSpPr>
-    </p:spTree>
-    <p:extLst>
-      <p:ext uri="{BB962C8B-B14F-4D97-AF65-F5344CB8AC3E}">
-        <p14:creationId xmlns:p14="http://schemas.microsoft.com/office/powerpoint/2010/main" val="2472901343"/>
-      </p:ext>
-    </p:extLst>
-  </p:cSld>
-  <p:clrMapOvr>
-    <a:masterClrMapping/>
-  </p:clrMapOvr>
-</p:sldLayout>
-</file>
-
-<file path=ppt/slideLayouts/slideLayout21.xml><?xml version="1.0" encoding="utf-8"?>
 <p:sldLayout xmlns:a="http://schemas.openxmlformats.org/drawingml/2006/main" xmlns:r="http://schemas.openxmlformats.org/officeDocument/2006/relationships" xmlns:p="http://schemas.openxmlformats.org/presentationml/2006/main">
   <p:cSld name="Slide 10 master">
     <p:spTree>
@@ -3552,7 +3106,7 @@
           <a:p>
             <a:fld id="{48A87A34-81AB-432B-8DAE-1953F412C126}" type="datetimeFigureOut">
               <a:rPr lang="en-US" smtClean="0"/>
-              <a:t>10/23/2025</a:t>
+              <a:t>11/6/2025</a:t>
             </a:fld>
             <a:endParaRPr lang="en-US" dirty="0"/>
           </a:p>
@@ -3821,7 +3375,7 @@
           <a:p>
             <a:fld id="{48A87A34-81AB-432B-8DAE-1953F412C126}" type="datetimeFigureOut">
               <a:rPr lang="en-US" smtClean="0"/>
-              <a:t>10/23/2025</a:t>
+              <a:t>11/6/2025</a:t>
             </a:fld>
             <a:endParaRPr lang="en-US" dirty="0"/>
           </a:p>
@@ -4238,7 +3792,7 @@
           <a:p>
             <a:fld id="{48A87A34-81AB-432B-8DAE-1953F412C126}" type="datetimeFigureOut">
               <a:rPr lang="en-US" smtClean="0"/>
-              <a:t>10/23/2025</a:t>
+              <a:t>11/6/2025</a:t>
             </a:fld>
             <a:endParaRPr lang="en-US" dirty="0"/>
           </a:p>
@@ -4388,7 +3942,7 @@
           <a:p>
             <a:fld id="{48A87A34-81AB-432B-8DAE-1953F412C126}" type="datetimeFigureOut">
               <a:rPr lang="en-US" smtClean="0"/>
-              <a:t>10/23/2025</a:t>
+              <a:t>11/6/2025</a:t>
             </a:fld>
             <a:endParaRPr lang="en-US" dirty="0"/>
           </a:p>
@@ -4515,7 +4069,7 @@
           <a:p>
             <a:fld id="{48A87A34-81AB-432B-8DAE-1953F412C126}" type="datetimeFigureOut">
               <a:rPr lang="en-US" smtClean="0"/>
-              <a:t>10/23/2025</a:t>
+              <a:t>11/6/2025</a:t>
             </a:fld>
             <a:endParaRPr lang="en-US" dirty="0"/>
           </a:p>
@@ -4767,7 +4321,7 @@
           <a:p>
             <a:fld id="{48A87A34-81AB-432B-8DAE-1953F412C126}" type="datetimeFigureOut">
               <a:rPr lang="en-US" smtClean="0"/>
-              <a:t>10/23/2025</a:t>
+              <a:t>11/6/2025</a:t>
             </a:fld>
             <a:endParaRPr lang="en-US" dirty="0"/>
           </a:p>
@@ -4948,6 +4502,13 @@
               <a:schemeClr val="lt1"/>
             </a:fontRef>
           </p:style>
+          <p:txBody>
+            <a:bodyPr/>
+            <a:lstStyle/>
+            <a:p>
+              <a:endParaRPr lang="es-419"/>
+            </a:p>
+          </p:txBody>
         </p:sp>
         <p:sp>
           <p:nvSpPr>
@@ -5009,6 +4570,13 @@
               <a:schemeClr val="lt1"/>
             </a:fontRef>
           </p:style>
+          <p:txBody>
+            <a:bodyPr/>
+            <a:lstStyle/>
+            <a:p>
+              <a:endParaRPr lang="es-419"/>
+            </a:p>
+          </p:txBody>
         </p:sp>
       </p:grpSp>
       <p:sp>
@@ -5214,7 +4782,7 @@
             <a:fld id="{48A87A34-81AB-432B-8DAE-1953F412C126}" type="datetimeFigureOut">
               <a:rPr lang="en-US" smtClean="0"/>
               <a:pPr/>
-              <a:t>10/23/2025</a:t>
+              <a:t>11/6/2025</a:t>
             </a:fld>
             <a:endParaRPr lang="en-US" dirty="0"/>
           </a:p>
@@ -5399,7 +4967,7 @@
           <p:nvPr/>
         </p:nvPicPr>
         <p:blipFill rotWithShape="1">
-          <a:blip r:embed="rId23">
+          <a:blip r:embed="rId22">
             <a:extLst>
               <a:ext uri="{28A0092B-C50C-407E-A947-70E740481C1C}">
                 <a14:useLocalDpi xmlns:a14="http://schemas.microsoft.com/office/drawing/2010/main" val="0"/>
@@ -5550,7 +5118,7 @@
             <a:fld id="{48A87A34-81AB-432B-8DAE-1953F412C126}" type="datetimeFigureOut">
               <a:rPr lang="en-US" smtClean="0"/>
               <a:pPr/>
-              <a:t>10/23/2025</a:t>
+              <a:t>11/6/2025</a:t>
             </a:fld>
             <a:endParaRPr lang="en-US" dirty="0"/>
           </a:p>
@@ -5697,9 +5265,8 @@
     <p:sldLayoutId id="2147483742" r:id="rId16"/>
     <p:sldLayoutId id="2147483743" r:id="rId17"/>
     <p:sldLayoutId id="2147483744" r:id="rId18"/>
-    <p:sldLayoutId id="2147483745" r:id="rId19"/>
-    <p:sldLayoutId id="2147483746" r:id="rId20"/>
-    <p:sldLayoutId id="2147483747" r:id="rId21"/>
+    <p:sldLayoutId id="2147483746" r:id="rId19"/>
+    <p:sldLayoutId id="2147483747" r:id="rId20"/>
   </p:sldLayoutIdLst>
   <p:hf sldNum="0" hdr="0" ftr="0" dt="0"/>
   <p:txStyles>
@@ -6293,10 +5860,16 @@
 
 <file path=ppt/slides/slide10.xml><?xml version="1.0" encoding="utf-8"?>
 <p:sld xmlns:a="http://schemas.openxmlformats.org/drawingml/2006/main" xmlns:r="http://schemas.openxmlformats.org/officeDocument/2006/relationships" xmlns:p="http://schemas.openxmlformats.org/presentationml/2006/main">
-  <p:cSld name="Slide 10">
+  <p:cSld>
     <p:spTree>
       <p:nvGrpSpPr>
-        <p:cNvPr id="1" name=""/>
+        <p:cNvPr id="1" name="">
+          <a:extLst>
+            <a:ext uri="{FF2B5EF4-FFF2-40B4-BE49-F238E27FC236}">
+              <a16:creationId xmlns:a16="http://schemas.microsoft.com/office/drawing/2014/main" id="{12DB9498-13B9-10A3-57B0-29D3E01FB8D8}"/>
+            </a:ext>
+          </a:extLst>
+        </p:cNvPr>
         <p:cNvGrpSpPr/>
         <p:nvPr/>
       </p:nvGrpSpPr>
@@ -6310,14 +5883,20 @@
       </p:grpSpPr>
       <p:sp>
         <p:nvSpPr>
-          <p:cNvPr id="2" name="Text 0"/>
+          <p:cNvPr id="2" name="Text 0">
+            <a:extLst>
+              <a:ext uri="{FF2B5EF4-FFF2-40B4-BE49-F238E27FC236}">
+                <a16:creationId xmlns:a16="http://schemas.microsoft.com/office/drawing/2014/main" id="{E051A928-6668-6D0D-9DB4-D4A73795EBEB}"/>
+              </a:ext>
+            </a:extLst>
+          </p:cNvPr>
           <p:cNvSpPr/>
           <p:nvPr/>
         </p:nvSpPr>
         <p:spPr>
           <a:xfrm>
-            <a:off x="837724" y="769263"/>
-            <a:ext cx="7053143" cy="563285"/>
+            <a:off x="1735343" y="159868"/>
+            <a:ext cx="5063353" cy="505716"/>
           </a:xfrm>
           <a:prstGeom prst="rect">
             <a:avLst/>
@@ -6344,15 +5923,70 @@
                 <a:ea typeface="Source Serif 4 Semi Bold" pitchFamily="34" charset="-122"/>
                 <a:cs typeface="Source Serif 4 Semi Bold" pitchFamily="34" charset="-120"/>
               </a:rPr>
-              <a:t>Expansión Futura de MediTriage</a:t>
-            </a:r>
-            <a:endParaRPr lang="es-419" sz="3500" noProof="0" dirty="0"/>
+              <a:t>Diagrama de Base de Datos</a:t>
+            </a:r>
+          </a:p>
+        </p:txBody>
+      </p:sp>
+      <p:sp>
+        <p:nvSpPr>
+          <p:cNvPr id="20" name="Text 7">
+            <a:extLst>
+              <a:ext uri="{FF2B5EF4-FFF2-40B4-BE49-F238E27FC236}">
+                <a16:creationId xmlns:a16="http://schemas.microsoft.com/office/drawing/2014/main" id="{DFB58816-F6C4-926D-2896-3426C29EB3E1}"/>
+              </a:ext>
+            </a:extLst>
+          </p:cNvPr>
+          <p:cNvSpPr/>
+          <p:nvPr/>
+        </p:nvSpPr>
+        <p:spPr>
+          <a:xfrm>
+            <a:off x="773495" y="1332548"/>
+            <a:ext cx="12287250" cy="505716"/>
+          </a:xfrm>
+          <a:prstGeom prst="rect">
+            <a:avLst/>
+          </a:prstGeom>
+          <a:noFill/>
+          <a:ln/>
+        </p:spPr>
+        <p:txBody>
+          <a:bodyPr vert="horz" wrap="square" lIns="0" tIns="0" rIns="0" bIns="0" rtlCol="0" anchor="t">
+            <a:spAutoFit/>
+          </a:bodyPr>
+          <a:lstStyle/>
+          <a:p>
+            <a:pPr marL="246063" lvl="1" defTabSz="404813">
+              <a:lnSpc>
+                <a:spcPct val="150000"/>
+              </a:lnSpc>
+              <a:tabLst>
+                <a:tab pos="16225838" algn="l"/>
+                <a:tab pos="16592550" algn="l"/>
+                <a:tab pos="17124363" algn="l"/>
+              </a:tabLst>
+            </a:pPr>
+            <a:endParaRPr lang="es-419" sz="2400" noProof="0" dirty="0">
+              <a:solidFill>
+                <a:srgbClr val="272525"/>
+              </a:solidFill>
+              <a:latin typeface="Source Serif 4 Semi Bold" pitchFamily="34" charset="0"/>
+              <a:ea typeface="Source Serif 4 Semi Bold" pitchFamily="34" charset="-122"/>
+              <a:cs typeface="Source Serif 4 Semi Bold" pitchFamily="34" charset="-120"/>
+            </a:endParaRPr>
           </a:p>
         </p:txBody>
       </p:sp>
       <p:pic>
         <p:nvPicPr>
-          <p:cNvPr id="6" name="Image 1" descr="preencoded.png"/>
+          <p:cNvPr id="5" name="Imagen 4" descr="Diagrama&#10;&#10;El contenido generado por IA puede ser incorrecto.">
+            <a:extLst>
+              <a:ext uri="{FF2B5EF4-FFF2-40B4-BE49-F238E27FC236}">
+                <a16:creationId xmlns:a16="http://schemas.microsoft.com/office/drawing/2014/main" id="{7272997C-A0C4-D862-48CF-718F21BA252C}"/>
+              </a:ext>
+            </a:extLst>
+          </p:cNvPr>
           <p:cNvPicPr>
             <a:picLocks noChangeAspect="1"/>
           </p:cNvPicPr>
@@ -6366,527 +6000,20 @@
         </p:blipFill>
         <p:spPr>
           <a:xfrm>
-            <a:off x="1390174" y="1487568"/>
-            <a:ext cx="957501" cy="1148953"/>
+            <a:off x="292365" y="826005"/>
+            <a:ext cx="14045669" cy="7259216"/>
           </a:xfrm>
           <a:prstGeom prst="rect">
             <a:avLst/>
           </a:prstGeom>
         </p:spPr>
       </p:pic>
-      <p:sp>
-        <p:nvSpPr>
-          <p:cNvPr id="7" name="Text 3"/>
-          <p:cNvSpPr/>
-          <p:nvPr/>
-        </p:nvSpPr>
-        <p:spPr>
-          <a:xfrm>
-            <a:off x="2539127" y="1679020"/>
-            <a:ext cx="4789773" cy="312265"/>
-          </a:xfrm>
-          <a:prstGeom prst="rect">
-            <a:avLst/>
-          </a:prstGeom>
-          <a:noFill/>
-          <a:ln/>
-        </p:spPr>
-        <p:txBody>
-          <a:bodyPr wrap="none" lIns="0" tIns="0" rIns="0" bIns="0" rtlCol="0" anchor="t">
-            <a:spAutoFit/>
-          </a:bodyPr>
-          <a:lstStyle/>
-          <a:p>
-            <a:pPr marL="0" indent="0" algn="l">
-              <a:lnSpc>
-                <a:spcPts val="2200"/>
-              </a:lnSpc>
-              <a:buNone/>
-            </a:pPr>
-            <a:r>
-              <a:rPr lang="es-419" sz="2800" noProof="0" dirty="0">
-                <a:solidFill>
-                  <a:srgbClr val="272525"/>
-                </a:solidFill>
-                <a:latin typeface="Source Serif 4 Semi Bold" pitchFamily="34" charset="0"/>
-                <a:ea typeface="Source Serif 4 Semi Bold" pitchFamily="34" charset="-122"/>
-                <a:cs typeface="Source Serif 4 Semi Bold" pitchFamily="34" charset="-120"/>
-              </a:rPr>
-              <a:t>Integración de Derivaciones</a:t>
-            </a:r>
-            <a:endParaRPr lang="es-419" sz="2800" noProof="0" dirty="0"/>
-          </a:p>
-        </p:txBody>
-      </p:sp>
-      <p:sp>
-        <p:nvSpPr>
-          <p:cNvPr id="8" name="Text 4"/>
-          <p:cNvSpPr/>
-          <p:nvPr/>
-        </p:nvSpPr>
-        <p:spPr>
-          <a:xfrm>
-            <a:off x="2539127" y="2075498"/>
-            <a:ext cx="11791690" cy="323165"/>
-          </a:xfrm>
-          <a:prstGeom prst="rect">
-            <a:avLst/>
-          </a:prstGeom>
-          <a:noFill/>
-          <a:ln/>
-        </p:spPr>
-        <p:txBody>
-          <a:bodyPr wrap="none" lIns="0" tIns="0" rIns="0" bIns="0" rtlCol="0" anchor="t">
-            <a:spAutoFit/>
-          </a:bodyPr>
-          <a:lstStyle/>
-          <a:p>
-            <a:pPr marL="0" indent="0" algn="l">
-              <a:lnSpc>
-                <a:spcPts val="2400"/>
-              </a:lnSpc>
-              <a:buNone/>
-            </a:pPr>
-            <a:r>
-              <a:rPr lang="es-419" sz="2400" noProof="0" dirty="0">
-                <a:solidFill>
-                  <a:srgbClr val="272525"/>
-                </a:solidFill>
-                <a:latin typeface="Source Sans 3" pitchFamily="34" charset="0"/>
-                <a:ea typeface="Source Sans 3" pitchFamily="34" charset="-122"/>
-                <a:cs typeface="Source Sans 3" pitchFamily="34" charset="-120"/>
-              </a:rPr>
-              <a:t>Conexión con sistemas de </a:t>
-            </a:r>
-            <a:r>
-              <a:rPr lang="es-419" sz="2400" b="1" noProof="0" dirty="0">
-                <a:solidFill>
-                  <a:srgbClr val="272525"/>
-                </a:solidFill>
-                <a:latin typeface="Source Sans 3" pitchFamily="34" charset="0"/>
-                <a:ea typeface="Source Sans 3" pitchFamily="34" charset="-122"/>
-                <a:cs typeface="Source Sans 3" pitchFamily="34" charset="-120"/>
-              </a:rPr>
-              <a:t>FONASA e ISAPRE</a:t>
-            </a:r>
-            <a:r>
-              <a:rPr lang="es-419" sz="2400" noProof="0" dirty="0">
-                <a:solidFill>
-                  <a:srgbClr val="272525"/>
-                </a:solidFill>
-                <a:latin typeface="Source Sans 3" pitchFamily="34" charset="0"/>
-                <a:ea typeface="Source Sans 3" pitchFamily="34" charset="-122"/>
-                <a:cs typeface="Source Sans 3" pitchFamily="34" charset="-120"/>
-              </a:rPr>
-              <a:t> para simplificar las derivaciones y coordinaciones.</a:t>
-            </a:r>
-            <a:endParaRPr lang="es-419" sz="2400" noProof="0" dirty="0"/>
-          </a:p>
-        </p:txBody>
-      </p:sp>
-      <p:pic>
-        <p:nvPicPr>
-          <p:cNvPr id="9" name="Image 2" descr="preencoded.png"/>
-          <p:cNvPicPr>
-            <a:picLocks noChangeAspect="1"/>
-          </p:cNvPicPr>
-          <p:nvPr/>
-        </p:nvPicPr>
-        <p:blipFill>
-          <a:blip r:embed="rId4"/>
-          <a:stretch>
-            <a:fillRect/>
-          </a:stretch>
-        </p:blipFill>
-        <p:spPr>
-          <a:xfrm>
-            <a:off x="1390174" y="2636521"/>
-            <a:ext cx="957501" cy="1148953"/>
-          </a:xfrm>
-          <a:prstGeom prst="rect">
-            <a:avLst/>
-          </a:prstGeom>
-        </p:spPr>
-      </p:pic>
-      <p:sp>
-        <p:nvSpPr>
-          <p:cNvPr id="10" name="Text 5"/>
-          <p:cNvSpPr/>
-          <p:nvPr/>
-        </p:nvSpPr>
-        <p:spPr>
-          <a:xfrm>
-            <a:off x="2539127" y="2827973"/>
-            <a:ext cx="3395160" cy="312265"/>
-          </a:xfrm>
-          <a:prstGeom prst="rect">
-            <a:avLst/>
-          </a:prstGeom>
-          <a:noFill/>
-          <a:ln/>
-        </p:spPr>
-        <p:txBody>
-          <a:bodyPr wrap="none" lIns="0" tIns="0" rIns="0" bIns="0" rtlCol="0" anchor="t">
-            <a:spAutoFit/>
-          </a:bodyPr>
-          <a:lstStyle/>
-          <a:p>
-            <a:pPr marL="0" indent="0" algn="l">
-              <a:lnSpc>
-                <a:spcPts val="2200"/>
-              </a:lnSpc>
-              <a:buNone/>
-            </a:pPr>
-            <a:r>
-              <a:rPr lang="es-419" sz="2800" noProof="0" dirty="0">
-                <a:solidFill>
-                  <a:srgbClr val="272525"/>
-                </a:solidFill>
-                <a:latin typeface="Source Serif 4 Semi Bold" pitchFamily="34" charset="0"/>
-                <a:ea typeface="Source Serif 4 Semi Bold" pitchFamily="34" charset="-122"/>
-                <a:cs typeface="Source Serif 4 Semi Bold" pitchFamily="34" charset="-120"/>
-              </a:rPr>
-              <a:t>Agenda Compartida</a:t>
-            </a:r>
-            <a:endParaRPr lang="es-419" sz="2800" noProof="0" dirty="0"/>
-          </a:p>
-        </p:txBody>
-      </p:sp>
-      <p:sp>
-        <p:nvSpPr>
-          <p:cNvPr id="11" name="Text 6"/>
-          <p:cNvSpPr/>
-          <p:nvPr/>
-        </p:nvSpPr>
-        <p:spPr>
-          <a:xfrm>
-            <a:off x="2539127" y="3224451"/>
-            <a:ext cx="11791690" cy="630942"/>
-          </a:xfrm>
-          <a:prstGeom prst="rect">
-            <a:avLst/>
-          </a:prstGeom>
-          <a:noFill/>
-          <a:ln/>
-        </p:spPr>
-        <p:txBody>
-          <a:bodyPr wrap="square" lIns="0" tIns="0" rIns="0" bIns="0" rtlCol="0" anchor="t">
-            <a:spAutoFit/>
-          </a:bodyPr>
-          <a:lstStyle/>
-          <a:p>
-            <a:pPr marL="0" indent="0" algn="l">
-              <a:lnSpc>
-                <a:spcPts val="2400"/>
-              </a:lnSpc>
-              <a:buNone/>
-            </a:pPr>
-            <a:r>
-              <a:rPr lang="es-419" sz="2400" noProof="0" dirty="0">
-                <a:solidFill>
-                  <a:srgbClr val="272525"/>
-                </a:solidFill>
-                <a:latin typeface="Source Sans 3" pitchFamily="34" charset="0"/>
-                <a:ea typeface="Source Sans 3" pitchFamily="34" charset="-122"/>
-                <a:cs typeface="Source Sans 3" pitchFamily="34" charset="-120"/>
-              </a:rPr>
-              <a:t>Funcionalidad que permitirá a médicos y centros de salud </a:t>
-            </a:r>
-            <a:r>
-              <a:rPr lang="es-419" sz="2400" b="1" noProof="0" dirty="0">
-                <a:solidFill>
-                  <a:srgbClr val="272525"/>
-                </a:solidFill>
-                <a:latin typeface="Source Sans 3" pitchFamily="34" charset="0"/>
-                <a:ea typeface="Source Sans 3" pitchFamily="34" charset="-122"/>
-                <a:cs typeface="Source Sans 3" pitchFamily="34" charset="-120"/>
-              </a:rPr>
-              <a:t>compartir sus agendas</a:t>
-            </a:r>
-            <a:r>
-              <a:rPr lang="es-419" sz="2400" noProof="0" dirty="0">
-                <a:solidFill>
-                  <a:srgbClr val="272525"/>
-                </a:solidFill>
-                <a:latin typeface="Source Sans 3" pitchFamily="34" charset="0"/>
-                <a:ea typeface="Source Sans 3" pitchFamily="34" charset="-122"/>
-                <a:cs typeface="Source Sans 3" pitchFamily="34" charset="-120"/>
-              </a:rPr>
-              <a:t> de forma sincronizada.</a:t>
-            </a:r>
-            <a:endParaRPr lang="es-419" sz="2400" noProof="0" dirty="0"/>
-          </a:p>
-        </p:txBody>
-      </p:sp>
-      <p:pic>
-        <p:nvPicPr>
-          <p:cNvPr id="12" name="Image 3" descr="preencoded.png"/>
-          <p:cNvPicPr>
-            <a:picLocks noChangeAspect="1"/>
-          </p:cNvPicPr>
-          <p:nvPr/>
-        </p:nvPicPr>
-        <p:blipFill>
-          <a:blip r:embed="rId5"/>
-          <a:stretch>
-            <a:fillRect/>
-          </a:stretch>
-        </p:blipFill>
-        <p:spPr>
-          <a:xfrm>
-            <a:off x="1390174" y="3785474"/>
-            <a:ext cx="957501" cy="1148953"/>
-          </a:xfrm>
-          <a:prstGeom prst="rect">
-            <a:avLst/>
-          </a:prstGeom>
-        </p:spPr>
-      </p:pic>
-      <p:sp>
-        <p:nvSpPr>
-          <p:cNvPr id="13" name="Text 7"/>
-          <p:cNvSpPr/>
-          <p:nvPr/>
-        </p:nvSpPr>
-        <p:spPr>
-          <a:xfrm>
-            <a:off x="2539127" y="3976926"/>
-            <a:ext cx="2306722" cy="312265"/>
-          </a:xfrm>
-          <a:prstGeom prst="rect">
-            <a:avLst/>
-          </a:prstGeom>
-          <a:noFill/>
-          <a:ln/>
-        </p:spPr>
-        <p:txBody>
-          <a:bodyPr wrap="none" lIns="0" tIns="0" rIns="0" bIns="0" rtlCol="0" anchor="t">
-            <a:spAutoFit/>
-          </a:bodyPr>
-          <a:lstStyle/>
-          <a:p>
-            <a:pPr marL="0" indent="0" algn="l">
-              <a:lnSpc>
-                <a:spcPts val="2200"/>
-              </a:lnSpc>
-              <a:buNone/>
-            </a:pPr>
-            <a:r>
-              <a:rPr lang="es-419" sz="2800" noProof="0" dirty="0">
-                <a:solidFill>
-                  <a:srgbClr val="272525"/>
-                </a:solidFill>
-                <a:latin typeface="Source Serif 4 Semi Bold" pitchFamily="34" charset="0"/>
-                <a:ea typeface="Source Serif 4 Semi Bold" pitchFamily="34" charset="-122"/>
-                <a:cs typeface="Source Serif 4 Semi Bold" pitchFamily="34" charset="-120"/>
-              </a:rPr>
-              <a:t>Telemedicina</a:t>
-            </a:r>
-            <a:endParaRPr lang="es-419" sz="2800" noProof="0" dirty="0"/>
-          </a:p>
-        </p:txBody>
-      </p:sp>
-      <p:sp>
-        <p:nvSpPr>
-          <p:cNvPr id="14" name="Text 8"/>
-          <p:cNvSpPr/>
-          <p:nvPr/>
-        </p:nvSpPr>
-        <p:spPr>
-          <a:xfrm>
-            <a:off x="2539127" y="4373405"/>
-            <a:ext cx="11123238" cy="323165"/>
-          </a:xfrm>
-          <a:prstGeom prst="rect">
-            <a:avLst/>
-          </a:prstGeom>
-          <a:noFill/>
-          <a:ln/>
-        </p:spPr>
-        <p:txBody>
-          <a:bodyPr wrap="none" lIns="0" tIns="0" rIns="0" bIns="0" rtlCol="0" anchor="t">
-            <a:spAutoFit/>
-          </a:bodyPr>
-          <a:lstStyle/>
-          <a:p>
-            <a:pPr marL="0" indent="0" algn="l">
-              <a:lnSpc>
-                <a:spcPts val="2400"/>
-              </a:lnSpc>
-              <a:buNone/>
-            </a:pPr>
-            <a:r>
-              <a:rPr lang="es-419" sz="2400" noProof="0" dirty="0">
-                <a:solidFill>
-                  <a:srgbClr val="272525"/>
-                </a:solidFill>
-                <a:latin typeface="Source Sans 3" pitchFamily="34" charset="0"/>
-                <a:ea typeface="Source Sans 3" pitchFamily="34" charset="-122"/>
-                <a:cs typeface="Source Sans 3" pitchFamily="34" charset="-120"/>
-              </a:rPr>
-              <a:t>Incorporación de un módulo de </a:t>
-            </a:r>
-            <a:r>
-              <a:rPr lang="es-419" sz="2400" b="1" noProof="0" dirty="0">
-                <a:solidFill>
-                  <a:srgbClr val="272525"/>
-                </a:solidFill>
-                <a:latin typeface="Source Sans 3" pitchFamily="34" charset="0"/>
-                <a:ea typeface="Source Sans 3" pitchFamily="34" charset="-122"/>
-                <a:cs typeface="Source Sans 3" pitchFamily="34" charset="-120"/>
-              </a:rPr>
-              <a:t>video consultas</a:t>
-            </a:r>
-            <a:r>
-              <a:rPr lang="es-419" sz="2400" noProof="0" dirty="0">
-                <a:solidFill>
-                  <a:srgbClr val="272525"/>
-                </a:solidFill>
-                <a:latin typeface="Source Sans 3" pitchFamily="34" charset="0"/>
-                <a:ea typeface="Source Sans 3" pitchFamily="34" charset="-122"/>
-                <a:cs typeface="Source Sans 3" pitchFamily="34" charset="-120"/>
-              </a:rPr>
-              <a:t> para ofrecer atención remota y accesible.</a:t>
-            </a:r>
-            <a:endParaRPr lang="es-419" sz="2400" noProof="0" dirty="0"/>
-          </a:p>
-        </p:txBody>
-      </p:sp>
-      <p:pic>
-        <p:nvPicPr>
-          <p:cNvPr id="15" name="Image 4" descr="preencoded.png"/>
-          <p:cNvPicPr>
-            <a:picLocks noChangeAspect="1"/>
-          </p:cNvPicPr>
-          <p:nvPr/>
-        </p:nvPicPr>
-        <p:blipFill>
-          <a:blip r:embed="rId6"/>
-          <a:stretch>
-            <a:fillRect/>
-          </a:stretch>
-        </p:blipFill>
-        <p:spPr>
-          <a:xfrm>
-            <a:off x="1390174" y="4934427"/>
-            <a:ext cx="957501" cy="1148953"/>
-          </a:xfrm>
-          <a:prstGeom prst="rect">
-            <a:avLst/>
-          </a:prstGeom>
-        </p:spPr>
-      </p:pic>
-      <p:sp>
-        <p:nvSpPr>
-          <p:cNvPr id="16" name="Text 9"/>
-          <p:cNvSpPr/>
-          <p:nvPr/>
-        </p:nvSpPr>
-        <p:spPr>
-          <a:xfrm>
-            <a:off x="2539127" y="5125880"/>
-            <a:ext cx="3880871" cy="312265"/>
-          </a:xfrm>
-          <a:prstGeom prst="rect">
-            <a:avLst/>
-          </a:prstGeom>
-          <a:noFill/>
-          <a:ln/>
-        </p:spPr>
-        <p:txBody>
-          <a:bodyPr wrap="none" lIns="0" tIns="0" rIns="0" bIns="0" rtlCol="0" anchor="t">
-            <a:spAutoFit/>
-          </a:bodyPr>
-          <a:lstStyle/>
-          <a:p>
-            <a:pPr marL="0" indent="0" algn="l">
-              <a:lnSpc>
-                <a:spcPts val="2200"/>
-              </a:lnSpc>
-              <a:buNone/>
-            </a:pPr>
-            <a:r>
-              <a:rPr lang="es-419" sz="2800" noProof="0" dirty="0">
-                <a:solidFill>
-                  <a:srgbClr val="272525"/>
-                </a:solidFill>
-                <a:latin typeface="Source Serif 4 Semi Bold" pitchFamily="34" charset="0"/>
-                <a:ea typeface="Source Serif 4 Semi Bold" pitchFamily="34" charset="-122"/>
-                <a:cs typeface="Source Serif 4 Semi Bold" pitchFamily="34" charset="-120"/>
-              </a:rPr>
-              <a:t>Análisis de Tendencias</a:t>
-            </a:r>
-            <a:endParaRPr lang="es-419" sz="2800" noProof="0" dirty="0"/>
-          </a:p>
-        </p:txBody>
-      </p:sp>
-      <p:sp>
-        <p:nvSpPr>
-          <p:cNvPr id="17" name="Text 10"/>
-          <p:cNvSpPr/>
-          <p:nvPr/>
-        </p:nvSpPr>
-        <p:spPr>
-          <a:xfrm>
-            <a:off x="2539127" y="5522358"/>
-            <a:ext cx="10929223" cy="630942"/>
-          </a:xfrm>
-          <a:prstGeom prst="rect">
-            <a:avLst/>
-          </a:prstGeom>
-          <a:noFill/>
-          <a:ln/>
-        </p:spPr>
-        <p:txBody>
-          <a:bodyPr wrap="square" lIns="0" tIns="0" rIns="0" bIns="0" rtlCol="0" anchor="t">
-            <a:spAutoFit/>
-          </a:bodyPr>
-          <a:lstStyle/>
-          <a:p>
-            <a:pPr marL="0" indent="0" algn="l">
-              <a:lnSpc>
-                <a:spcPts val="2400"/>
-              </a:lnSpc>
-              <a:buNone/>
-            </a:pPr>
-            <a:r>
-              <a:rPr lang="es-419" sz="2400" noProof="0" dirty="0">
-                <a:solidFill>
-                  <a:srgbClr val="272525"/>
-                </a:solidFill>
-                <a:latin typeface="Source Sans 3" pitchFamily="34" charset="0"/>
-                <a:ea typeface="Source Sans 3" pitchFamily="34" charset="-122"/>
-                <a:cs typeface="Source Sans 3" pitchFamily="34" charset="-120"/>
-              </a:rPr>
-              <a:t>Implementación de herramientas para </a:t>
-            </a:r>
-            <a:r>
-              <a:rPr lang="es-419" sz="2400" b="1" noProof="0" dirty="0">
-                <a:solidFill>
-                  <a:srgbClr val="272525"/>
-                </a:solidFill>
-                <a:latin typeface="Source Sans 3" pitchFamily="34" charset="0"/>
-                <a:ea typeface="Source Sans 3" pitchFamily="34" charset="-122"/>
-                <a:cs typeface="Source Sans 3" pitchFamily="34" charset="-120"/>
-              </a:rPr>
-              <a:t>análisis estadístico de síntomas</a:t>
-            </a:r>
-            <a:r>
-              <a:rPr lang="es-419" sz="2400" noProof="0" dirty="0">
-                <a:solidFill>
-                  <a:srgbClr val="272525"/>
-                </a:solidFill>
-                <a:latin typeface="Source Sans 3" pitchFamily="34" charset="0"/>
-                <a:ea typeface="Source Sans 3" pitchFamily="34" charset="-122"/>
-                <a:cs typeface="Source Sans 3" pitchFamily="34" charset="-120"/>
-              </a:rPr>
-              <a:t> y tendencias epidemiológicas.</a:t>
-            </a:r>
-            <a:endParaRPr lang="es-419" sz="2400" noProof="0" dirty="0"/>
-          </a:p>
-        </p:txBody>
-      </p:sp>
     </p:spTree>
+    <p:extLst>
+      <p:ext uri="{BB962C8B-B14F-4D97-AF65-F5344CB8AC3E}">
+        <p14:creationId xmlns:p14="http://schemas.microsoft.com/office/powerpoint/2010/main" val="2980798916"/>
+      </p:ext>
+    </p:extLst>
   </p:cSld>
   <p:clrMapOvr>
     <a:masterClrMapping/>
@@ -6931,7 +6058,7 @@
         </p:nvSpPr>
         <p:spPr>
           <a:xfrm>
-            <a:off x="1207001" y="1332548"/>
+            <a:off x="2170837" y="974548"/>
             <a:ext cx="7053143" cy="563285"/>
           </a:xfrm>
           <a:prstGeom prst="rect">
@@ -6951,7 +6078,7 @@
               <a:buNone/>
             </a:pPr>
             <a:r>
-              <a:rPr lang="es-419" sz="3500" noProof="0" dirty="0">
+              <a:rPr lang="es-419" sz="6600" dirty="0">
                 <a:solidFill>
                   <a:srgbClr val="D73AD7"/>
                 </a:solidFill>
@@ -6959,161 +6086,139 @@
                 <a:ea typeface="Source Serif 4 Semi Bold" pitchFamily="34" charset="-122"/>
                 <a:cs typeface="Source Serif 4 Semi Bold" pitchFamily="34" charset="-120"/>
               </a:rPr>
-              <a:t>Resultados o Evidencia</a:t>
-            </a:r>
-          </a:p>
-        </p:txBody>
-      </p:sp>
-      <p:sp>
-        <p:nvSpPr>
-          <p:cNvPr id="20" name="Text 7">
-            <a:extLst>
-              <a:ext uri="{FF2B5EF4-FFF2-40B4-BE49-F238E27FC236}">
-                <a16:creationId xmlns:a16="http://schemas.microsoft.com/office/drawing/2014/main" id="{B92BF13B-1E8D-0B1A-8482-0103EA05672E}"/>
-              </a:ext>
-            </a:extLst>
-          </p:cNvPr>
-          <p:cNvSpPr/>
-          <p:nvPr/>
-        </p:nvSpPr>
-        <p:spPr>
-          <a:xfrm>
-            <a:off x="773495" y="1332548"/>
-            <a:ext cx="12287250" cy="4101957"/>
-          </a:xfrm>
-          <a:prstGeom prst="rect">
-            <a:avLst/>
-          </a:prstGeom>
-          <a:noFill/>
-          <a:ln/>
-        </p:spPr>
-        <p:txBody>
-          <a:bodyPr vert="horz" wrap="square" lIns="0" tIns="0" rIns="0" bIns="0" rtlCol="0" anchor="t">
-            <a:spAutoFit/>
-          </a:bodyPr>
-          <a:lstStyle/>
-          <a:p>
-            <a:pPr marL="246063" lvl="1" defTabSz="404813">
-              <a:lnSpc>
-                <a:spcPct val="150000"/>
-              </a:lnSpc>
-              <a:tabLst>
-                <a:tab pos="16225838" algn="l"/>
-                <a:tab pos="16592550" algn="l"/>
-                <a:tab pos="17124363" algn="l"/>
-              </a:tabLst>
-            </a:pPr>
-            <a:endParaRPr lang="es-419" sz="2400" noProof="0" dirty="0">
+              <a:t>Demostración</a:t>
+            </a:r>
+            <a:endParaRPr lang="es-419" sz="6600" noProof="0" dirty="0">
               <a:solidFill>
-                <a:srgbClr val="272525"/>
+                <a:srgbClr val="D73AD7"/>
               </a:solidFill>
               <a:latin typeface="Source Serif 4 Semi Bold" pitchFamily="34" charset="0"/>
               <a:ea typeface="Source Serif 4 Semi Bold" pitchFamily="34" charset="-122"/>
               <a:cs typeface="Source Serif 4 Semi Bold" pitchFamily="34" charset="-120"/>
             </a:endParaRPr>
           </a:p>
-          <a:p>
-            <a:pPr marL="531813" lvl="1" indent="-285750" defTabSz="404813">
-              <a:lnSpc>
-                <a:spcPct val="250000"/>
-              </a:lnSpc>
-              <a:buFont typeface="Arial" panose="020B0604020202020204" pitchFamily="34" charset="0"/>
-              <a:buChar char="•"/>
-              <a:tabLst>
-                <a:tab pos="16225838" algn="l"/>
-                <a:tab pos="16592550" algn="l"/>
-                <a:tab pos="17124363" algn="l"/>
-              </a:tabLst>
-            </a:pPr>
-            <a:r>
-              <a:rPr lang="es-419" sz="2400" noProof="0" dirty="0">
-                <a:solidFill>
-                  <a:srgbClr val="272525"/>
-                </a:solidFill>
-                <a:latin typeface="Source Serif 4 Semi Bold" pitchFamily="34" charset="0"/>
-                <a:ea typeface="Source Serif 4 Semi Bold" pitchFamily="34" charset="-122"/>
-                <a:cs typeface="Source Serif 4 Semi Bold" pitchFamily="34" charset="-120"/>
-              </a:rPr>
-              <a:t> MVP funcional(MediTriage).</a:t>
-            </a:r>
-          </a:p>
-          <a:p>
-            <a:pPr marL="531813" lvl="1" indent="-285750" defTabSz="404813">
-              <a:lnSpc>
-                <a:spcPct val="250000"/>
-              </a:lnSpc>
-              <a:buFont typeface="Arial" panose="020B0604020202020204" pitchFamily="34" charset="0"/>
-              <a:buChar char="•"/>
-              <a:tabLst>
-                <a:tab pos="16225838" algn="l"/>
-                <a:tab pos="16592550" algn="l"/>
-                <a:tab pos="17124363" algn="l"/>
-              </a:tabLst>
-            </a:pPr>
-            <a:r>
-              <a:rPr lang="es-419" sz="2400" noProof="0" dirty="0">
-                <a:solidFill>
-                  <a:srgbClr val="272525"/>
-                </a:solidFill>
-                <a:latin typeface="Source Serif 4 Semi Bold" pitchFamily="34" charset="0"/>
-                <a:ea typeface="Source Serif 4 Semi Bold" pitchFamily="34" charset="-122"/>
-                <a:cs typeface="Source Serif 4 Semi Bold" pitchFamily="34" charset="-120"/>
-              </a:rPr>
-              <a:t>Informe de avance (acta, requerimientos, prototipo inicial).</a:t>
-            </a:r>
-          </a:p>
-          <a:p>
-            <a:pPr marL="531813" lvl="1" indent="-285750" defTabSz="404813">
-              <a:lnSpc>
-                <a:spcPct val="250000"/>
-              </a:lnSpc>
-              <a:buFont typeface="Arial" panose="020B0604020202020204" pitchFamily="34" charset="0"/>
-              <a:buChar char="•"/>
-              <a:tabLst>
-                <a:tab pos="16225838" algn="l"/>
-                <a:tab pos="16592550" algn="l"/>
-                <a:tab pos="17124363" algn="l"/>
-              </a:tabLst>
-            </a:pPr>
-            <a:r>
-              <a:rPr lang="es-419" sz="2400" noProof="0" dirty="0">
-                <a:solidFill>
-                  <a:srgbClr val="272525"/>
-                </a:solidFill>
-                <a:latin typeface="Source Serif 4 Semi Bold" pitchFamily="34" charset="0"/>
-                <a:ea typeface="Source Serif 4 Semi Bold" pitchFamily="34" charset="-122"/>
-                <a:cs typeface="Source Serif 4 Semi Bold" pitchFamily="34" charset="-120"/>
-              </a:rPr>
-              <a:t>🧑‍🤝‍🧑 Documentación técnica y de usuario.</a:t>
-            </a:r>
-          </a:p>
-          <a:p>
-            <a:pPr marL="531813" lvl="1" indent="-285750" defTabSz="404813">
-              <a:lnSpc>
-                <a:spcPct val="250000"/>
-              </a:lnSpc>
-              <a:buFont typeface="Arial" panose="020B0604020202020204" pitchFamily="34" charset="0"/>
-              <a:buChar char="•"/>
-              <a:tabLst>
-                <a:tab pos="16225838" algn="l"/>
-                <a:tab pos="16592550" algn="l"/>
-                <a:tab pos="17124363" algn="l"/>
-              </a:tabLst>
-            </a:pPr>
-            <a:r>
-              <a:rPr lang="es-419" sz="2400" noProof="0" dirty="0">
-                <a:solidFill>
-                  <a:srgbClr val="272525"/>
-                </a:solidFill>
-                <a:latin typeface="Source Serif 4 Semi Bold" pitchFamily="34" charset="0"/>
-                <a:ea typeface="Source Serif 4 Semi Bold" pitchFamily="34" charset="-122"/>
-                <a:cs typeface="Source Serif 4 Semi Bold" pitchFamily="34" charset="-120"/>
-              </a:rPr>
-              <a:t>🧪 Presentación final y demo.</a:t>
-            </a:r>
-          </a:p>
-        </p:txBody>
-      </p:sp>
+        </p:txBody>
+      </p:sp>
+      <p:pic>
+        <p:nvPicPr>
+          <p:cNvPr id="4" name="Imagen 3" descr="Interfaz de usuario gráfica, Aplicación&#10;&#10;El contenido generado por IA puede ser incorrecto.">
+            <a:extLst>
+              <a:ext uri="{FF2B5EF4-FFF2-40B4-BE49-F238E27FC236}">
+                <a16:creationId xmlns:a16="http://schemas.microsoft.com/office/drawing/2014/main" id="{ABD2C4A9-D667-3763-BA45-4D3A43DDDA30}"/>
+              </a:ext>
+            </a:extLst>
+          </p:cNvPr>
+          <p:cNvPicPr>
+            <a:picLocks noChangeAspect="1"/>
+          </p:cNvPicPr>
+          <p:nvPr/>
+        </p:nvPicPr>
+        <p:blipFill>
+          <a:blip r:embed="rId3"/>
+          <a:stretch>
+            <a:fillRect/>
+          </a:stretch>
+        </p:blipFill>
+        <p:spPr>
+          <a:xfrm>
+            <a:off x="3723952" y="1922106"/>
+            <a:ext cx="10298832" cy="5793093"/>
+          </a:xfrm>
+          <a:prstGeom prst="rect">
+            <a:avLst/>
+          </a:prstGeom>
+        </p:spPr>
+      </p:pic>
+      <p:pic>
+        <p:nvPicPr>
+          <p:cNvPr id="6" name="Imagen 5" descr="Logotipo, Icono&#10;&#10;El contenido generado por IA puede ser incorrecto.">
+            <a:extLst>
+              <a:ext uri="{FF2B5EF4-FFF2-40B4-BE49-F238E27FC236}">
+                <a16:creationId xmlns:a16="http://schemas.microsoft.com/office/drawing/2014/main" id="{F856BF9B-E519-8190-24C4-A1183D6171A2}"/>
+              </a:ext>
+            </a:extLst>
+          </p:cNvPr>
+          <p:cNvPicPr>
+            <a:picLocks noChangeAspect="1"/>
+          </p:cNvPicPr>
+          <p:nvPr/>
+        </p:nvPicPr>
+        <p:blipFill>
+          <a:blip r:embed="rId4"/>
+          <a:stretch>
+            <a:fillRect/>
+          </a:stretch>
+        </p:blipFill>
+        <p:spPr>
+          <a:xfrm>
+            <a:off x="1105222" y="4904757"/>
+            <a:ext cx="2463282" cy="2463282"/>
+          </a:xfrm>
+          <a:prstGeom prst="rect">
+            <a:avLst/>
+          </a:prstGeom>
+        </p:spPr>
+      </p:pic>
+      <p:pic>
+        <p:nvPicPr>
+          <p:cNvPr id="10" name="Imagen 9" descr="Logotipo&#10;&#10;El contenido generado por IA puede ser incorrecto.">
+            <a:extLst>
+              <a:ext uri="{FF2B5EF4-FFF2-40B4-BE49-F238E27FC236}">
+                <a16:creationId xmlns:a16="http://schemas.microsoft.com/office/drawing/2014/main" id="{1D3C5F3F-28EE-B530-6799-17FB9EA84544}"/>
+              </a:ext>
+            </a:extLst>
+          </p:cNvPr>
+          <p:cNvPicPr>
+            <a:picLocks noChangeAspect="1"/>
+          </p:cNvPicPr>
+          <p:nvPr/>
+        </p:nvPicPr>
+        <p:blipFill>
+          <a:blip r:embed="rId5"/>
+          <a:stretch>
+            <a:fillRect/>
+          </a:stretch>
+        </p:blipFill>
+        <p:spPr>
+          <a:xfrm>
+            <a:off x="-132578" y="1612169"/>
+            <a:ext cx="4938882" cy="3292588"/>
+          </a:xfrm>
+          <a:prstGeom prst="rect">
+            <a:avLst/>
+          </a:prstGeom>
+        </p:spPr>
+      </p:pic>
+      <p:pic>
+        <p:nvPicPr>
+          <p:cNvPr id="12" name="Imagen 11" descr="Logotipo, Icono&#10;&#10;El contenido generado por IA puede ser incorrecto.">
+            <a:extLst>
+              <a:ext uri="{FF2B5EF4-FFF2-40B4-BE49-F238E27FC236}">
+                <a16:creationId xmlns:a16="http://schemas.microsoft.com/office/drawing/2014/main" id="{A65AC1A0-3251-0905-1D1E-30131E3FEFFF}"/>
+              </a:ext>
+            </a:extLst>
+          </p:cNvPr>
+          <p:cNvPicPr>
+            <a:picLocks noChangeAspect="1"/>
+          </p:cNvPicPr>
+          <p:nvPr/>
+        </p:nvPicPr>
+        <p:blipFill>
+          <a:blip r:embed="rId6"/>
+          <a:stretch>
+            <a:fillRect/>
+          </a:stretch>
+        </p:blipFill>
+        <p:spPr>
+          <a:xfrm>
+            <a:off x="11819725" y="213934"/>
+            <a:ext cx="1553204" cy="1553204"/>
+          </a:xfrm>
+          <a:prstGeom prst="rect">
+            <a:avLst/>
+          </a:prstGeom>
+        </p:spPr>
+      </p:pic>
     </p:spTree>
     <p:extLst>
       <p:ext uri="{BB962C8B-B14F-4D97-AF65-F5344CB8AC3E}">
@@ -7135,7 +6240,7 @@
         <p:cNvPr id="1" name="">
           <a:extLst>
             <a:ext uri="{FF2B5EF4-FFF2-40B4-BE49-F238E27FC236}">
-              <a16:creationId xmlns:a16="http://schemas.microsoft.com/office/drawing/2014/main" id="{F97363FC-338F-8BA7-086C-3F0AA6BF979C}"/>
+              <a16:creationId xmlns:a16="http://schemas.microsoft.com/office/drawing/2014/main" id="{B5B8109B-050E-2634-39EF-DDBFC4510313}"/>
             </a:ext>
           </a:extLst>
         </p:cNvPr>
@@ -7155,7 +6260,7 @@
           <p:cNvPr id="2" name="Text 0">
             <a:extLst>
               <a:ext uri="{FF2B5EF4-FFF2-40B4-BE49-F238E27FC236}">
-                <a16:creationId xmlns:a16="http://schemas.microsoft.com/office/drawing/2014/main" id="{C70FC1BE-E458-B41F-5631-E73A7F515600}"/>
+                <a16:creationId xmlns:a16="http://schemas.microsoft.com/office/drawing/2014/main" id="{F6DFDB25-EAE8-3B38-8B86-489676011915}"/>
               </a:ext>
             </a:extLst>
           </p:cNvPr>
@@ -7164,8 +6269,8 @@
         </p:nvSpPr>
         <p:spPr>
           <a:xfrm>
-            <a:off x="213184" y="1628800"/>
-            <a:ext cx="5974255" cy="1169419"/>
+            <a:off x="837724" y="769263"/>
+            <a:ext cx="7053143" cy="563285"/>
           </a:xfrm>
           <a:prstGeom prst="rect">
             <a:avLst/>
@@ -7192,9 +6297,682 @@
                 <a:ea typeface="Source Serif 4 Semi Bold" pitchFamily="34" charset="-122"/>
                 <a:cs typeface="Source Serif 4 Semi Bold" pitchFamily="34" charset="-120"/>
               </a:rPr>
-              <a:t>Evidencia</a:t>
-            </a:r>
-          </a:p>
+              <a:t>Expansión Futura de MediTriage</a:t>
+            </a:r>
+            <a:endParaRPr lang="es-419" sz="3500" noProof="0" dirty="0"/>
+          </a:p>
+        </p:txBody>
+      </p:sp>
+      <p:pic>
+        <p:nvPicPr>
+          <p:cNvPr id="6" name="Image 1" descr="preencoded.png">
+            <a:extLst>
+              <a:ext uri="{FF2B5EF4-FFF2-40B4-BE49-F238E27FC236}">
+                <a16:creationId xmlns:a16="http://schemas.microsoft.com/office/drawing/2014/main" id="{C7F3E229-80EE-0FD7-3068-39278C594816}"/>
+              </a:ext>
+            </a:extLst>
+          </p:cNvPr>
+          <p:cNvPicPr>
+            <a:picLocks noChangeAspect="1"/>
+          </p:cNvPicPr>
+          <p:nvPr/>
+        </p:nvPicPr>
+        <p:blipFill>
+          <a:blip r:embed="rId3"/>
+          <a:stretch>
+            <a:fillRect/>
+          </a:stretch>
+        </p:blipFill>
+        <p:spPr>
+          <a:xfrm>
+            <a:off x="1390174" y="1487568"/>
+            <a:ext cx="957501" cy="1148953"/>
+          </a:xfrm>
+          <a:prstGeom prst="rect">
+            <a:avLst/>
+          </a:prstGeom>
+        </p:spPr>
+      </p:pic>
+      <p:sp>
+        <p:nvSpPr>
+          <p:cNvPr id="7" name="Text 3">
+            <a:extLst>
+              <a:ext uri="{FF2B5EF4-FFF2-40B4-BE49-F238E27FC236}">
+                <a16:creationId xmlns:a16="http://schemas.microsoft.com/office/drawing/2014/main" id="{03E14DEC-502C-1EA8-B6B8-CFBC8A61BEA7}"/>
+              </a:ext>
+            </a:extLst>
+          </p:cNvPr>
+          <p:cNvSpPr/>
+          <p:nvPr/>
+        </p:nvSpPr>
+        <p:spPr>
+          <a:xfrm>
+            <a:off x="2539127" y="1679020"/>
+            <a:ext cx="4789773" cy="312265"/>
+          </a:xfrm>
+          <a:prstGeom prst="rect">
+            <a:avLst/>
+          </a:prstGeom>
+          <a:noFill/>
+          <a:ln/>
+        </p:spPr>
+        <p:txBody>
+          <a:bodyPr wrap="none" lIns="0" tIns="0" rIns="0" bIns="0" rtlCol="0" anchor="t">
+            <a:spAutoFit/>
+          </a:bodyPr>
+          <a:lstStyle/>
+          <a:p>
+            <a:pPr marL="0" indent="0" algn="l">
+              <a:lnSpc>
+                <a:spcPts val="2200"/>
+              </a:lnSpc>
+              <a:buNone/>
+            </a:pPr>
+            <a:r>
+              <a:rPr lang="es-419" sz="2800" noProof="0" dirty="0">
+                <a:solidFill>
+                  <a:srgbClr val="272525"/>
+                </a:solidFill>
+                <a:latin typeface="Source Serif 4 Semi Bold" pitchFamily="34" charset="0"/>
+                <a:ea typeface="Source Serif 4 Semi Bold" pitchFamily="34" charset="-122"/>
+                <a:cs typeface="Source Serif 4 Semi Bold" pitchFamily="34" charset="-120"/>
+              </a:rPr>
+              <a:t>Integración de Derivaciones</a:t>
+            </a:r>
+            <a:endParaRPr lang="es-419" sz="2800" noProof="0" dirty="0"/>
+          </a:p>
+        </p:txBody>
+      </p:sp>
+      <p:sp>
+        <p:nvSpPr>
+          <p:cNvPr id="8" name="Text 4">
+            <a:extLst>
+              <a:ext uri="{FF2B5EF4-FFF2-40B4-BE49-F238E27FC236}">
+                <a16:creationId xmlns:a16="http://schemas.microsoft.com/office/drawing/2014/main" id="{D0610DFC-B53D-BDA5-861B-81EC400747BE}"/>
+              </a:ext>
+            </a:extLst>
+          </p:cNvPr>
+          <p:cNvSpPr/>
+          <p:nvPr/>
+        </p:nvSpPr>
+        <p:spPr>
+          <a:xfrm>
+            <a:off x="2539127" y="2075498"/>
+            <a:ext cx="11791690" cy="323165"/>
+          </a:xfrm>
+          <a:prstGeom prst="rect">
+            <a:avLst/>
+          </a:prstGeom>
+          <a:noFill/>
+          <a:ln/>
+        </p:spPr>
+        <p:txBody>
+          <a:bodyPr wrap="none" lIns="0" tIns="0" rIns="0" bIns="0" rtlCol="0" anchor="t">
+            <a:spAutoFit/>
+          </a:bodyPr>
+          <a:lstStyle/>
+          <a:p>
+            <a:pPr marL="0" indent="0" algn="l">
+              <a:lnSpc>
+                <a:spcPts val="2400"/>
+              </a:lnSpc>
+              <a:buNone/>
+            </a:pPr>
+            <a:r>
+              <a:rPr lang="es-419" sz="2400" noProof="0" dirty="0">
+                <a:solidFill>
+                  <a:srgbClr val="272525"/>
+                </a:solidFill>
+                <a:latin typeface="Source Sans 3" pitchFamily="34" charset="0"/>
+                <a:ea typeface="Source Sans 3" pitchFamily="34" charset="-122"/>
+                <a:cs typeface="Source Sans 3" pitchFamily="34" charset="-120"/>
+              </a:rPr>
+              <a:t>Conexión con sistemas de </a:t>
+            </a:r>
+            <a:r>
+              <a:rPr lang="es-419" sz="2400" b="1" noProof="0" dirty="0">
+                <a:solidFill>
+                  <a:srgbClr val="272525"/>
+                </a:solidFill>
+                <a:latin typeface="Source Sans 3" pitchFamily="34" charset="0"/>
+                <a:ea typeface="Source Sans 3" pitchFamily="34" charset="-122"/>
+                <a:cs typeface="Source Sans 3" pitchFamily="34" charset="-120"/>
+              </a:rPr>
+              <a:t>FONASA e ISAPRE</a:t>
+            </a:r>
+            <a:r>
+              <a:rPr lang="es-419" sz="2400" noProof="0" dirty="0">
+                <a:solidFill>
+                  <a:srgbClr val="272525"/>
+                </a:solidFill>
+                <a:latin typeface="Source Sans 3" pitchFamily="34" charset="0"/>
+                <a:ea typeface="Source Sans 3" pitchFamily="34" charset="-122"/>
+                <a:cs typeface="Source Sans 3" pitchFamily="34" charset="-120"/>
+              </a:rPr>
+              <a:t> para simplificar las derivaciones y coordinaciones.</a:t>
+            </a:r>
+            <a:endParaRPr lang="es-419" sz="2400" noProof="0" dirty="0"/>
+          </a:p>
+        </p:txBody>
+      </p:sp>
+      <p:pic>
+        <p:nvPicPr>
+          <p:cNvPr id="9" name="Image 2" descr="preencoded.png">
+            <a:extLst>
+              <a:ext uri="{FF2B5EF4-FFF2-40B4-BE49-F238E27FC236}">
+                <a16:creationId xmlns:a16="http://schemas.microsoft.com/office/drawing/2014/main" id="{784E68EC-528D-5031-C529-F41CED1FEA04}"/>
+              </a:ext>
+            </a:extLst>
+          </p:cNvPr>
+          <p:cNvPicPr>
+            <a:picLocks noChangeAspect="1"/>
+          </p:cNvPicPr>
+          <p:nvPr/>
+        </p:nvPicPr>
+        <p:blipFill>
+          <a:blip r:embed="rId4"/>
+          <a:stretch>
+            <a:fillRect/>
+          </a:stretch>
+        </p:blipFill>
+        <p:spPr>
+          <a:xfrm>
+            <a:off x="1390174" y="2636521"/>
+            <a:ext cx="957501" cy="1148953"/>
+          </a:xfrm>
+          <a:prstGeom prst="rect">
+            <a:avLst/>
+          </a:prstGeom>
+        </p:spPr>
+      </p:pic>
+      <p:sp>
+        <p:nvSpPr>
+          <p:cNvPr id="10" name="Text 5">
+            <a:extLst>
+              <a:ext uri="{FF2B5EF4-FFF2-40B4-BE49-F238E27FC236}">
+                <a16:creationId xmlns:a16="http://schemas.microsoft.com/office/drawing/2014/main" id="{00783617-51D9-3DE7-0262-2CB93876FB1A}"/>
+              </a:ext>
+            </a:extLst>
+          </p:cNvPr>
+          <p:cNvSpPr/>
+          <p:nvPr/>
+        </p:nvSpPr>
+        <p:spPr>
+          <a:xfrm>
+            <a:off x="2539127" y="2827973"/>
+            <a:ext cx="3395160" cy="312265"/>
+          </a:xfrm>
+          <a:prstGeom prst="rect">
+            <a:avLst/>
+          </a:prstGeom>
+          <a:noFill/>
+          <a:ln/>
+        </p:spPr>
+        <p:txBody>
+          <a:bodyPr wrap="none" lIns="0" tIns="0" rIns="0" bIns="0" rtlCol="0" anchor="t">
+            <a:spAutoFit/>
+          </a:bodyPr>
+          <a:lstStyle/>
+          <a:p>
+            <a:pPr marL="0" indent="0" algn="l">
+              <a:lnSpc>
+                <a:spcPts val="2200"/>
+              </a:lnSpc>
+              <a:buNone/>
+            </a:pPr>
+            <a:r>
+              <a:rPr lang="es-419" sz="2800" noProof="0" dirty="0">
+                <a:solidFill>
+                  <a:srgbClr val="272525"/>
+                </a:solidFill>
+                <a:latin typeface="Source Serif 4 Semi Bold" pitchFamily="34" charset="0"/>
+                <a:ea typeface="Source Serif 4 Semi Bold" pitchFamily="34" charset="-122"/>
+                <a:cs typeface="Source Serif 4 Semi Bold" pitchFamily="34" charset="-120"/>
+              </a:rPr>
+              <a:t>Agenda Compartida</a:t>
+            </a:r>
+            <a:endParaRPr lang="es-419" sz="2800" noProof="0" dirty="0"/>
+          </a:p>
+        </p:txBody>
+      </p:sp>
+      <p:sp>
+        <p:nvSpPr>
+          <p:cNvPr id="11" name="Text 6">
+            <a:extLst>
+              <a:ext uri="{FF2B5EF4-FFF2-40B4-BE49-F238E27FC236}">
+                <a16:creationId xmlns:a16="http://schemas.microsoft.com/office/drawing/2014/main" id="{5777C02E-D9A6-2EE1-3E01-950C7240A49B}"/>
+              </a:ext>
+            </a:extLst>
+          </p:cNvPr>
+          <p:cNvSpPr/>
+          <p:nvPr/>
+        </p:nvSpPr>
+        <p:spPr>
+          <a:xfrm>
+            <a:off x="2539127" y="3224451"/>
+            <a:ext cx="11791690" cy="630942"/>
+          </a:xfrm>
+          <a:prstGeom prst="rect">
+            <a:avLst/>
+          </a:prstGeom>
+          <a:noFill/>
+          <a:ln/>
+        </p:spPr>
+        <p:txBody>
+          <a:bodyPr wrap="square" lIns="0" tIns="0" rIns="0" bIns="0" rtlCol="0" anchor="t">
+            <a:spAutoFit/>
+          </a:bodyPr>
+          <a:lstStyle/>
+          <a:p>
+            <a:pPr marL="0" indent="0" algn="l">
+              <a:lnSpc>
+                <a:spcPts val="2400"/>
+              </a:lnSpc>
+              <a:buNone/>
+            </a:pPr>
+            <a:r>
+              <a:rPr lang="es-419" sz="2400" noProof="0" dirty="0">
+                <a:solidFill>
+                  <a:srgbClr val="272525"/>
+                </a:solidFill>
+                <a:latin typeface="Source Sans 3" pitchFamily="34" charset="0"/>
+                <a:ea typeface="Source Sans 3" pitchFamily="34" charset="-122"/>
+                <a:cs typeface="Source Sans 3" pitchFamily="34" charset="-120"/>
+              </a:rPr>
+              <a:t>Funcionalidad que permitirá a médicos y centros de salud </a:t>
+            </a:r>
+            <a:r>
+              <a:rPr lang="es-419" sz="2400" b="1" noProof="0" dirty="0">
+                <a:solidFill>
+                  <a:srgbClr val="272525"/>
+                </a:solidFill>
+                <a:latin typeface="Source Sans 3" pitchFamily="34" charset="0"/>
+                <a:ea typeface="Source Sans 3" pitchFamily="34" charset="-122"/>
+                <a:cs typeface="Source Sans 3" pitchFamily="34" charset="-120"/>
+              </a:rPr>
+              <a:t>compartir sus agendas</a:t>
+            </a:r>
+            <a:r>
+              <a:rPr lang="es-419" sz="2400" noProof="0" dirty="0">
+                <a:solidFill>
+                  <a:srgbClr val="272525"/>
+                </a:solidFill>
+                <a:latin typeface="Source Sans 3" pitchFamily="34" charset="0"/>
+                <a:ea typeface="Source Sans 3" pitchFamily="34" charset="-122"/>
+                <a:cs typeface="Source Sans 3" pitchFamily="34" charset="-120"/>
+              </a:rPr>
+              <a:t> de forma sincronizada.</a:t>
+            </a:r>
+            <a:endParaRPr lang="es-419" sz="2400" noProof="0" dirty="0"/>
+          </a:p>
+        </p:txBody>
+      </p:sp>
+      <p:pic>
+        <p:nvPicPr>
+          <p:cNvPr id="12" name="Image 3" descr="preencoded.png">
+            <a:extLst>
+              <a:ext uri="{FF2B5EF4-FFF2-40B4-BE49-F238E27FC236}">
+                <a16:creationId xmlns:a16="http://schemas.microsoft.com/office/drawing/2014/main" id="{E8315E01-07D8-DF6D-1C7D-9814A9E069EF}"/>
+              </a:ext>
+            </a:extLst>
+          </p:cNvPr>
+          <p:cNvPicPr>
+            <a:picLocks noChangeAspect="1"/>
+          </p:cNvPicPr>
+          <p:nvPr/>
+        </p:nvPicPr>
+        <p:blipFill>
+          <a:blip r:embed="rId5"/>
+          <a:stretch>
+            <a:fillRect/>
+          </a:stretch>
+        </p:blipFill>
+        <p:spPr>
+          <a:xfrm>
+            <a:off x="1390174" y="3785474"/>
+            <a:ext cx="957501" cy="1148953"/>
+          </a:xfrm>
+          <a:prstGeom prst="rect">
+            <a:avLst/>
+          </a:prstGeom>
+        </p:spPr>
+      </p:pic>
+      <p:sp>
+        <p:nvSpPr>
+          <p:cNvPr id="13" name="Text 7">
+            <a:extLst>
+              <a:ext uri="{FF2B5EF4-FFF2-40B4-BE49-F238E27FC236}">
+                <a16:creationId xmlns:a16="http://schemas.microsoft.com/office/drawing/2014/main" id="{A92B2F54-D453-1B13-A24D-BFB18366091D}"/>
+              </a:ext>
+            </a:extLst>
+          </p:cNvPr>
+          <p:cNvSpPr/>
+          <p:nvPr/>
+        </p:nvSpPr>
+        <p:spPr>
+          <a:xfrm>
+            <a:off x="2539127" y="3976926"/>
+            <a:ext cx="2306722" cy="312265"/>
+          </a:xfrm>
+          <a:prstGeom prst="rect">
+            <a:avLst/>
+          </a:prstGeom>
+          <a:noFill/>
+          <a:ln/>
+        </p:spPr>
+        <p:txBody>
+          <a:bodyPr wrap="none" lIns="0" tIns="0" rIns="0" bIns="0" rtlCol="0" anchor="t">
+            <a:spAutoFit/>
+          </a:bodyPr>
+          <a:lstStyle/>
+          <a:p>
+            <a:pPr marL="0" indent="0" algn="l">
+              <a:lnSpc>
+                <a:spcPts val="2200"/>
+              </a:lnSpc>
+              <a:buNone/>
+            </a:pPr>
+            <a:r>
+              <a:rPr lang="es-419" sz="2800" noProof="0" dirty="0">
+                <a:solidFill>
+                  <a:srgbClr val="272525"/>
+                </a:solidFill>
+                <a:latin typeface="Source Serif 4 Semi Bold" pitchFamily="34" charset="0"/>
+                <a:ea typeface="Source Serif 4 Semi Bold" pitchFamily="34" charset="-122"/>
+                <a:cs typeface="Source Serif 4 Semi Bold" pitchFamily="34" charset="-120"/>
+              </a:rPr>
+              <a:t>Telemedicina</a:t>
+            </a:r>
+            <a:endParaRPr lang="es-419" sz="2800" noProof="0" dirty="0"/>
+          </a:p>
+        </p:txBody>
+      </p:sp>
+      <p:sp>
+        <p:nvSpPr>
+          <p:cNvPr id="14" name="Text 8">
+            <a:extLst>
+              <a:ext uri="{FF2B5EF4-FFF2-40B4-BE49-F238E27FC236}">
+                <a16:creationId xmlns:a16="http://schemas.microsoft.com/office/drawing/2014/main" id="{122B46D8-BB57-1F63-F72C-7AAE6E6F8CED}"/>
+              </a:ext>
+            </a:extLst>
+          </p:cNvPr>
+          <p:cNvSpPr/>
+          <p:nvPr/>
+        </p:nvSpPr>
+        <p:spPr>
+          <a:xfrm>
+            <a:off x="2539127" y="4373405"/>
+            <a:ext cx="11123238" cy="323165"/>
+          </a:xfrm>
+          <a:prstGeom prst="rect">
+            <a:avLst/>
+          </a:prstGeom>
+          <a:noFill/>
+          <a:ln/>
+        </p:spPr>
+        <p:txBody>
+          <a:bodyPr wrap="none" lIns="0" tIns="0" rIns="0" bIns="0" rtlCol="0" anchor="t">
+            <a:spAutoFit/>
+          </a:bodyPr>
+          <a:lstStyle/>
+          <a:p>
+            <a:pPr marL="0" indent="0" algn="l">
+              <a:lnSpc>
+                <a:spcPts val="2400"/>
+              </a:lnSpc>
+              <a:buNone/>
+            </a:pPr>
+            <a:r>
+              <a:rPr lang="es-419" sz="2400" noProof="0" dirty="0">
+                <a:solidFill>
+                  <a:srgbClr val="272525"/>
+                </a:solidFill>
+                <a:latin typeface="Source Sans 3" pitchFamily="34" charset="0"/>
+                <a:ea typeface="Source Sans 3" pitchFamily="34" charset="-122"/>
+                <a:cs typeface="Source Sans 3" pitchFamily="34" charset="-120"/>
+              </a:rPr>
+              <a:t>Incorporación de un módulo de </a:t>
+            </a:r>
+            <a:r>
+              <a:rPr lang="es-419" sz="2400" b="1" noProof="0" dirty="0">
+                <a:solidFill>
+                  <a:srgbClr val="272525"/>
+                </a:solidFill>
+                <a:latin typeface="Source Sans 3" pitchFamily="34" charset="0"/>
+                <a:ea typeface="Source Sans 3" pitchFamily="34" charset="-122"/>
+                <a:cs typeface="Source Sans 3" pitchFamily="34" charset="-120"/>
+              </a:rPr>
+              <a:t>video consultas</a:t>
+            </a:r>
+            <a:r>
+              <a:rPr lang="es-419" sz="2400" noProof="0" dirty="0">
+                <a:solidFill>
+                  <a:srgbClr val="272525"/>
+                </a:solidFill>
+                <a:latin typeface="Source Sans 3" pitchFamily="34" charset="0"/>
+                <a:ea typeface="Source Sans 3" pitchFamily="34" charset="-122"/>
+                <a:cs typeface="Source Sans 3" pitchFamily="34" charset="-120"/>
+              </a:rPr>
+              <a:t> para ofrecer atención remota y accesible.</a:t>
+            </a:r>
+            <a:endParaRPr lang="es-419" sz="2400" noProof="0" dirty="0"/>
+          </a:p>
+        </p:txBody>
+      </p:sp>
+      <p:pic>
+        <p:nvPicPr>
+          <p:cNvPr id="15" name="Image 4" descr="preencoded.png">
+            <a:extLst>
+              <a:ext uri="{FF2B5EF4-FFF2-40B4-BE49-F238E27FC236}">
+                <a16:creationId xmlns:a16="http://schemas.microsoft.com/office/drawing/2014/main" id="{CE2D4B68-1A6E-2ED7-C358-84B6BBCCA458}"/>
+              </a:ext>
+            </a:extLst>
+          </p:cNvPr>
+          <p:cNvPicPr>
+            <a:picLocks noChangeAspect="1"/>
+          </p:cNvPicPr>
+          <p:nvPr/>
+        </p:nvPicPr>
+        <p:blipFill>
+          <a:blip r:embed="rId6"/>
+          <a:stretch>
+            <a:fillRect/>
+          </a:stretch>
+        </p:blipFill>
+        <p:spPr>
+          <a:xfrm>
+            <a:off x="1390174" y="4934427"/>
+            <a:ext cx="957501" cy="1148953"/>
+          </a:xfrm>
+          <a:prstGeom prst="rect">
+            <a:avLst/>
+          </a:prstGeom>
+        </p:spPr>
+      </p:pic>
+      <p:sp>
+        <p:nvSpPr>
+          <p:cNvPr id="16" name="Text 9">
+            <a:extLst>
+              <a:ext uri="{FF2B5EF4-FFF2-40B4-BE49-F238E27FC236}">
+                <a16:creationId xmlns:a16="http://schemas.microsoft.com/office/drawing/2014/main" id="{DE4EAC81-200B-FD42-3130-002ADBE86A93}"/>
+              </a:ext>
+            </a:extLst>
+          </p:cNvPr>
+          <p:cNvSpPr/>
+          <p:nvPr/>
+        </p:nvSpPr>
+        <p:spPr>
+          <a:xfrm>
+            <a:off x="2539127" y="5125880"/>
+            <a:ext cx="3880871" cy="312265"/>
+          </a:xfrm>
+          <a:prstGeom prst="rect">
+            <a:avLst/>
+          </a:prstGeom>
+          <a:noFill/>
+          <a:ln/>
+        </p:spPr>
+        <p:txBody>
+          <a:bodyPr wrap="none" lIns="0" tIns="0" rIns="0" bIns="0" rtlCol="0" anchor="t">
+            <a:spAutoFit/>
+          </a:bodyPr>
+          <a:lstStyle/>
+          <a:p>
+            <a:pPr marL="0" indent="0" algn="l">
+              <a:lnSpc>
+                <a:spcPts val="2200"/>
+              </a:lnSpc>
+              <a:buNone/>
+            </a:pPr>
+            <a:r>
+              <a:rPr lang="es-419" sz="2800" noProof="0" dirty="0">
+                <a:solidFill>
+                  <a:srgbClr val="272525"/>
+                </a:solidFill>
+                <a:latin typeface="Source Serif 4 Semi Bold" pitchFamily="34" charset="0"/>
+                <a:ea typeface="Source Serif 4 Semi Bold" pitchFamily="34" charset="-122"/>
+                <a:cs typeface="Source Serif 4 Semi Bold" pitchFamily="34" charset="-120"/>
+              </a:rPr>
+              <a:t>Análisis de Tendencias</a:t>
+            </a:r>
+            <a:endParaRPr lang="es-419" sz="2800" noProof="0" dirty="0"/>
+          </a:p>
+        </p:txBody>
+      </p:sp>
+      <p:sp>
+        <p:nvSpPr>
+          <p:cNvPr id="17" name="Text 10">
+            <a:extLst>
+              <a:ext uri="{FF2B5EF4-FFF2-40B4-BE49-F238E27FC236}">
+                <a16:creationId xmlns:a16="http://schemas.microsoft.com/office/drawing/2014/main" id="{F8AEC275-8154-ED8A-4A1F-691A12F5EB1F}"/>
+              </a:ext>
+            </a:extLst>
+          </p:cNvPr>
+          <p:cNvSpPr/>
+          <p:nvPr/>
+        </p:nvSpPr>
+        <p:spPr>
+          <a:xfrm>
+            <a:off x="2539127" y="5522358"/>
+            <a:ext cx="10929223" cy="630942"/>
+          </a:xfrm>
+          <a:prstGeom prst="rect">
+            <a:avLst/>
+          </a:prstGeom>
+          <a:noFill/>
+          <a:ln/>
+        </p:spPr>
+        <p:txBody>
+          <a:bodyPr wrap="square" lIns="0" tIns="0" rIns="0" bIns="0" rtlCol="0" anchor="t">
+            <a:spAutoFit/>
+          </a:bodyPr>
+          <a:lstStyle/>
+          <a:p>
+            <a:pPr marL="0" indent="0" algn="l">
+              <a:lnSpc>
+                <a:spcPts val="2400"/>
+              </a:lnSpc>
+              <a:buNone/>
+            </a:pPr>
+            <a:r>
+              <a:rPr lang="es-419" sz="2400" noProof="0" dirty="0">
+                <a:solidFill>
+                  <a:srgbClr val="272525"/>
+                </a:solidFill>
+                <a:latin typeface="Source Sans 3" pitchFamily="34" charset="0"/>
+                <a:ea typeface="Source Sans 3" pitchFamily="34" charset="-122"/>
+                <a:cs typeface="Source Sans 3" pitchFamily="34" charset="-120"/>
+              </a:rPr>
+              <a:t>Implementación de herramientas para </a:t>
+            </a:r>
+            <a:r>
+              <a:rPr lang="es-419" sz="2400" b="1" noProof="0" dirty="0">
+                <a:solidFill>
+                  <a:srgbClr val="272525"/>
+                </a:solidFill>
+                <a:latin typeface="Source Sans 3" pitchFamily="34" charset="0"/>
+                <a:ea typeface="Source Sans 3" pitchFamily="34" charset="-122"/>
+                <a:cs typeface="Source Sans 3" pitchFamily="34" charset="-120"/>
+              </a:rPr>
+              <a:t>análisis estadístico de síntomas</a:t>
+            </a:r>
+            <a:r>
+              <a:rPr lang="es-419" sz="2400" noProof="0" dirty="0">
+                <a:solidFill>
+                  <a:srgbClr val="272525"/>
+                </a:solidFill>
+                <a:latin typeface="Source Sans 3" pitchFamily="34" charset="0"/>
+                <a:ea typeface="Source Sans 3" pitchFamily="34" charset="-122"/>
+                <a:cs typeface="Source Sans 3" pitchFamily="34" charset="-120"/>
+              </a:rPr>
+              <a:t> y tendencias epidemiológicas.</a:t>
+            </a:r>
+            <a:endParaRPr lang="es-419" sz="2400" noProof="0" dirty="0"/>
+          </a:p>
+        </p:txBody>
+      </p:sp>
+    </p:spTree>
+    <p:extLst>
+      <p:ext uri="{BB962C8B-B14F-4D97-AF65-F5344CB8AC3E}">
+        <p14:creationId xmlns:p14="http://schemas.microsoft.com/office/powerpoint/2010/main" val="846220947"/>
+      </p:ext>
+    </p:extLst>
+  </p:cSld>
+  <p:clrMapOvr>
+    <a:masterClrMapping/>
+  </p:clrMapOvr>
+</p:sld>
+</file>
+
+<file path=ppt/slides/slide13.xml><?xml version="1.0" encoding="utf-8"?>
+<p:sld xmlns:a="http://schemas.openxmlformats.org/drawingml/2006/main" xmlns:r="http://schemas.openxmlformats.org/officeDocument/2006/relationships" xmlns:p="http://schemas.openxmlformats.org/presentationml/2006/main">
+  <p:cSld>
+    <p:spTree>
+      <p:nvGrpSpPr>
+        <p:cNvPr id="1" name="">
+          <a:extLst>
+            <a:ext uri="{FF2B5EF4-FFF2-40B4-BE49-F238E27FC236}">
+              <a16:creationId xmlns:a16="http://schemas.microsoft.com/office/drawing/2014/main" id="{AA5662A8-C1F9-6215-387A-BD1CCC3B2211}"/>
+            </a:ext>
+          </a:extLst>
+        </p:cNvPr>
+        <p:cNvGrpSpPr/>
+        <p:nvPr/>
+      </p:nvGrpSpPr>
+      <p:grpSpPr>
+        <a:xfrm>
+          <a:off x="0" y="0"/>
+          <a:ext cx="0" cy="0"/>
+          <a:chOff x="0" y="0"/>
+          <a:chExt cx="0" cy="0"/>
+        </a:xfrm>
+      </p:grpSpPr>
+      <p:sp>
+        <p:nvSpPr>
+          <p:cNvPr id="2" name="Text 0">
+            <a:extLst>
+              <a:ext uri="{FF2B5EF4-FFF2-40B4-BE49-F238E27FC236}">
+                <a16:creationId xmlns:a16="http://schemas.microsoft.com/office/drawing/2014/main" id="{AF825BE7-B418-866E-472E-39AF67EC79D7}"/>
+              </a:ext>
+            </a:extLst>
+          </p:cNvPr>
+          <p:cNvSpPr/>
+          <p:nvPr/>
+        </p:nvSpPr>
+        <p:spPr>
+          <a:xfrm>
+            <a:off x="1207001" y="1332548"/>
+            <a:ext cx="7053143" cy="563285"/>
+          </a:xfrm>
+          <a:prstGeom prst="rect">
+            <a:avLst/>
+          </a:prstGeom>
+          <a:noFill/>
+          <a:ln/>
+        </p:spPr>
+        <p:txBody>
+          <a:bodyPr wrap="none" lIns="0" tIns="0" rIns="0" bIns="0" rtlCol="0" anchor="t"/>
+          <a:lstStyle/>
           <a:p>
             <a:pPr marL="0" indent="0" algn="l">
               <a:lnSpc>
@@ -7211,7 +6989,7 @@
                 <a:ea typeface="Source Serif 4 Semi Bold" pitchFamily="34" charset="-122"/>
                 <a:cs typeface="Source Serif 4 Semi Bold" pitchFamily="34" charset="-120"/>
               </a:rPr>
-              <a:t> WEB</a:t>
+              <a:t>Resultados o Evidencia</a:t>
             </a:r>
           </a:p>
         </p:txBody>
@@ -7221,7 +6999,7 @@
           <p:cNvPr id="20" name="Text 7">
             <a:extLst>
               <a:ext uri="{FF2B5EF4-FFF2-40B4-BE49-F238E27FC236}">
-                <a16:creationId xmlns:a16="http://schemas.microsoft.com/office/drawing/2014/main" id="{97005A27-9227-5C76-26CD-4016CD49BA64}"/>
+                <a16:creationId xmlns:a16="http://schemas.microsoft.com/office/drawing/2014/main" id="{8D53FDA0-E47E-8BAF-F8E1-88C88B3DAEE1}"/>
               </a:ext>
             </a:extLst>
           </p:cNvPr>
@@ -7231,7 +7009,7 @@
         <p:spPr>
           <a:xfrm>
             <a:off x="773495" y="1332548"/>
-            <a:ext cx="12287250" cy="505716"/>
+            <a:ext cx="12287250" cy="4101957"/>
           </a:xfrm>
           <a:prstGeom prst="rect">
             <a:avLst/>
@@ -7264,235 +7042,112 @@
               <a:cs typeface="Source Serif 4 Semi Bold" pitchFamily="34" charset="-120"/>
             </a:endParaRPr>
           </a:p>
-        </p:txBody>
-      </p:sp>
-      <p:pic>
-        <p:nvPicPr>
-          <p:cNvPr id="4" name="Imagen 3" descr="Texto&#10;&#10;El contenido generado por IA puede ser incorrecto.">
-            <a:extLst>
-              <a:ext uri="{FF2B5EF4-FFF2-40B4-BE49-F238E27FC236}">
-                <a16:creationId xmlns:a16="http://schemas.microsoft.com/office/drawing/2014/main" id="{27621E45-A967-3D9C-4F7C-49CBADDCC214}"/>
-              </a:ext>
-            </a:extLst>
-          </p:cNvPr>
-          <p:cNvPicPr>
-            <a:picLocks noChangeAspect="1"/>
-          </p:cNvPicPr>
-          <p:nvPr/>
-        </p:nvPicPr>
-        <p:blipFill>
-          <a:blip r:embed="rId3"/>
-          <a:stretch>
-            <a:fillRect/>
-          </a:stretch>
-        </p:blipFill>
-        <p:spPr>
-          <a:xfrm>
-            <a:off x="5673916" y="372593"/>
-            <a:ext cx="7607369" cy="7857007"/>
-          </a:xfrm>
-          <a:prstGeom prst="rect">
-            <a:avLst/>
-          </a:prstGeom>
-        </p:spPr>
-      </p:pic>
-    </p:spTree>
-    <p:extLst>
-      <p:ext uri="{BB962C8B-B14F-4D97-AF65-F5344CB8AC3E}">
-        <p14:creationId xmlns:p14="http://schemas.microsoft.com/office/powerpoint/2010/main" val="774565834"/>
-      </p:ext>
-    </p:extLst>
-  </p:cSld>
-  <p:clrMapOvr>
-    <a:masterClrMapping/>
-  </p:clrMapOvr>
-</p:sld>
-</file>
-
-<file path=ppt/slides/slide13.xml><?xml version="1.0" encoding="utf-8"?>
-<p:sld xmlns:a="http://schemas.openxmlformats.org/drawingml/2006/main" xmlns:r="http://schemas.openxmlformats.org/officeDocument/2006/relationships" xmlns:p="http://schemas.openxmlformats.org/presentationml/2006/main">
-  <p:cSld>
-    <p:spTree>
-      <p:nvGrpSpPr>
-        <p:cNvPr id="1" name="">
-          <a:extLst>
-            <a:ext uri="{FF2B5EF4-FFF2-40B4-BE49-F238E27FC236}">
-              <a16:creationId xmlns:a16="http://schemas.microsoft.com/office/drawing/2014/main" id="{64859EF0-6F5E-3B87-B194-3E67BFB9646A}"/>
-            </a:ext>
-          </a:extLst>
-        </p:cNvPr>
-        <p:cNvGrpSpPr/>
-        <p:nvPr/>
-      </p:nvGrpSpPr>
-      <p:grpSpPr>
-        <a:xfrm>
-          <a:off x="0" y="0"/>
-          <a:ext cx="0" cy="0"/>
-          <a:chOff x="0" y="0"/>
-          <a:chExt cx="0" cy="0"/>
-        </a:xfrm>
-      </p:grpSpPr>
-      <p:sp>
-        <p:nvSpPr>
-          <p:cNvPr id="2" name="Text 0">
-            <a:extLst>
-              <a:ext uri="{FF2B5EF4-FFF2-40B4-BE49-F238E27FC236}">
-                <a16:creationId xmlns:a16="http://schemas.microsoft.com/office/drawing/2014/main" id="{38FA19D8-2F1D-BBBF-A54E-DA29912FC426}"/>
-              </a:ext>
-            </a:extLst>
-          </p:cNvPr>
-          <p:cNvSpPr/>
-          <p:nvPr/>
-        </p:nvSpPr>
-        <p:spPr>
-          <a:xfrm>
-            <a:off x="1382417" y="320289"/>
-            <a:ext cx="5063353" cy="505716"/>
-          </a:xfrm>
-          <a:prstGeom prst="rect">
-            <a:avLst/>
-          </a:prstGeom>
-          <a:noFill/>
-          <a:ln/>
-        </p:spPr>
-        <p:txBody>
-          <a:bodyPr wrap="none" lIns="0" tIns="0" rIns="0" bIns="0" rtlCol="0" anchor="t"/>
-          <a:lstStyle/>
-          <a:p>
-            <a:pPr marL="0" indent="0" algn="l">
+          <a:p>
+            <a:pPr marL="531813" lvl="1" indent="-285750" defTabSz="404813">
               <a:lnSpc>
-                <a:spcPts val="4400"/>
+                <a:spcPct val="250000"/>
               </a:lnSpc>
-              <a:buNone/>
-            </a:pPr>
-            <a:r>
-              <a:rPr lang="es-419" sz="3500" noProof="0" dirty="0">
-                <a:solidFill>
-                  <a:srgbClr val="D73AD7"/>
-                </a:solidFill>
-                <a:latin typeface="Source Serif 4 Semi Bold" pitchFamily="34" charset="0"/>
-                <a:ea typeface="Source Serif 4 Semi Bold" pitchFamily="34" charset="-122"/>
-                <a:cs typeface="Source Serif 4 Semi Bold" pitchFamily="34" charset="-120"/>
-              </a:rPr>
-              <a:t>Resultados o Evidencia WEB</a:t>
-            </a:r>
-          </a:p>
-        </p:txBody>
-      </p:sp>
-      <p:sp>
-        <p:nvSpPr>
-          <p:cNvPr id="20" name="Text 7">
-            <a:extLst>
-              <a:ext uri="{FF2B5EF4-FFF2-40B4-BE49-F238E27FC236}">
-                <a16:creationId xmlns:a16="http://schemas.microsoft.com/office/drawing/2014/main" id="{566F8D25-D0F9-E138-043A-A58E9BC67563}"/>
-              </a:ext>
-            </a:extLst>
-          </p:cNvPr>
-          <p:cNvSpPr/>
-          <p:nvPr/>
-        </p:nvSpPr>
-        <p:spPr>
-          <a:xfrm>
-            <a:off x="773495" y="1332548"/>
-            <a:ext cx="12287250" cy="505716"/>
-          </a:xfrm>
-          <a:prstGeom prst="rect">
-            <a:avLst/>
-          </a:prstGeom>
-          <a:noFill/>
-          <a:ln/>
-        </p:spPr>
-        <p:txBody>
-          <a:bodyPr vert="horz" wrap="square" lIns="0" tIns="0" rIns="0" bIns="0" rtlCol="0" anchor="t">
-            <a:spAutoFit/>
-          </a:bodyPr>
-          <a:lstStyle/>
-          <a:p>
-            <a:pPr marL="246063" lvl="1" defTabSz="404813">
-              <a:lnSpc>
-                <a:spcPct val="150000"/>
-              </a:lnSpc>
+              <a:buFont typeface="Arial" panose="020B0604020202020204" pitchFamily="34" charset="0"/>
+              <a:buChar char="•"/>
               <a:tabLst>
                 <a:tab pos="16225838" algn="l"/>
                 <a:tab pos="16592550" algn="l"/>
                 <a:tab pos="17124363" algn="l"/>
               </a:tabLst>
             </a:pPr>
-            <a:endParaRPr lang="es-419" sz="2400" noProof="0" dirty="0">
-              <a:solidFill>
-                <a:srgbClr val="272525"/>
-              </a:solidFill>
-              <a:latin typeface="Source Serif 4 Semi Bold" pitchFamily="34" charset="0"/>
-              <a:ea typeface="Source Serif 4 Semi Bold" pitchFamily="34" charset="-122"/>
-              <a:cs typeface="Source Serif 4 Semi Bold" pitchFamily="34" charset="-120"/>
-            </a:endParaRPr>
-          </a:p>
-        </p:txBody>
-      </p:sp>
-      <p:pic>
-        <p:nvPicPr>
-          <p:cNvPr id="5" name="Imagen 4">
-            <a:extLst>
-              <a:ext uri="{FF2B5EF4-FFF2-40B4-BE49-F238E27FC236}">
-                <a16:creationId xmlns:a16="http://schemas.microsoft.com/office/drawing/2014/main" id="{0C492F62-6458-342F-12D1-43E00D23CD0C}"/>
-              </a:ext>
-            </a:extLst>
-          </p:cNvPr>
-          <p:cNvPicPr>
-            <a:picLocks noChangeAspect="1"/>
-          </p:cNvPicPr>
-          <p:nvPr/>
-        </p:nvPicPr>
-        <p:blipFill>
-          <a:blip r:embed="rId3"/>
-          <a:stretch>
-            <a:fillRect/>
-          </a:stretch>
-        </p:blipFill>
-        <p:spPr>
-          <a:xfrm>
-            <a:off x="989564" y="1585406"/>
-            <a:ext cx="5096586" cy="2219635"/>
-          </a:xfrm>
-          <a:prstGeom prst="rect">
-            <a:avLst/>
-          </a:prstGeom>
-        </p:spPr>
-      </p:pic>
-      <p:pic>
-        <p:nvPicPr>
-          <p:cNvPr id="7" name="Imagen 6">
-            <a:extLst>
-              <a:ext uri="{FF2B5EF4-FFF2-40B4-BE49-F238E27FC236}">
-                <a16:creationId xmlns:a16="http://schemas.microsoft.com/office/drawing/2014/main" id="{5E40C97D-1713-2F12-8672-27B20E8F5502}"/>
-              </a:ext>
-            </a:extLst>
-          </p:cNvPr>
-          <p:cNvPicPr>
-            <a:picLocks noChangeAspect="1"/>
-          </p:cNvPicPr>
-          <p:nvPr/>
-        </p:nvPicPr>
-        <p:blipFill>
-          <a:blip r:embed="rId4"/>
-          <a:stretch>
-            <a:fillRect/>
-          </a:stretch>
-        </p:blipFill>
-        <p:spPr>
-          <a:xfrm>
-            <a:off x="1088572" y="5252925"/>
-            <a:ext cx="12287250" cy="1622356"/>
-          </a:xfrm>
-          <a:prstGeom prst="rect">
-            <a:avLst/>
-          </a:prstGeom>
-        </p:spPr>
-      </p:pic>
+            <a:r>
+              <a:rPr lang="es-419" sz="2400" noProof="0" dirty="0">
+                <a:solidFill>
+                  <a:srgbClr val="272525"/>
+                </a:solidFill>
+                <a:latin typeface="Source Serif 4 Semi Bold" pitchFamily="34" charset="0"/>
+                <a:ea typeface="Source Serif 4 Semi Bold" pitchFamily="34" charset="-122"/>
+                <a:cs typeface="Source Serif 4 Semi Bold" pitchFamily="34" charset="-120"/>
+              </a:rPr>
+              <a:t> MVP funcional(MediTriage).</a:t>
+            </a:r>
+          </a:p>
+          <a:p>
+            <a:pPr marL="531813" lvl="1" indent="-285750" defTabSz="404813">
+              <a:lnSpc>
+                <a:spcPct val="250000"/>
+              </a:lnSpc>
+              <a:buFont typeface="Arial" panose="020B0604020202020204" pitchFamily="34" charset="0"/>
+              <a:buChar char="•"/>
+              <a:tabLst>
+                <a:tab pos="16225838" algn="l"/>
+                <a:tab pos="16592550" algn="l"/>
+                <a:tab pos="17124363" algn="l"/>
+              </a:tabLst>
+            </a:pPr>
+            <a:r>
+              <a:rPr lang="es-419" sz="2400" noProof="0" dirty="0">
+                <a:solidFill>
+                  <a:srgbClr val="272525"/>
+                </a:solidFill>
+                <a:latin typeface="Source Serif 4 Semi Bold" pitchFamily="34" charset="0"/>
+                <a:ea typeface="Source Serif 4 Semi Bold" pitchFamily="34" charset="-122"/>
+                <a:cs typeface="Source Serif 4 Semi Bold" pitchFamily="34" charset="-120"/>
+              </a:rPr>
+              <a:t>Informe de avance (acta, requerimientos, prototipo inicial).</a:t>
+            </a:r>
+          </a:p>
+          <a:p>
+            <a:pPr marL="531813" lvl="1" indent="-285750" defTabSz="404813">
+              <a:lnSpc>
+                <a:spcPct val="250000"/>
+              </a:lnSpc>
+              <a:buFont typeface="Arial" panose="020B0604020202020204" pitchFamily="34" charset="0"/>
+              <a:buChar char="•"/>
+              <a:tabLst>
+                <a:tab pos="16225838" algn="l"/>
+                <a:tab pos="16592550" algn="l"/>
+                <a:tab pos="17124363" algn="l"/>
+              </a:tabLst>
+            </a:pPr>
+            <a:r>
+              <a:rPr lang="es-419" sz="2400" noProof="0" dirty="0">
+                <a:solidFill>
+                  <a:srgbClr val="272525"/>
+                </a:solidFill>
+                <a:latin typeface="Source Serif 4 Semi Bold" pitchFamily="34" charset="0"/>
+                <a:ea typeface="Source Serif 4 Semi Bold" pitchFamily="34" charset="-122"/>
+                <a:cs typeface="Source Serif 4 Semi Bold" pitchFamily="34" charset="-120"/>
+              </a:rPr>
+              <a:t>🧑‍🤝‍🧑 Documentación técnica y de usuario.</a:t>
+            </a:r>
+          </a:p>
+          <a:p>
+            <a:pPr marL="531813" lvl="1" indent="-285750" defTabSz="404813">
+              <a:lnSpc>
+                <a:spcPct val="250000"/>
+              </a:lnSpc>
+              <a:buFont typeface="Arial" panose="020B0604020202020204" pitchFamily="34" charset="0"/>
+              <a:buChar char="•"/>
+              <a:tabLst>
+                <a:tab pos="16225838" algn="l"/>
+                <a:tab pos="16592550" algn="l"/>
+                <a:tab pos="17124363" algn="l"/>
+              </a:tabLst>
+            </a:pPr>
+            <a:r>
+              <a:rPr lang="es-419" sz="2400" noProof="0" dirty="0">
+                <a:solidFill>
+                  <a:srgbClr val="272525"/>
+                </a:solidFill>
+                <a:latin typeface="Source Serif 4 Semi Bold" pitchFamily="34" charset="0"/>
+                <a:ea typeface="Source Serif 4 Semi Bold" pitchFamily="34" charset="-122"/>
+                <a:cs typeface="Source Serif 4 Semi Bold" pitchFamily="34" charset="-120"/>
+              </a:rPr>
+              <a:t>🧪 Presentación final y demo.</a:t>
+            </a:r>
+          </a:p>
+        </p:txBody>
+      </p:sp>
     </p:spTree>
     <p:extLst>
       <p:ext uri="{BB962C8B-B14F-4D97-AF65-F5344CB8AC3E}">
-        <p14:creationId xmlns:p14="http://schemas.microsoft.com/office/powerpoint/2010/main" val="1028728393"/>
+        <p14:creationId xmlns:p14="http://schemas.microsoft.com/office/powerpoint/2010/main" val="3712999403"/>
       </p:ext>
     </p:extLst>
   </p:cSld>
@@ -7503,1866 +7158,6 @@
 </file>
 
 <file path=ppt/slides/slide14.xml><?xml version="1.0" encoding="utf-8"?>
-<p:sld xmlns:a="http://schemas.openxmlformats.org/drawingml/2006/main" xmlns:r="http://schemas.openxmlformats.org/officeDocument/2006/relationships" xmlns:p="http://schemas.openxmlformats.org/presentationml/2006/main">
-  <p:cSld>
-    <p:spTree>
-      <p:nvGrpSpPr>
-        <p:cNvPr id="1" name="">
-          <a:extLst>
-            <a:ext uri="{FF2B5EF4-FFF2-40B4-BE49-F238E27FC236}">
-              <a16:creationId xmlns:a16="http://schemas.microsoft.com/office/drawing/2014/main" id="{CE64F858-8FB1-82CF-7120-C6AC96B63A5A}"/>
-            </a:ext>
-          </a:extLst>
-        </p:cNvPr>
-        <p:cNvGrpSpPr/>
-        <p:nvPr/>
-      </p:nvGrpSpPr>
-      <p:grpSpPr>
-        <a:xfrm>
-          <a:off x="0" y="0"/>
-          <a:ext cx="0" cy="0"/>
-          <a:chOff x="0" y="0"/>
-          <a:chExt cx="0" cy="0"/>
-        </a:xfrm>
-      </p:grpSpPr>
-      <p:sp>
-        <p:nvSpPr>
-          <p:cNvPr id="2" name="Text 0">
-            <a:extLst>
-              <a:ext uri="{FF2B5EF4-FFF2-40B4-BE49-F238E27FC236}">
-                <a16:creationId xmlns:a16="http://schemas.microsoft.com/office/drawing/2014/main" id="{0D1DE157-D2C1-6BE3-CA10-4561C9D8FC47}"/>
-              </a:ext>
-            </a:extLst>
-          </p:cNvPr>
-          <p:cNvSpPr/>
-          <p:nvPr/>
-        </p:nvSpPr>
-        <p:spPr>
-          <a:xfrm>
-            <a:off x="1382417" y="320289"/>
-            <a:ext cx="5063353" cy="505716"/>
-          </a:xfrm>
-          <a:prstGeom prst="rect">
-            <a:avLst/>
-          </a:prstGeom>
-          <a:noFill/>
-          <a:ln/>
-        </p:spPr>
-        <p:txBody>
-          <a:bodyPr wrap="none" lIns="0" tIns="0" rIns="0" bIns="0" rtlCol="0" anchor="t"/>
-          <a:lstStyle/>
-          <a:p>
-            <a:pPr marL="0" indent="0" algn="l">
-              <a:lnSpc>
-                <a:spcPts val="4400"/>
-              </a:lnSpc>
-              <a:buNone/>
-            </a:pPr>
-            <a:r>
-              <a:rPr lang="es-419" sz="3500" noProof="0" dirty="0" err="1">
-                <a:solidFill>
-                  <a:srgbClr val="D73AD7"/>
-                </a:solidFill>
-                <a:latin typeface="Source Serif 4 Semi Bold" pitchFamily="34" charset="0"/>
-                <a:ea typeface="Source Serif 4 Semi Bold" pitchFamily="34" charset="-122"/>
-                <a:cs typeface="Source Serif 4 Semi Bold" pitchFamily="34" charset="-120"/>
-              </a:rPr>
-              <a:t>Swagger</a:t>
-            </a:r>
-            <a:endParaRPr lang="es-419" sz="3500" noProof="0" dirty="0">
-              <a:solidFill>
-                <a:srgbClr val="D73AD7"/>
-              </a:solidFill>
-              <a:latin typeface="Source Serif 4 Semi Bold" pitchFamily="34" charset="0"/>
-              <a:ea typeface="Source Serif 4 Semi Bold" pitchFamily="34" charset="-122"/>
-              <a:cs typeface="Source Serif 4 Semi Bold" pitchFamily="34" charset="-120"/>
-            </a:endParaRPr>
-          </a:p>
-        </p:txBody>
-      </p:sp>
-      <p:sp>
-        <p:nvSpPr>
-          <p:cNvPr id="20" name="Text 7">
-            <a:extLst>
-              <a:ext uri="{FF2B5EF4-FFF2-40B4-BE49-F238E27FC236}">
-                <a16:creationId xmlns:a16="http://schemas.microsoft.com/office/drawing/2014/main" id="{90BF5C02-8F93-5EB5-E038-3E7AED091402}"/>
-              </a:ext>
-            </a:extLst>
-          </p:cNvPr>
-          <p:cNvSpPr/>
-          <p:nvPr/>
-        </p:nvSpPr>
-        <p:spPr>
-          <a:xfrm>
-            <a:off x="773495" y="1332548"/>
-            <a:ext cx="12287250" cy="505716"/>
-          </a:xfrm>
-          <a:prstGeom prst="rect">
-            <a:avLst/>
-          </a:prstGeom>
-          <a:noFill/>
-          <a:ln/>
-        </p:spPr>
-        <p:txBody>
-          <a:bodyPr vert="horz" wrap="square" lIns="0" tIns="0" rIns="0" bIns="0" rtlCol="0" anchor="t">
-            <a:spAutoFit/>
-          </a:bodyPr>
-          <a:lstStyle/>
-          <a:p>
-            <a:pPr marL="246063" lvl="1" defTabSz="404813">
-              <a:lnSpc>
-                <a:spcPct val="150000"/>
-              </a:lnSpc>
-              <a:tabLst>
-                <a:tab pos="16225838" algn="l"/>
-                <a:tab pos="16592550" algn="l"/>
-                <a:tab pos="17124363" algn="l"/>
-              </a:tabLst>
-            </a:pPr>
-            <a:endParaRPr lang="es-419" sz="2400" noProof="0" dirty="0">
-              <a:solidFill>
-                <a:srgbClr val="272525"/>
-              </a:solidFill>
-              <a:latin typeface="Source Serif 4 Semi Bold" pitchFamily="34" charset="0"/>
-              <a:ea typeface="Source Serif 4 Semi Bold" pitchFamily="34" charset="-122"/>
-              <a:cs typeface="Source Serif 4 Semi Bold" pitchFamily="34" charset="-120"/>
-            </a:endParaRPr>
-          </a:p>
-        </p:txBody>
-      </p:sp>
-      <p:pic>
-        <p:nvPicPr>
-          <p:cNvPr id="4" name="Imagen 3">
-            <a:extLst>
-              <a:ext uri="{FF2B5EF4-FFF2-40B4-BE49-F238E27FC236}">
-                <a16:creationId xmlns:a16="http://schemas.microsoft.com/office/drawing/2014/main" id="{CD7C7926-900C-E19C-5381-8DBBDC47184A}"/>
-              </a:ext>
-            </a:extLst>
-          </p:cNvPr>
-          <p:cNvPicPr>
-            <a:picLocks noChangeAspect="1"/>
-          </p:cNvPicPr>
-          <p:nvPr/>
-        </p:nvPicPr>
-        <p:blipFill>
-          <a:blip r:embed="rId3"/>
-          <a:stretch>
-            <a:fillRect/>
-          </a:stretch>
-        </p:blipFill>
-        <p:spPr>
-          <a:xfrm>
-            <a:off x="914400" y="1585406"/>
-            <a:ext cx="12801600" cy="6495727"/>
-          </a:xfrm>
-          <a:prstGeom prst="rect">
-            <a:avLst/>
-          </a:prstGeom>
-        </p:spPr>
-      </p:pic>
-    </p:spTree>
-    <p:extLst>
-      <p:ext uri="{BB962C8B-B14F-4D97-AF65-F5344CB8AC3E}">
-        <p14:creationId xmlns:p14="http://schemas.microsoft.com/office/powerpoint/2010/main" val="1836931169"/>
-      </p:ext>
-    </p:extLst>
-  </p:cSld>
-  <p:clrMapOvr>
-    <a:masterClrMapping/>
-  </p:clrMapOvr>
-</p:sld>
-</file>
-
-<file path=ppt/slides/slide15.xml><?xml version="1.0" encoding="utf-8"?>
-<p:sld xmlns:a="http://schemas.openxmlformats.org/drawingml/2006/main" xmlns:r="http://schemas.openxmlformats.org/officeDocument/2006/relationships" xmlns:p="http://schemas.openxmlformats.org/presentationml/2006/main">
-  <p:cSld>
-    <p:spTree>
-      <p:nvGrpSpPr>
-        <p:cNvPr id="1" name="">
-          <a:extLst>
-            <a:ext uri="{FF2B5EF4-FFF2-40B4-BE49-F238E27FC236}">
-              <a16:creationId xmlns:a16="http://schemas.microsoft.com/office/drawing/2014/main" id="{37E34574-6616-0A11-FE2F-C0B204837947}"/>
-            </a:ext>
-          </a:extLst>
-        </p:cNvPr>
-        <p:cNvGrpSpPr/>
-        <p:nvPr/>
-      </p:nvGrpSpPr>
-      <p:grpSpPr>
-        <a:xfrm>
-          <a:off x="0" y="0"/>
-          <a:ext cx="0" cy="0"/>
-          <a:chOff x="0" y="0"/>
-          <a:chExt cx="0" cy="0"/>
-        </a:xfrm>
-      </p:grpSpPr>
-      <p:sp>
-        <p:nvSpPr>
-          <p:cNvPr id="2" name="Text 0">
-            <a:extLst>
-              <a:ext uri="{FF2B5EF4-FFF2-40B4-BE49-F238E27FC236}">
-                <a16:creationId xmlns:a16="http://schemas.microsoft.com/office/drawing/2014/main" id="{66DFADFC-C1D5-F0F5-461A-51B2BF43E272}"/>
-              </a:ext>
-            </a:extLst>
-          </p:cNvPr>
-          <p:cNvSpPr/>
-          <p:nvPr/>
-        </p:nvSpPr>
-        <p:spPr>
-          <a:xfrm>
-            <a:off x="1207001" y="326708"/>
-            <a:ext cx="7053143" cy="563285"/>
-          </a:xfrm>
-          <a:prstGeom prst="rect">
-            <a:avLst/>
-          </a:prstGeom>
-          <a:noFill/>
-          <a:ln/>
-        </p:spPr>
-        <p:txBody>
-          <a:bodyPr wrap="none" lIns="0" tIns="0" rIns="0" bIns="0" rtlCol="0" anchor="t"/>
-          <a:lstStyle/>
-          <a:p>
-            <a:pPr marL="0" indent="0" algn="l">
-              <a:lnSpc>
-                <a:spcPts val="4400"/>
-              </a:lnSpc>
-              <a:buNone/>
-            </a:pPr>
-            <a:r>
-              <a:rPr lang="es-419" sz="3500" noProof="0" dirty="0">
-                <a:solidFill>
-                  <a:srgbClr val="D73AD7"/>
-                </a:solidFill>
-                <a:latin typeface="Source Serif 4 Semi Bold" pitchFamily="34" charset="0"/>
-                <a:ea typeface="Source Serif 4 Semi Bold" pitchFamily="34" charset="-122"/>
-                <a:cs typeface="Source Serif 4 Semi Bold" pitchFamily="34" charset="-120"/>
-              </a:rPr>
-              <a:t>Política de Acceso </a:t>
-            </a:r>
-            <a:r>
-              <a:rPr lang="es-419" sz="3500" noProof="0" dirty="0" err="1">
-                <a:solidFill>
-                  <a:srgbClr val="D73AD7"/>
-                </a:solidFill>
-                <a:latin typeface="Source Serif 4 Semi Bold" pitchFamily="34" charset="0"/>
-                <a:ea typeface="Source Serif 4 Semi Bold" pitchFamily="34" charset="-122"/>
-                <a:cs typeface="Source Serif 4 Semi Bold" pitchFamily="34" charset="-120"/>
-              </a:rPr>
-              <a:t>APIs</a:t>
-            </a:r>
-            <a:endParaRPr lang="es-419" sz="3500" noProof="0" dirty="0">
-              <a:solidFill>
-                <a:srgbClr val="D73AD7"/>
-              </a:solidFill>
-              <a:latin typeface="Source Serif 4 Semi Bold" pitchFamily="34" charset="0"/>
-              <a:ea typeface="Source Serif 4 Semi Bold" pitchFamily="34" charset="-122"/>
-              <a:cs typeface="Source Serif 4 Semi Bold" pitchFamily="34" charset="-120"/>
-            </a:endParaRPr>
-          </a:p>
-        </p:txBody>
-      </p:sp>
-      <p:sp>
-        <p:nvSpPr>
-          <p:cNvPr id="20" name="Text 7">
-            <a:extLst>
-              <a:ext uri="{FF2B5EF4-FFF2-40B4-BE49-F238E27FC236}">
-                <a16:creationId xmlns:a16="http://schemas.microsoft.com/office/drawing/2014/main" id="{1B962B88-1A25-1788-196B-8B592E180962}"/>
-              </a:ext>
-            </a:extLst>
-          </p:cNvPr>
-          <p:cNvSpPr/>
-          <p:nvPr/>
-        </p:nvSpPr>
-        <p:spPr>
-          <a:xfrm>
-            <a:off x="5078522" y="3363038"/>
-            <a:ext cx="4303693" cy="2077492"/>
-          </a:xfrm>
-          <a:prstGeom prst="rect">
-            <a:avLst/>
-          </a:prstGeom>
-          <a:noFill/>
-          <a:ln/>
-        </p:spPr>
-        <p:txBody>
-          <a:bodyPr vert="horz" wrap="square" lIns="0" tIns="0" rIns="0" bIns="0" rtlCol="0" anchor="t">
-            <a:spAutoFit/>
-          </a:bodyPr>
-          <a:lstStyle/>
-          <a:p>
-            <a:pPr marL="285750" indent="-285750">
-              <a:buFont typeface="Arial" panose="020B0604020202020204" pitchFamily="34" charset="0"/>
-              <a:buChar char="•"/>
-            </a:pPr>
-            <a:r>
-              <a:rPr lang="es-CL" sz="1500" dirty="0"/>
-              <a:t>GET /api/</a:t>
-            </a:r>
-            <a:r>
-              <a:rPr lang="es-CL" sz="1500" dirty="0" err="1"/>
-              <a:t>appointments</a:t>
-            </a:r>
-            <a:r>
-              <a:rPr lang="es-CL" sz="1500" dirty="0"/>
-              <a:t>/{id</a:t>
-            </a:r>
-          </a:p>
-          <a:p>
-            <a:pPr marL="285750" indent="-285750">
-              <a:buFont typeface="Arial" panose="020B0604020202020204" pitchFamily="34" charset="0"/>
-              <a:buChar char="•"/>
-            </a:pPr>
-            <a:r>
-              <a:rPr lang="es-CL" sz="1500" dirty="0" err="1"/>
-              <a:t>Admin</a:t>
-            </a:r>
-            <a:r>
-              <a:rPr lang="es-CL" sz="1500" dirty="0"/>
-              <a:t>: cualquiera</a:t>
-            </a:r>
-          </a:p>
-          <a:p>
-            <a:pPr marL="285750" indent="-285750">
-              <a:buFont typeface="Arial" panose="020B0604020202020204" pitchFamily="34" charset="0"/>
-              <a:buChar char="•"/>
-            </a:pPr>
-            <a:r>
-              <a:rPr lang="es-CL" sz="1500" dirty="0"/>
-              <a:t>Doctor: solo si es su cita</a:t>
-            </a:r>
-          </a:p>
-          <a:p>
-            <a:pPr marL="285750" indent="-285750">
-              <a:buFont typeface="Arial" panose="020B0604020202020204" pitchFamily="34" charset="0"/>
-              <a:buChar char="•"/>
-            </a:pPr>
-            <a:r>
-              <a:rPr lang="es-CL" sz="1500" dirty="0" err="1"/>
-              <a:t>Patient</a:t>
-            </a:r>
-            <a:r>
-              <a:rPr lang="es-CL" sz="1500" dirty="0"/>
-              <a:t>: solo si es su cita</a:t>
-            </a:r>
-          </a:p>
-          <a:p>
-            <a:pPr marL="285750" indent="-285750">
-              <a:buFont typeface="Arial" panose="020B0604020202020204" pitchFamily="34" charset="0"/>
-              <a:buChar char="•"/>
-            </a:pPr>
-            <a:r>
-              <a:rPr lang="es-CL" sz="1500" dirty="0"/>
-              <a:t>POST /api/</a:t>
-            </a:r>
-            <a:r>
-              <a:rPr lang="es-CL" sz="1500" dirty="0" err="1"/>
-              <a:t>appointments</a:t>
-            </a:r>
-            <a:endParaRPr lang="es-CL" sz="1500" dirty="0"/>
-          </a:p>
-          <a:p>
-            <a:pPr marL="285750" indent="-285750">
-              <a:buFont typeface="Arial" panose="020B0604020202020204" pitchFamily="34" charset="0"/>
-              <a:buChar char="•"/>
-            </a:pPr>
-            <a:r>
-              <a:rPr lang="es-CL" sz="1500" dirty="0" err="1"/>
-              <a:t>Patient</a:t>
-            </a:r>
-            <a:r>
-              <a:rPr lang="es-CL" sz="1500" dirty="0"/>
-              <a:t> o </a:t>
-            </a:r>
-            <a:r>
-              <a:rPr lang="es-CL" sz="1500" dirty="0" err="1"/>
-              <a:t>Admin</a:t>
-            </a:r>
-            <a:r>
-              <a:rPr lang="es-CL" sz="1500" dirty="0"/>
-              <a:t>. Si es </a:t>
-            </a:r>
-            <a:r>
-              <a:rPr lang="es-CL" sz="1500" dirty="0" err="1"/>
-              <a:t>Patient</a:t>
-            </a:r>
-            <a:r>
-              <a:rPr lang="es-CL" sz="1500" dirty="0"/>
-              <a:t>, </a:t>
-            </a:r>
-          </a:p>
-          <a:p>
-            <a:pPr marL="285750" indent="-285750">
-              <a:buFont typeface="Arial" panose="020B0604020202020204" pitchFamily="34" charset="0"/>
-              <a:buChar char="•"/>
-            </a:pPr>
-            <a:r>
-              <a:rPr lang="es-CL" sz="1500" dirty="0"/>
-              <a:t>solo puede crear para su propio </a:t>
-            </a:r>
-            <a:r>
-              <a:rPr lang="es-CL" sz="1500" dirty="0" err="1"/>
-              <a:t>PatientId</a:t>
-            </a:r>
-            <a:r>
-              <a:rPr lang="es-CL" sz="1500" dirty="0"/>
-              <a:t>.</a:t>
-            </a:r>
-          </a:p>
-          <a:p>
-            <a:pPr marL="285750" indent="-285750">
-              <a:buFont typeface="Arial" panose="020B0604020202020204" pitchFamily="34" charset="0"/>
-              <a:buChar char="•"/>
-            </a:pPr>
-            <a:r>
-              <a:rPr lang="es-CL" sz="1500" dirty="0"/>
-              <a:t>PUT /api/</a:t>
-            </a:r>
-            <a:r>
-              <a:rPr lang="es-CL" sz="1500" dirty="0" err="1"/>
-              <a:t>appointments</a:t>
-            </a:r>
-            <a:r>
-              <a:rPr lang="es-CL" sz="1500" dirty="0"/>
-              <a:t>/{id}/</a:t>
-            </a:r>
-            <a:r>
-              <a:rPr lang="es-CL" sz="1500" dirty="0" err="1"/>
-              <a:t>reschedule</a:t>
-            </a:r>
-            <a:endParaRPr lang="es-CL" sz="1500" dirty="0"/>
-          </a:p>
-          <a:p>
-            <a:pPr marL="285750" indent="-285750">
-              <a:buFont typeface="Arial" panose="020B0604020202020204" pitchFamily="34" charset="0"/>
-              <a:buChar char="•"/>
-            </a:pPr>
-            <a:r>
-              <a:rPr lang="es-CL" sz="1500" dirty="0" err="1"/>
-              <a:t>Patient</a:t>
-            </a:r>
-            <a:r>
-              <a:rPr lang="es-CL" sz="1500" dirty="0"/>
-              <a:t> (solo su cita) o </a:t>
-            </a:r>
-            <a:r>
-              <a:rPr lang="es-CL" sz="1500" dirty="0" err="1"/>
-              <a:t>Admin</a:t>
-            </a:r>
-            <a:r>
-              <a:rPr lang="es-CL" sz="1500" dirty="0"/>
-              <a:t>.</a:t>
-            </a:r>
-          </a:p>
-        </p:txBody>
-      </p:sp>
-      <p:sp>
-        <p:nvSpPr>
-          <p:cNvPr id="4" name="Marcador de contenido 3">
-            <a:extLst>
-              <a:ext uri="{FF2B5EF4-FFF2-40B4-BE49-F238E27FC236}">
-                <a16:creationId xmlns:a16="http://schemas.microsoft.com/office/drawing/2014/main" id="{FBE6C852-7EB9-31C3-EEC4-95F0FF0A6E29}"/>
-              </a:ext>
-            </a:extLst>
-          </p:cNvPr>
-          <p:cNvSpPr>
-            <a:spLocks noGrp="1"/>
-          </p:cNvSpPr>
-          <p:nvPr>
-            <p:ph idx="1"/>
-          </p:nvPr>
-        </p:nvSpPr>
-        <p:spPr>
-          <a:xfrm>
-            <a:off x="217895" y="2418879"/>
-            <a:ext cx="5248185" cy="4140736"/>
-          </a:xfrm>
-        </p:spPr>
-        <p:txBody>
-          <a:bodyPr>
-            <a:normAutofit/>
-          </a:bodyPr>
-          <a:lstStyle/>
-          <a:p>
-            <a:pPr>
-              <a:lnSpc>
-                <a:spcPct val="100000"/>
-              </a:lnSpc>
-            </a:pPr>
-            <a:r>
-              <a:rPr lang="es-CL" sz="1500" dirty="0"/>
-              <a:t>POST /api/</a:t>
-            </a:r>
-            <a:r>
-              <a:rPr lang="es-CL" sz="1500" dirty="0" err="1"/>
-              <a:t>auth</a:t>
-            </a:r>
-            <a:r>
-              <a:rPr lang="es-CL" sz="1500" dirty="0"/>
-              <a:t>/</a:t>
-            </a:r>
-            <a:r>
-              <a:rPr lang="es-CL" sz="1500" dirty="0" err="1"/>
-              <a:t>register</a:t>
-            </a:r>
-            <a:r>
-              <a:rPr lang="es-CL" sz="1500" dirty="0"/>
-              <a:t>, POST /api/</a:t>
-            </a:r>
-            <a:r>
-              <a:rPr lang="es-CL" sz="1500" dirty="0" err="1"/>
-              <a:t>auth</a:t>
-            </a:r>
-            <a:r>
-              <a:rPr lang="es-CL" sz="1500" dirty="0"/>
-              <a:t>/</a:t>
-            </a:r>
-            <a:r>
-              <a:rPr lang="es-CL" sz="1500" dirty="0" err="1"/>
-              <a:t>login</a:t>
-            </a:r>
-            <a:r>
-              <a:rPr lang="es-CL" sz="1500" dirty="0"/>
-              <a:t> (ya OK).</a:t>
-            </a:r>
-          </a:p>
-          <a:p>
-            <a:pPr>
-              <a:lnSpc>
-                <a:spcPct val="100000"/>
-              </a:lnSpc>
-            </a:pPr>
-            <a:r>
-              <a:rPr lang="es-CL" sz="1500" dirty="0"/>
-              <a:t>GET /api/</a:t>
-            </a:r>
-            <a:r>
-              <a:rPr lang="es-CL" sz="1500" dirty="0" err="1"/>
-              <a:t>doctors</a:t>
-            </a:r>
-            <a:r>
-              <a:rPr lang="es-CL" sz="1500" dirty="0"/>
-              <a:t>, GET /api/</a:t>
-            </a:r>
-            <a:r>
-              <a:rPr lang="es-CL" sz="1500" dirty="0" err="1"/>
-              <a:t>doctors</a:t>
-            </a:r>
-            <a:r>
-              <a:rPr lang="es-CL" sz="1500" dirty="0"/>
-              <a:t>/{id} (catálogo visible sin </a:t>
-            </a:r>
-            <a:r>
-              <a:rPr lang="es-CL" sz="1500" dirty="0" err="1"/>
-              <a:t>login</a:t>
-            </a:r>
-            <a:r>
-              <a:rPr lang="es-CL" sz="1500" dirty="0"/>
-              <a:t>).</a:t>
-            </a:r>
-          </a:p>
-          <a:p>
-            <a:pPr>
-              <a:lnSpc>
-                <a:spcPct val="100000"/>
-              </a:lnSpc>
-            </a:pPr>
-            <a:r>
-              <a:rPr lang="es-CL" sz="1500" dirty="0"/>
-              <a:t>Con token (y dueño)</a:t>
-            </a:r>
-          </a:p>
-          <a:p>
-            <a:pPr>
-              <a:lnSpc>
-                <a:spcPct val="100000"/>
-              </a:lnSpc>
-            </a:pPr>
-            <a:r>
-              <a:rPr lang="es-CL" sz="1500" dirty="0" err="1"/>
-              <a:t>Appointments</a:t>
-            </a:r>
-            <a:endParaRPr lang="es-CL" sz="1500" dirty="0"/>
-          </a:p>
-          <a:p>
-            <a:pPr>
-              <a:lnSpc>
-                <a:spcPct val="100000"/>
-              </a:lnSpc>
-            </a:pPr>
-            <a:r>
-              <a:rPr lang="es-CL" sz="1500" dirty="0"/>
-              <a:t>GET /api/</a:t>
-            </a:r>
-            <a:r>
-              <a:rPr lang="es-CL" sz="1500" dirty="0" err="1"/>
-              <a:t>appointments</a:t>
-            </a:r>
-            <a:endParaRPr lang="es-CL" sz="1500" dirty="0"/>
-          </a:p>
-          <a:p>
-            <a:pPr>
-              <a:lnSpc>
-                <a:spcPct val="100000"/>
-              </a:lnSpc>
-            </a:pPr>
-            <a:r>
-              <a:rPr lang="es-CL" sz="1500" dirty="0" err="1"/>
-              <a:t>Admin</a:t>
-            </a:r>
-            <a:r>
-              <a:rPr lang="es-CL" sz="1500" dirty="0"/>
-              <a:t>: ve todas</a:t>
-            </a:r>
-          </a:p>
-          <a:p>
-            <a:pPr>
-              <a:lnSpc>
-                <a:spcPct val="100000"/>
-              </a:lnSpc>
-            </a:pPr>
-            <a:r>
-              <a:rPr lang="es-CL" sz="1500" dirty="0"/>
-              <a:t>Doctor: solo citas donde </a:t>
-            </a:r>
-            <a:r>
-              <a:rPr lang="es-CL" sz="1500" dirty="0" err="1"/>
-              <a:t>Doctor.UserId</a:t>
-            </a:r>
-            <a:r>
-              <a:rPr lang="es-CL" sz="1500" dirty="0"/>
-              <a:t> == </a:t>
-            </a:r>
-            <a:r>
-              <a:rPr lang="es-CL" sz="1500" dirty="0" err="1"/>
-              <a:t>userId</a:t>
-            </a:r>
-            <a:endParaRPr lang="es-CL" sz="1500" dirty="0"/>
-          </a:p>
-          <a:p>
-            <a:pPr>
-              <a:lnSpc>
-                <a:spcPct val="100000"/>
-              </a:lnSpc>
-            </a:pPr>
-            <a:r>
-              <a:rPr lang="es-CL" sz="1500" dirty="0" err="1"/>
-              <a:t>Patient</a:t>
-            </a:r>
-            <a:r>
-              <a:rPr lang="es-CL" sz="1500" dirty="0"/>
-              <a:t>: solo citas donde </a:t>
-            </a:r>
-            <a:r>
-              <a:rPr lang="es-CL" sz="1500" dirty="0" err="1"/>
-              <a:t>Patient.UserId</a:t>
-            </a:r>
-            <a:r>
-              <a:rPr lang="es-CL" sz="1500" dirty="0"/>
-              <a:t> == </a:t>
-            </a:r>
-            <a:r>
-              <a:rPr lang="es-CL" sz="1500" dirty="0" err="1"/>
-              <a:t>userId</a:t>
-            </a:r>
-            <a:endParaRPr lang="es-CL" sz="1500" dirty="0"/>
-          </a:p>
-          <a:p>
-            <a:endParaRPr lang="es-CL" sz="1500" dirty="0"/>
-          </a:p>
-        </p:txBody>
-      </p:sp>
-      <p:sp>
-        <p:nvSpPr>
-          <p:cNvPr id="5" name="Marcador de contenido 3">
-            <a:extLst>
-              <a:ext uri="{FF2B5EF4-FFF2-40B4-BE49-F238E27FC236}">
-                <a16:creationId xmlns:a16="http://schemas.microsoft.com/office/drawing/2014/main" id="{5D6C1945-AA0D-A642-1E3E-270DDBB6EB49}"/>
-              </a:ext>
-            </a:extLst>
-          </p:cNvPr>
-          <p:cNvSpPr txBox="1">
-            <a:spLocks/>
-          </p:cNvSpPr>
-          <p:nvPr/>
-        </p:nvSpPr>
-        <p:spPr>
-          <a:xfrm>
-            <a:off x="9382215" y="2418879"/>
-            <a:ext cx="5248185" cy="4140736"/>
-          </a:xfrm>
-          <a:prstGeom prst="rect">
-            <a:avLst/>
-          </a:prstGeom>
-        </p:spPr>
-        <p:txBody>
-          <a:bodyPr vert="horz" lIns="91440" tIns="45720" rIns="91440" bIns="45720" rtlCol="0" anchor="t">
-            <a:normAutofit fontScale="70000" lnSpcReduction="20000"/>
-          </a:bodyPr>
-          <a:lstStyle>
-            <a:lvl1pPr marL="274320" indent="-274320" algn="l" defTabSz="1097280" rtl="0" eaLnBrk="1" latinLnBrk="0" hangingPunct="1">
-              <a:lnSpc>
-                <a:spcPct val="120000"/>
-              </a:lnSpc>
-              <a:spcBef>
-                <a:spcPts val="1200"/>
-              </a:spcBef>
-              <a:buClr>
-                <a:schemeClr val="accent1"/>
-              </a:buClr>
-              <a:buSzPct val="100000"/>
-              <a:buFont typeface="Arial" panose="020B0604020202020204" pitchFamily="34" charset="0"/>
-              <a:buChar char="•"/>
-              <a:defRPr sz="2400" kern="1200">
-                <a:solidFill>
-                  <a:schemeClr val="tx1"/>
-                </a:solidFill>
-                <a:effectLst/>
-                <a:latin typeface="+mn-lt"/>
-                <a:ea typeface="+mn-ea"/>
-                <a:cs typeface="+mn-cs"/>
-              </a:defRPr>
-            </a:lvl1pPr>
-            <a:lvl2pPr marL="822960" indent="-274320" algn="l" defTabSz="1097280" rtl="0" eaLnBrk="1" latinLnBrk="0" hangingPunct="1">
-              <a:lnSpc>
-                <a:spcPct val="120000"/>
-              </a:lnSpc>
-              <a:spcBef>
-                <a:spcPts val="600"/>
-              </a:spcBef>
-              <a:buClr>
-                <a:schemeClr val="accent1"/>
-              </a:buClr>
-              <a:buSzPct val="100000"/>
-              <a:buFont typeface="Arial" panose="020B0604020202020204" pitchFamily="34" charset="0"/>
-              <a:buChar char="•"/>
-              <a:defRPr sz="2160" kern="1200" cap="none" baseline="0">
-                <a:solidFill>
-                  <a:schemeClr val="tx1"/>
-                </a:solidFill>
-                <a:effectLst/>
-                <a:latin typeface="+mn-lt"/>
-                <a:ea typeface="+mn-ea"/>
-                <a:cs typeface="+mn-cs"/>
-              </a:defRPr>
-            </a:lvl2pPr>
-            <a:lvl3pPr marL="1371600" indent="-274320" algn="l" defTabSz="1097280" rtl="0" eaLnBrk="1" latinLnBrk="0" hangingPunct="1">
-              <a:lnSpc>
-                <a:spcPct val="120000"/>
-              </a:lnSpc>
-              <a:spcBef>
-                <a:spcPts val="600"/>
-              </a:spcBef>
-              <a:buClr>
-                <a:schemeClr val="accent1"/>
-              </a:buClr>
-              <a:buSzPct val="100000"/>
-              <a:buFont typeface="Arial" panose="020B0604020202020204" pitchFamily="34" charset="0"/>
-              <a:buChar char="•"/>
-              <a:defRPr sz="1920" kern="1200">
-                <a:solidFill>
-                  <a:schemeClr val="tx1"/>
-                </a:solidFill>
-                <a:effectLst/>
-                <a:latin typeface="+mn-lt"/>
-                <a:ea typeface="+mn-ea"/>
-                <a:cs typeface="+mn-cs"/>
-              </a:defRPr>
-            </a:lvl3pPr>
-            <a:lvl4pPr marL="1920240" indent="-274320" algn="l" defTabSz="1097280" rtl="0" eaLnBrk="1" latinLnBrk="0" hangingPunct="1">
-              <a:lnSpc>
-                <a:spcPct val="120000"/>
-              </a:lnSpc>
-              <a:spcBef>
-                <a:spcPts val="600"/>
-              </a:spcBef>
-              <a:buClr>
-                <a:schemeClr val="accent1"/>
-              </a:buClr>
-              <a:buSzPct val="100000"/>
-              <a:buFont typeface="Arial" panose="020B0604020202020204" pitchFamily="34" charset="0"/>
-              <a:buChar char="•"/>
-              <a:defRPr sz="1680" kern="1200" cap="none" baseline="0">
-                <a:solidFill>
-                  <a:schemeClr val="tx1"/>
-                </a:solidFill>
-                <a:effectLst/>
-                <a:latin typeface="+mn-lt"/>
-                <a:ea typeface="+mn-ea"/>
-                <a:cs typeface="+mn-cs"/>
-              </a:defRPr>
-            </a:lvl4pPr>
-            <a:lvl5pPr marL="2468880" indent="-274320" algn="l" defTabSz="1097280" rtl="0" eaLnBrk="1" latinLnBrk="0" hangingPunct="1">
-              <a:lnSpc>
-                <a:spcPct val="120000"/>
-              </a:lnSpc>
-              <a:spcBef>
-                <a:spcPts val="600"/>
-              </a:spcBef>
-              <a:buClr>
-                <a:schemeClr val="accent1"/>
-              </a:buClr>
-              <a:buSzPct val="100000"/>
-              <a:buFont typeface="Arial" panose="020B0604020202020204" pitchFamily="34" charset="0"/>
-              <a:buChar char="•"/>
-              <a:defRPr sz="1440" kern="1200">
-                <a:solidFill>
-                  <a:schemeClr val="tx1"/>
-                </a:solidFill>
-                <a:effectLst/>
-                <a:latin typeface="+mn-lt"/>
-                <a:ea typeface="+mn-ea"/>
-                <a:cs typeface="+mn-cs"/>
-              </a:defRPr>
-            </a:lvl5pPr>
-            <a:lvl6pPr marL="3017520" indent="-274320" algn="l" defTabSz="1097280" rtl="0" eaLnBrk="1" latinLnBrk="0" hangingPunct="1">
-              <a:lnSpc>
-                <a:spcPct val="120000"/>
-              </a:lnSpc>
-              <a:spcBef>
-                <a:spcPts val="600"/>
-              </a:spcBef>
-              <a:buClr>
-                <a:schemeClr val="accent1"/>
-              </a:buClr>
-              <a:buSzPct val="100000"/>
-              <a:buFont typeface="Arial" panose="020B0604020202020204" pitchFamily="34" charset="0"/>
-              <a:buChar char="•"/>
-              <a:defRPr sz="1440" kern="1200">
-                <a:solidFill>
-                  <a:schemeClr val="tx1"/>
-                </a:solidFill>
-                <a:effectLst/>
-                <a:latin typeface="+mn-lt"/>
-                <a:ea typeface="+mn-ea"/>
-                <a:cs typeface="+mn-cs"/>
-              </a:defRPr>
-            </a:lvl6pPr>
-            <a:lvl7pPr marL="3566160" indent="-274320" algn="l" defTabSz="1097280" rtl="0" eaLnBrk="1" latinLnBrk="0" hangingPunct="1">
-              <a:lnSpc>
-                <a:spcPct val="120000"/>
-              </a:lnSpc>
-              <a:spcBef>
-                <a:spcPts val="600"/>
-              </a:spcBef>
-              <a:buClr>
-                <a:schemeClr val="accent1"/>
-              </a:buClr>
-              <a:buSzPct val="100000"/>
-              <a:buFont typeface="Arial" panose="020B0604020202020204" pitchFamily="34" charset="0"/>
-              <a:buChar char="•"/>
-              <a:defRPr sz="1440" kern="1200">
-                <a:solidFill>
-                  <a:schemeClr val="tx1"/>
-                </a:solidFill>
-                <a:effectLst/>
-                <a:latin typeface="+mn-lt"/>
-                <a:ea typeface="+mn-ea"/>
-                <a:cs typeface="+mn-cs"/>
-              </a:defRPr>
-            </a:lvl7pPr>
-            <a:lvl8pPr marL="4114800" indent="-274320" algn="l" defTabSz="1097280" rtl="0" eaLnBrk="1" latinLnBrk="0" hangingPunct="1">
-              <a:lnSpc>
-                <a:spcPct val="120000"/>
-              </a:lnSpc>
-              <a:spcBef>
-                <a:spcPts val="600"/>
-              </a:spcBef>
-              <a:buClr>
-                <a:schemeClr val="accent1"/>
-              </a:buClr>
-              <a:buSzPct val="100000"/>
-              <a:buFont typeface="Arial" panose="020B0604020202020204" pitchFamily="34" charset="0"/>
-              <a:buChar char="•"/>
-              <a:defRPr sz="1440" kern="1200" baseline="0">
-                <a:solidFill>
-                  <a:schemeClr val="tx1"/>
-                </a:solidFill>
-                <a:effectLst/>
-                <a:latin typeface="+mn-lt"/>
-                <a:ea typeface="+mn-ea"/>
-                <a:cs typeface="+mn-cs"/>
-              </a:defRPr>
-            </a:lvl8pPr>
-            <a:lvl9pPr marL="4663440" indent="-274320" algn="l" defTabSz="1097280" rtl="0" eaLnBrk="1" latinLnBrk="0" hangingPunct="1">
-              <a:lnSpc>
-                <a:spcPct val="120000"/>
-              </a:lnSpc>
-              <a:spcBef>
-                <a:spcPts val="600"/>
-              </a:spcBef>
-              <a:buClr>
-                <a:schemeClr val="accent1"/>
-              </a:buClr>
-              <a:buSzPct val="100000"/>
-              <a:buFont typeface="Arial" panose="020B0604020202020204" pitchFamily="34" charset="0"/>
-              <a:buChar char="•"/>
-              <a:defRPr sz="1440" kern="1200" baseline="0">
-                <a:solidFill>
-                  <a:schemeClr val="tx1"/>
-                </a:solidFill>
-                <a:effectLst/>
-                <a:latin typeface="+mn-lt"/>
-                <a:ea typeface="+mn-ea"/>
-                <a:cs typeface="+mn-cs"/>
-              </a:defRPr>
-            </a:lvl9pPr>
-          </a:lstStyle>
-          <a:p>
-            <a:r>
-              <a:rPr lang="es-CL" dirty="0"/>
-              <a:t>PATCH /api/</a:t>
-            </a:r>
-            <a:r>
-              <a:rPr lang="es-CL" dirty="0" err="1"/>
-              <a:t>appointments</a:t>
-            </a:r>
-            <a:r>
-              <a:rPr lang="es-CL" dirty="0"/>
-              <a:t>/{id}/status</a:t>
-            </a:r>
-          </a:p>
-          <a:p>
-            <a:r>
-              <a:rPr lang="es-CL" dirty="0"/>
-              <a:t>Doctor (solo su cita) o </a:t>
-            </a:r>
-            <a:r>
-              <a:rPr lang="es-CL" dirty="0" err="1"/>
-              <a:t>Admin</a:t>
-            </a:r>
-            <a:r>
-              <a:rPr lang="es-CL" dirty="0"/>
-              <a:t>.</a:t>
-            </a:r>
-            <a:br>
-              <a:rPr lang="es-CL" dirty="0"/>
-            </a:br>
-            <a:r>
-              <a:rPr lang="es-CL" dirty="0"/>
-              <a:t>(Partimos desde tu </a:t>
-            </a:r>
-            <a:r>
-              <a:rPr lang="es-CL" dirty="0" err="1"/>
-              <a:t>controller</a:t>
-            </a:r>
-            <a:r>
-              <a:rPr lang="es-CL" dirty="0"/>
-              <a:t> actual. )</a:t>
-            </a:r>
-          </a:p>
-          <a:p>
-            <a:r>
-              <a:rPr lang="es-CL" dirty="0" err="1"/>
-              <a:t>Patients</a:t>
-            </a:r>
-            <a:endParaRPr lang="es-CL" dirty="0"/>
-          </a:p>
-          <a:p>
-            <a:r>
-              <a:rPr lang="es-CL" dirty="0"/>
-              <a:t>Todo el </a:t>
-            </a:r>
-            <a:r>
-              <a:rPr lang="es-CL" dirty="0" err="1"/>
-              <a:t>controller</a:t>
-            </a:r>
-            <a:r>
-              <a:rPr lang="es-CL" dirty="0"/>
-              <a:t>: </a:t>
-            </a:r>
-            <a:r>
-              <a:rPr lang="es-CL" dirty="0" err="1"/>
-              <a:t>Doctor,Admin</a:t>
-            </a:r>
-            <a:r>
-              <a:rPr lang="es-CL" dirty="0"/>
-              <a:t> (datos sensibles).</a:t>
-            </a:r>
-          </a:p>
-          <a:p>
-            <a:r>
-              <a:rPr lang="es-CL" dirty="0"/>
-              <a:t>(Opcional) GET /api/</a:t>
-            </a:r>
-            <a:r>
-              <a:rPr lang="es-CL" dirty="0" err="1"/>
-              <a:t>patients</a:t>
-            </a:r>
-            <a:r>
-              <a:rPr lang="es-CL" dirty="0"/>
-              <a:t>/me: </a:t>
-            </a:r>
-            <a:r>
-              <a:rPr lang="es-CL" dirty="0" err="1"/>
-              <a:t>Patient</a:t>
-            </a:r>
-            <a:r>
-              <a:rPr lang="es-CL" dirty="0"/>
-              <a:t> ve solo su ficha.</a:t>
-            </a:r>
-          </a:p>
-          <a:p>
-            <a:r>
-              <a:rPr lang="es-CL" dirty="0" err="1"/>
-              <a:t>Doctors</a:t>
-            </a:r>
-            <a:endParaRPr lang="es-CL" dirty="0"/>
-          </a:p>
-          <a:p>
-            <a:r>
-              <a:rPr lang="es-CL" dirty="0"/>
-              <a:t>Listado/detalle: </a:t>
-            </a:r>
-            <a:r>
-              <a:rPr lang="es-CL" dirty="0" err="1"/>
-              <a:t>AllowAnonymous</a:t>
-            </a:r>
-            <a:r>
-              <a:rPr lang="es-CL" dirty="0"/>
-              <a:t> como ahora.</a:t>
-            </a:r>
-          </a:p>
-          <a:p>
-            <a:r>
-              <a:rPr lang="es-CL" dirty="0"/>
-              <a:t>(Opcional) GET /api/</a:t>
-            </a:r>
-            <a:r>
-              <a:rPr lang="es-CL" dirty="0" err="1"/>
-              <a:t>doctors</a:t>
-            </a:r>
-            <a:r>
-              <a:rPr lang="es-CL" dirty="0"/>
-              <a:t>/me: Doctor ve su perfil.</a:t>
-            </a:r>
-          </a:p>
-        </p:txBody>
-      </p:sp>
-    </p:spTree>
-    <p:extLst>
-      <p:ext uri="{BB962C8B-B14F-4D97-AF65-F5344CB8AC3E}">
-        <p14:creationId xmlns:p14="http://schemas.microsoft.com/office/powerpoint/2010/main" val="2642450934"/>
-      </p:ext>
-    </p:extLst>
-  </p:cSld>
-  <p:clrMapOvr>
-    <a:masterClrMapping/>
-  </p:clrMapOvr>
-</p:sld>
-</file>
-
-<file path=ppt/slides/slide16.xml><?xml version="1.0" encoding="utf-8"?>
-<p:sld xmlns:a="http://schemas.openxmlformats.org/drawingml/2006/main" xmlns:r="http://schemas.openxmlformats.org/officeDocument/2006/relationships" xmlns:p="http://schemas.openxmlformats.org/presentationml/2006/main">
-  <p:cSld>
-    <p:spTree>
-      <p:nvGrpSpPr>
-        <p:cNvPr id="1" name="">
-          <a:extLst>
-            <a:ext uri="{FF2B5EF4-FFF2-40B4-BE49-F238E27FC236}">
-              <a16:creationId xmlns:a16="http://schemas.microsoft.com/office/drawing/2014/main" id="{C83C45A9-3C1F-75B6-3440-0BA4368D2372}"/>
-            </a:ext>
-          </a:extLst>
-        </p:cNvPr>
-        <p:cNvGrpSpPr/>
-        <p:nvPr/>
-      </p:nvGrpSpPr>
-      <p:grpSpPr>
-        <a:xfrm>
-          <a:off x="0" y="0"/>
-          <a:ext cx="0" cy="0"/>
-          <a:chOff x="0" y="0"/>
-          <a:chExt cx="0" cy="0"/>
-        </a:xfrm>
-      </p:grpSpPr>
-      <p:sp>
-        <p:nvSpPr>
-          <p:cNvPr id="2" name="Text 0">
-            <a:extLst>
-              <a:ext uri="{FF2B5EF4-FFF2-40B4-BE49-F238E27FC236}">
-                <a16:creationId xmlns:a16="http://schemas.microsoft.com/office/drawing/2014/main" id="{DEA389BF-4EA5-F613-4727-8A5A02A84577}"/>
-              </a:ext>
-            </a:extLst>
-          </p:cNvPr>
-          <p:cNvSpPr/>
-          <p:nvPr/>
-        </p:nvSpPr>
-        <p:spPr>
-          <a:xfrm>
-            <a:off x="1382417" y="320289"/>
-            <a:ext cx="5063353" cy="505716"/>
-          </a:xfrm>
-          <a:prstGeom prst="rect">
-            <a:avLst/>
-          </a:prstGeom>
-          <a:noFill/>
-          <a:ln/>
-        </p:spPr>
-        <p:txBody>
-          <a:bodyPr wrap="none" lIns="0" tIns="0" rIns="0" bIns="0" rtlCol="0" anchor="t"/>
-          <a:lstStyle/>
-          <a:p>
-            <a:pPr marL="0" indent="0" algn="l">
-              <a:lnSpc>
-                <a:spcPts val="4400"/>
-              </a:lnSpc>
-              <a:buNone/>
-            </a:pPr>
-            <a:r>
-              <a:rPr lang="es-419" sz="3500" noProof="0" dirty="0">
-                <a:solidFill>
-                  <a:srgbClr val="D73AD7"/>
-                </a:solidFill>
-                <a:latin typeface="Source Serif 4 Semi Bold" pitchFamily="34" charset="0"/>
-                <a:ea typeface="Source Serif 4 Semi Bold" pitchFamily="34" charset="-122"/>
-                <a:cs typeface="Source Serif 4 Semi Bold" pitchFamily="34" charset="-120"/>
-              </a:rPr>
-              <a:t>Resultados o Evidencia</a:t>
-            </a:r>
-          </a:p>
-        </p:txBody>
-      </p:sp>
-      <p:sp>
-        <p:nvSpPr>
-          <p:cNvPr id="20" name="Text 7">
-            <a:extLst>
-              <a:ext uri="{FF2B5EF4-FFF2-40B4-BE49-F238E27FC236}">
-                <a16:creationId xmlns:a16="http://schemas.microsoft.com/office/drawing/2014/main" id="{54C77779-4B55-5375-4808-3AED0EB69148}"/>
-              </a:ext>
-            </a:extLst>
-          </p:cNvPr>
-          <p:cNvSpPr/>
-          <p:nvPr/>
-        </p:nvSpPr>
-        <p:spPr>
-          <a:xfrm>
-            <a:off x="773495" y="1332548"/>
-            <a:ext cx="12287250" cy="505716"/>
-          </a:xfrm>
-          <a:prstGeom prst="rect">
-            <a:avLst/>
-          </a:prstGeom>
-          <a:noFill/>
-          <a:ln/>
-        </p:spPr>
-        <p:txBody>
-          <a:bodyPr vert="horz" wrap="square" lIns="0" tIns="0" rIns="0" bIns="0" rtlCol="0" anchor="t">
-            <a:spAutoFit/>
-          </a:bodyPr>
-          <a:lstStyle/>
-          <a:p>
-            <a:pPr marL="246063" lvl="1" defTabSz="404813">
-              <a:lnSpc>
-                <a:spcPct val="150000"/>
-              </a:lnSpc>
-              <a:tabLst>
-                <a:tab pos="16225838" algn="l"/>
-                <a:tab pos="16592550" algn="l"/>
-                <a:tab pos="17124363" algn="l"/>
-              </a:tabLst>
-            </a:pPr>
-            <a:endParaRPr lang="es-419" sz="2400" noProof="0" dirty="0">
-              <a:solidFill>
-                <a:srgbClr val="272525"/>
-              </a:solidFill>
-              <a:latin typeface="Source Serif 4 Semi Bold" pitchFamily="34" charset="0"/>
-              <a:ea typeface="Source Serif 4 Semi Bold" pitchFamily="34" charset="-122"/>
-              <a:cs typeface="Source Serif 4 Semi Bold" pitchFamily="34" charset="-120"/>
-            </a:endParaRPr>
-          </a:p>
-        </p:txBody>
-      </p:sp>
-      <p:pic>
-        <p:nvPicPr>
-          <p:cNvPr id="5" name="Imagen 4">
-            <a:extLst>
-              <a:ext uri="{FF2B5EF4-FFF2-40B4-BE49-F238E27FC236}">
-                <a16:creationId xmlns:a16="http://schemas.microsoft.com/office/drawing/2014/main" id="{C75835E4-D460-0237-D82D-B75819684BFA}"/>
-              </a:ext>
-            </a:extLst>
-          </p:cNvPr>
-          <p:cNvPicPr>
-            <a:picLocks noChangeAspect="1"/>
-          </p:cNvPicPr>
-          <p:nvPr/>
-        </p:nvPicPr>
-        <p:blipFill>
-          <a:blip r:embed="rId3"/>
-          <a:stretch>
-            <a:fillRect/>
-          </a:stretch>
-        </p:blipFill>
-        <p:spPr>
-          <a:xfrm>
-            <a:off x="1244081" y="1103948"/>
-            <a:ext cx="11346077" cy="6897052"/>
-          </a:xfrm>
-          <a:prstGeom prst="rect">
-            <a:avLst/>
-          </a:prstGeom>
-        </p:spPr>
-      </p:pic>
-    </p:spTree>
-    <p:extLst>
-      <p:ext uri="{BB962C8B-B14F-4D97-AF65-F5344CB8AC3E}">
-        <p14:creationId xmlns:p14="http://schemas.microsoft.com/office/powerpoint/2010/main" val="888063565"/>
-      </p:ext>
-    </p:extLst>
-  </p:cSld>
-  <p:clrMapOvr>
-    <a:masterClrMapping/>
-  </p:clrMapOvr>
-</p:sld>
-</file>
-
-<file path=ppt/slides/slide17.xml><?xml version="1.0" encoding="utf-8"?>
-<p:sld xmlns:a="http://schemas.openxmlformats.org/drawingml/2006/main" xmlns:r="http://schemas.openxmlformats.org/officeDocument/2006/relationships" xmlns:p="http://schemas.openxmlformats.org/presentationml/2006/main">
-  <p:cSld>
-    <p:spTree>
-      <p:nvGrpSpPr>
-        <p:cNvPr id="1" name="">
-          <a:extLst>
-            <a:ext uri="{FF2B5EF4-FFF2-40B4-BE49-F238E27FC236}">
-              <a16:creationId xmlns:a16="http://schemas.microsoft.com/office/drawing/2014/main" id="{12DB9498-13B9-10A3-57B0-29D3E01FB8D8}"/>
-            </a:ext>
-          </a:extLst>
-        </p:cNvPr>
-        <p:cNvGrpSpPr/>
-        <p:nvPr/>
-      </p:nvGrpSpPr>
-      <p:grpSpPr>
-        <a:xfrm>
-          <a:off x="0" y="0"/>
-          <a:ext cx="0" cy="0"/>
-          <a:chOff x="0" y="0"/>
-          <a:chExt cx="0" cy="0"/>
-        </a:xfrm>
-      </p:grpSpPr>
-      <p:sp>
-        <p:nvSpPr>
-          <p:cNvPr id="2" name="Text 0">
-            <a:extLst>
-              <a:ext uri="{FF2B5EF4-FFF2-40B4-BE49-F238E27FC236}">
-                <a16:creationId xmlns:a16="http://schemas.microsoft.com/office/drawing/2014/main" id="{E051A928-6668-6D0D-9DB4-D4A73795EBEB}"/>
-              </a:ext>
-            </a:extLst>
-          </p:cNvPr>
-          <p:cNvSpPr/>
-          <p:nvPr/>
-        </p:nvSpPr>
-        <p:spPr>
-          <a:xfrm>
-            <a:off x="1382417" y="320289"/>
-            <a:ext cx="5063353" cy="505716"/>
-          </a:xfrm>
-          <a:prstGeom prst="rect">
-            <a:avLst/>
-          </a:prstGeom>
-          <a:noFill/>
-          <a:ln/>
-        </p:spPr>
-        <p:txBody>
-          <a:bodyPr wrap="none" lIns="0" tIns="0" rIns="0" bIns="0" rtlCol="0" anchor="t"/>
-          <a:lstStyle/>
-          <a:p>
-            <a:pPr marL="0" indent="0" algn="l">
-              <a:lnSpc>
-                <a:spcPts val="4400"/>
-              </a:lnSpc>
-              <a:buNone/>
-            </a:pPr>
-            <a:r>
-              <a:rPr lang="es-419" sz="3500" noProof="0" dirty="0">
-                <a:solidFill>
-                  <a:srgbClr val="D73AD7"/>
-                </a:solidFill>
-                <a:latin typeface="Source Serif 4 Semi Bold" pitchFamily="34" charset="0"/>
-                <a:ea typeface="Source Serif 4 Semi Bold" pitchFamily="34" charset="-122"/>
-                <a:cs typeface="Source Serif 4 Semi Bold" pitchFamily="34" charset="-120"/>
-              </a:rPr>
-              <a:t>Diagrama de Base de Datos</a:t>
-            </a:r>
-          </a:p>
-        </p:txBody>
-      </p:sp>
-      <p:sp>
-        <p:nvSpPr>
-          <p:cNvPr id="20" name="Text 7">
-            <a:extLst>
-              <a:ext uri="{FF2B5EF4-FFF2-40B4-BE49-F238E27FC236}">
-                <a16:creationId xmlns:a16="http://schemas.microsoft.com/office/drawing/2014/main" id="{DFB58816-F6C4-926D-2896-3426C29EB3E1}"/>
-              </a:ext>
-            </a:extLst>
-          </p:cNvPr>
-          <p:cNvSpPr/>
-          <p:nvPr/>
-        </p:nvSpPr>
-        <p:spPr>
-          <a:xfrm>
-            <a:off x="773495" y="1332548"/>
-            <a:ext cx="12287250" cy="505716"/>
-          </a:xfrm>
-          <a:prstGeom prst="rect">
-            <a:avLst/>
-          </a:prstGeom>
-          <a:noFill/>
-          <a:ln/>
-        </p:spPr>
-        <p:txBody>
-          <a:bodyPr vert="horz" wrap="square" lIns="0" tIns="0" rIns="0" bIns="0" rtlCol="0" anchor="t">
-            <a:spAutoFit/>
-          </a:bodyPr>
-          <a:lstStyle/>
-          <a:p>
-            <a:pPr marL="246063" lvl="1" defTabSz="404813">
-              <a:lnSpc>
-                <a:spcPct val="150000"/>
-              </a:lnSpc>
-              <a:tabLst>
-                <a:tab pos="16225838" algn="l"/>
-                <a:tab pos="16592550" algn="l"/>
-                <a:tab pos="17124363" algn="l"/>
-              </a:tabLst>
-            </a:pPr>
-            <a:endParaRPr lang="es-419" sz="2400" noProof="0" dirty="0">
-              <a:solidFill>
-                <a:srgbClr val="272525"/>
-              </a:solidFill>
-              <a:latin typeface="Source Serif 4 Semi Bold" pitchFamily="34" charset="0"/>
-              <a:ea typeface="Source Serif 4 Semi Bold" pitchFamily="34" charset="-122"/>
-              <a:cs typeface="Source Serif 4 Semi Bold" pitchFamily="34" charset="-120"/>
-            </a:endParaRPr>
-          </a:p>
-        </p:txBody>
-      </p:sp>
-      <p:pic>
-        <p:nvPicPr>
-          <p:cNvPr id="4" name="Imagen 3">
-            <a:extLst>
-              <a:ext uri="{FF2B5EF4-FFF2-40B4-BE49-F238E27FC236}">
-                <a16:creationId xmlns:a16="http://schemas.microsoft.com/office/drawing/2014/main" id="{E3071420-8B5A-BD9B-64DA-A1B090A54BF5}"/>
-              </a:ext>
-            </a:extLst>
-          </p:cNvPr>
-          <p:cNvPicPr>
-            <a:picLocks noChangeAspect="1"/>
-          </p:cNvPicPr>
-          <p:nvPr/>
-        </p:nvPicPr>
-        <p:blipFill>
-          <a:blip r:embed="rId3"/>
-          <a:stretch>
-            <a:fillRect/>
-          </a:stretch>
-        </p:blipFill>
-        <p:spPr>
-          <a:xfrm>
-            <a:off x="9108161" y="0"/>
-            <a:ext cx="4981934" cy="7403595"/>
-          </a:xfrm>
-          <a:prstGeom prst="rect">
-            <a:avLst/>
-          </a:prstGeom>
-        </p:spPr>
-      </p:pic>
-    </p:spTree>
-    <p:extLst>
-      <p:ext uri="{BB962C8B-B14F-4D97-AF65-F5344CB8AC3E}">
-        <p14:creationId xmlns:p14="http://schemas.microsoft.com/office/powerpoint/2010/main" val="2980798916"/>
-      </p:ext>
-    </p:extLst>
-  </p:cSld>
-  <p:clrMapOvr>
-    <a:masterClrMapping/>
-  </p:clrMapOvr>
-</p:sld>
-</file>
-
-<file path=ppt/slides/slide18.xml><?xml version="1.0" encoding="utf-8"?>
-<p:sld xmlns:a="http://schemas.openxmlformats.org/drawingml/2006/main" xmlns:r="http://schemas.openxmlformats.org/officeDocument/2006/relationships" xmlns:p="http://schemas.openxmlformats.org/presentationml/2006/main">
-  <p:cSld>
-    <p:spTree>
-      <p:nvGrpSpPr>
-        <p:cNvPr id="1" name="">
-          <a:extLst>
-            <a:ext uri="{FF2B5EF4-FFF2-40B4-BE49-F238E27FC236}">
-              <a16:creationId xmlns:a16="http://schemas.microsoft.com/office/drawing/2014/main" id="{4CA26CE9-3A22-BF8A-4C17-8B63D52D9907}"/>
-            </a:ext>
-          </a:extLst>
-        </p:cNvPr>
-        <p:cNvGrpSpPr/>
-        <p:nvPr/>
-      </p:nvGrpSpPr>
-      <p:grpSpPr>
-        <a:xfrm>
-          <a:off x="0" y="0"/>
-          <a:ext cx="0" cy="0"/>
-          <a:chOff x="0" y="0"/>
-          <a:chExt cx="0" cy="0"/>
-        </a:xfrm>
-      </p:grpSpPr>
-      <p:sp>
-        <p:nvSpPr>
-          <p:cNvPr id="2" name="Text 0">
-            <a:extLst>
-              <a:ext uri="{FF2B5EF4-FFF2-40B4-BE49-F238E27FC236}">
-                <a16:creationId xmlns:a16="http://schemas.microsoft.com/office/drawing/2014/main" id="{346EAC2C-18BB-204D-FB03-7EE53973B1D9}"/>
-              </a:ext>
-            </a:extLst>
-          </p:cNvPr>
-          <p:cNvSpPr/>
-          <p:nvPr/>
-        </p:nvSpPr>
-        <p:spPr>
-          <a:xfrm>
-            <a:off x="1207001" y="326708"/>
-            <a:ext cx="7053143" cy="563285"/>
-          </a:xfrm>
-          <a:prstGeom prst="rect">
-            <a:avLst/>
-          </a:prstGeom>
-          <a:noFill/>
-          <a:ln/>
-        </p:spPr>
-        <p:txBody>
-          <a:bodyPr wrap="none" lIns="0" tIns="0" rIns="0" bIns="0" rtlCol="0" anchor="t"/>
-          <a:lstStyle/>
-          <a:p>
-            <a:pPr marL="0" indent="0" algn="l">
-              <a:lnSpc>
-                <a:spcPts val="4400"/>
-              </a:lnSpc>
-              <a:buNone/>
-            </a:pPr>
-            <a:r>
-              <a:rPr lang="es-419" sz="3500" noProof="0" dirty="0" err="1">
-                <a:solidFill>
-                  <a:srgbClr val="D73AD7"/>
-                </a:solidFill>
-                <a:latin typeface="Source Serif 4 Semi Bold" pitchFamily="34" charset="0"/>
-                <a:ea typeface="Source Serif 4 Semi Bold" pitchFamily="34" charset="-122"/>
-                <a:cs typeface="Source Serif 4 Semi Bold" pitchFamily="34" charset="-120"/>
-              </a:rPr>
-              <a:t>Stack</a:t>
-            </a:r>
-            <a:r>
-              <a:rPr lang="es-419" sz="3500" noProof="0" dirty="0">
-                <a:solidFill>
-                  <a:srgbClr val="D73AD7"/>
-                </a:solidFill>
-                <a:latin typeface="Source Serif 4 Semi Bold" pitchFamily="34" charset="0"/>
-                <a:ea typeface="Source Serif 4 Semi Bold" pitchFamily="34" charset="-122"/>
-                <a:cs typeface="Source Serif 4 Semi Bold" pitchFamily="34" charset="-120"/>
-              </a:rPr>
-              <a:t> Técnico</a:t>
-            </a:r>
-          </a:p>
-        </p:txBody>
-      </p:sp>
-      <p:sp>
-        <p:nvSpPr>
-          <p:cNvPr id="8" name="Rectangle 2">
-            <a:extLst>
-              <a:ext uri="{FF2B5EF4-FFF2-40B4-BE49-F238E27FC236}">
-                <a16:creationId xmlns:a16="http://schemas.microsoft.com/office/drawing/2014/main" id="{9DF37546-4222-4C49-60B1-207E1AEEE201}"/>
-              </a:ext>
-            </a:extLst>
-          </p:cNvPr>
-          <p:cNvSpPr>
-            <a:spLocks noChangeArrowheads="1"/>
-          </p:cNvSpPr>
-          <p:nvPr/>
-        </p:nvSpPr>
-        <p:spPr bwMode="auto">
-          <a:xfrm>
-            <a:off x="1351280" y="3840480"/>
-            <a:ext cx="14630400" cy="0"/>
-          </a:xfrm>
-          <a:prstGeom prst="rect">
-            <a:avLst/>
-          </a:prstGeom>
-          <a:noFill/>
-          <a:ln>
-            <a:noFill/>
-          </a:ln>
-          <a:effectLst/>
-          <a:extLst>
-            <a:ext uri="{909E8E84-426E-40DD-AFC4-6F175D3DCCD1}">
-              <a14:hiddenFill xmlns:a14="http://schemas.microsoft.com/office/drawing/2010/main">
-                <a:solidFill>
-                  <a:schemeClr val="accent1"/>
-                </a:solidFill>
-              </a14:hiddenFill>
-            </a:ext>
-            <a:ext uri="{91240B29-F687-4F45-9708-019B960494DF}">
-              <a14:hiddenLine xmlns:a14="http://schemas.microsoft.com/office/drawing/2010/main" w="9525">
-                <a:solidFill>
-                  <a:schemeClr val="tx1"/>
-                </a:solidFill>
-                <a:miter lim="800000"/>
-                <a:headEnd/>
-                <a:tailEnd/>
-              </a14:hiddenLine>
-            </a:ext>
-            <a:ext uri="{AF507438-7753-43E0-B8FC-AC1667EBCBE1}">
-              <a14:hiddenEffects xmlns:a14="http://schemas.microsoft.com/office/drawing/2010/main">
-                <a:effectLst>
-                  <a:outerShdw dist="35921" dir="2700000" algn="ctr" rotWithShape="0">
-                    <a:schemeClr val="bg2"/>
-                  </a:outerShdw>
-                </a:effectLst>
-              </a14:hiddenEffects>
-            </a:ext>
-          </a:extLst>
-        </p:spPr>
-        <p:txBody>
-          <a:bodyPr vert="horz" wrap="none" lIns="91440" tIns="45720" rIns="91440" bIns="45720" numCol="1" anchor="ctr" anchorCtr="0" compatLnSpc="1">
-            <a:prstTxWarp prst="textNoShape">
-              <a:avLst/>
-            </a:prstTxWarp>
-            <a:spAutoFit/>
-          </a:bodyPr>
-          <a:lstStyle/>
-          <a:p>
-            <a:pPr marL="0" marR="0" lvl="0" indent="0" algn="l" defTabSz="914400" rtl="0" eaLnBrk="0" fontAlgn="base" latinLnBrk="0" hangingPunct="0">
-              <a:lnSpc>
-                <a:spcPct val="100000"/>
-              </a:lnSpc>
-              <a:spcBef>
-                <a:spcPct val="0"/>
-              </a:spcBef>
-              <a:spcAft>
-                <a:spcPct val="0"/>
-              </a:spcAft>
-              <a:buClrTx/>
-              <a:buSzTx/>
-              <a:buFontTx/>
-              <a:buChar char="•"/>
-              <a:tabLst/>
-            </a:pPr>
-            <a:r>
-              <a:rPr kumimoji="0" lang="es-CL" altLang="es-CL" sz="1800" b="0" i="0" u="none" strike="noStrike" cap="none" normalizeH="0" baseline="0" dirty="0" err="1">
-                <a:ln>
-                  <a:noFill/>
-                </a:ln>
-                <a:solidFill>
-                  <a:schemeClr val="tx1"/>
-                </a:solidFill>
-                <a:effectLst/>
-                <a:latin typeface="Arial" panose="020B0604020202020204" pitchFamily="34" charset="0"/>
-              </a:rPr>
-              <a:t>Backend</a:t>
-            </a:r>
-            <a:r>
-              <a:rPr kumimoji="0" lang="es-CL" altLang="es-CL" sz="1800" b="0" i="0" u="none" strike="noStrike" cap="none" normalizeH="0" baseline="0" dirty="0">
-                <a:ln>
-                  <a:noFill/>
-                </a:ln>
-                <a:solidFill>
-                  <a:schemeClr val="tx1"/>
-                </a:solidFill>
-                <a:effectLst/>
-                <a:latin typeface="Arial" panose="020B0604020202020204" pitchFamily="34" charset="0"/>
-              </a:rPr>
-              <a:t>: .NET 8 Web API (C#), </a:t>
-            </a:r>
-            <a:r>
-              <a:rPr kumimoji="0" lang="es-CL" altLang="es-CL" sz="1800" b="0" i="0" u="none" strike="noStrike" cap="none" normalizeH="0" baseline="0" dirty="0" err="1">
-                <a:ln>
-                  <a:noFill/>
-                </a:ln>
-                <a:solidFill>
-                  <a:schemeClr val="tx1"/>
-                </a:solidFill>
-                <a:effectLst/>
-                <a:latin typeface="Arial" panose="020B0604020202020204" pitchFamily="34" charset="0"/>
-              </a:rPr>
-              <a:t>Entity</a:t>
-            </a:r>
-            <a:r>
-              <a:rPr kumimoji="0" lang="es-CL" altLang="es-CL" sz="1800" b="0" i="0" u="none" strike="noStrike" cap="none" normalizeH="0" baseline="0" dirty="0">
-                <a:ln>
-                  <a:noFill/>
-                </a:ln>
-                <a:solidFill>
-                  <a:schemeClr val="tx1"/>
-                </a:solidFill>
-                <a:effectLst/>
-                <a:latin typeface="Arial" panose="020B0604020202020204" pitchFamily="34" charset="0"/>
-              </a:rPr>
-              <a:t> Framework Core, SQL Server</a:t>
-            </a:r>
-          </a:p>
-          <a:p>
-            <a:pPr marL="0" marR="0" lvl="0" indent="0" algn="l" defTabSz="914400" rtl="0" eaLnBrk="0" fontAlgn="base" latinLnBrk="0" hangingPunct="0">
-              <a:lnSpc>
-                <a:spcPct val="100000"/>
-              </a:lnSpc>
-              <a:spcBef>
-                <a:spcPct val="0"/>
-              </a:spcBef>
-              <a:spcAft>
-                <a:spcPct val="0"/>
-              </a:spcAft>
-              <a:buClrTx/>
-              <a:buSzTx/>
-              <a:buFontTx/>
-              <a:buChar char="•"/>
-              <a:tabLst/>
-            </a:pPr>
-            <a:r>
-              <a:rPr kumimoji="0" lang="es-CL" altLang="es-CL" sz="1800" b="0" i="0" u="none" strike="noStrike" cap="none" normalizeH="0" baseline="0" dirty="0" err="1">
-                <a:ln>
-                  <a:noFill/>
-                </a:ln>
-                <a:solidFill>
-                  <a:schemeClr val="tx1"/>
-                </a:solidFill>
-                <a:effectLst/>
-                <a:latin typeface="Arial" panose="020B0604020202020204" pitchFamily="34" charset="0"/>
-              </a:rPr>
-              <a:t>Frontend</a:t>
-            </a:r>
-            <a:r>
-              <a:rPr kumimoji="0" lang="es-CL" altLang="es-CL" sz="1800" b="0" i="0" u="none" strike="noStrike" cap="none" normalizeH="0" baseline="0" dirty="0">
-                <a:ln>
-                  <a:noFill/>
-                </a:ln>
-                <a:solidFill>
-                  <a:schemeClr val="tx1"/>
-                </a:solidFill>
-                <a:effectLst/>
-                <a:latin typeface="Arial" panose="020B0604020202020204" pitchFamily="34" charset="0"/>
-              </a:rPr>
-              <a:t>: </a:t>
-            </a:r>
-            <a:r>
-              <a:rPr kumimoji="0" lang="es-CL" altLang="es-CL" sz="1800" b="0" i="0" u="none" strike="noStrike" cap="none" normalizeH="0" baseline="0" dirty="0" err="1">
-                <a:ln>
-                  <a:noFill/>
-                </a:ln>
-                <a:solidFill>
-                  <a:schemeClr val="tx1"/>
-                </a:solidFill>
-                <a:effectLst/>
-                <a:latin typeface="Arial" panose="020B0604020202020204" pitchFamily="34" charset="0"/>
-              </a:rPr>
-              <a:t>React</a:t>
-            </a:r>
-            <a:r>
-              <a:rPr kumimoji="0" lang="es-CL" altLang="es-CL" sz="1800" b="0" i="0" u="none" strike="noStrike" cap="none" normalizeH="0" baseline="0" dirty="0">
-                <a:ln>
-                  <a:noFill/>
-                </a:ln>
-                <a:solidFill>
-                  <a:schemeClr val="tx1"/>
-                </a:solidFill>
-                <a:effectLst/>
-                <a:latin typeface="Arial" panose="020B0604020202020204" pitchFamily="34" charset="0"/>
-              </a:rPr>
-              <a:t> + Vite + </a:t>
-            </a:r>
-            <a:r>
-              <a:rPr kumimoji="0" lang="es-CL" altLang="es-CL" sz="1800" b="0" i="0" u="none" strike="noStrike" cap="none" normalizeH="0" baseline="0" dirty="0" err="1">
-                <a:ln>
-                  <a:noFill/>
-                </a:ln>
-                <a:solidFill>
-                  <a:schemeClr val="tx1"/>
-                </a:solidFill>
-                <a:effectLst/>
-                <a:latin typeface="Arial" panose="020B0604020202020204" pitchFamily="34" charset="0"/>
-              </a:rPr>
-              <a:t>TypeScript</a:t>
-            </a:r>
-            <a:r>
-              <a:rPr kumimoji="0" lang="es-CL" altLang="es-CL" sz="1800" b="0" i="0" u="none" strike="noStrike" cap="none" normalizeH="0" baseline="0" dirty="0">
-                <a:ln>
-                  <a:noFill/>
-                </a:ln>
-                <a:solidFill>
-                  <a:schemeClr val="tx1"/>
-                </a:solidFill>
-                <a:effectLst/>
-                <a:latin typeface="Arial" panose="020B0604020202020204" pitchFamily="34" charset="0"/>
-              </a:rPr>
-              <a:t> + </a:t>
-            </a:r>
-            <a:r>
-              <a:rPr kumimoji="0" lang="es-CL" altLang="es-CL" sz="1800" b="0" i="0" u="none" strike="noStrike" cap="none" normalizeH="0" baseline="0" dirty="0" err="1">
-                <a:ln>
-                  <a:noFill/>
-                </a:ln>
-                <a:solidFill>
-                  <a:schemeClr val="tx1"/>
-                </a:solidFill>
-                <a:effectLst/>
-                <a:latin typeface="Arial" panose="020B0604020202020204" pitchFamily="34" charset="0"/>
-              </a:rPr>
-              <a:t>Tailwind</a:t>
-            </a:r>
-            <a:r>
-              <a:rPr kumimoji="0" lang="es-CL" altLang="es-CL" sz="1800" b="0" i="0" u="none" strike="noStrike" cap="none" normalizeH="0" baseline="0" dirty="0">
-                <a:ln>
-                  <a:noFill/>
-                </a:ln>
-                <a:solidFill>
-                  <a:schemeClr val="tx1"/>
-                </a:solidFill>
-                <a:effectLst/>
-                <a:latin typeface="Arial" panose="020B0604020202020204" pitchFamily="34" charset="0"/>
-              </a:rPr>
-              <a:t> CSS</a:t>
-            </a:r>
-          </a:p>
-          <a:p>
-            <a:pPr marL="0" marR="0" lvl="0" indent="0" algn="l" defTabSz="914400" rtl="0" eaLnBrk="0" fontAlgn="base" latinLnBrk="0" hangingPunct="0">
-              <a:lnSpc>
-                <a:spcPct val="100000"/>
-              </a:lnSpc>
-              <a:spcBef>
-                <a:spcPct val="0"/>
-              </a:spcBef>
-              <a:spcAft>
-                <a:spcPct val="0"/>
-              </a:spcAft>
-              <a:buClrTx/>
-              <a:buSzTx/>
-              <a:buFontTx/>
-              <a:buChar char="•"/>
-              <a:tabLst/>
-            </a:pPr>
-            <a:r>
-              <a:rPr kumimoji="0" lang="es-CL" altLang="es-CL" sz="1800" b="0" i="0" u="none" strike="noStrike" cap="none" normalizeH="0" baseline="0" dirty="0">
-                <a:ln>
-                  <a:noFill/>
-                </a:ln>
-                <a:solidFill>
-                  <a:schemeClr val="tx1"/>
-                </a:solidFill>
-                <a:effectLst/>
-                <a:latin typeface="Arial" panose="020B0604020202020204" pitchFamily="34" charset="0"/>
-              </a:rPr>
-              <a:t>IA: </a:t>
-            </a:r>
-            <a:r>
-              <a:rPr kumimoji="0" lang="es-CL" altLang="es-CL" sz="1800" b="0" i="0" u="none" strike="noStrike" cap="none" normalizeH="0" baseline="0" dirty="0" err="1">
-                <a:ln>
-                  <a:noFill/>
-                </a:ln>
-                <a:solidFill>
-                  <a:schemeClr val="tx1"/>
-                </a:solidFill>
-                <a:effectLst/>
-                <a:latin typeface="Arial" panose="020B0604020202020204" pitchFamily="34" charset="0"/>
-              </a:rPr>
-              <a:t>OpenAI</a:t>
-            </a:r>
-            <a:r>
-              <a:rPr kumimoji="0" lang="es-CL" altLang="es-CL" sz="1800" b="0" i="0" u="none" strike="noStrike" cap="none" normalizeH="0" baseline="0" dirty="0">
-                <a:ln>
-                  <a:noFill/>
-                </a:ln>
-                <a:solidFill>
-                  <a:schemeClr val="tx1"/>
-                </a:solidFill>
-                <a:effectLst/>
-                <a:latin typeface="Arial" panose="020B0604020202020204" pitchFamily="34" charset="0"/>
-              </a:rPr>
-              <a:t> API (modelo GPT‑4o o GPT‑5, a definir en configuración)</a:t>
-            </a:r>
-          </a:p>
-          <a:p>
-            <a:pPr marL="0" marR="0" lvl="0" indent="0" algn="l" defTabSz="914400" rtl="0" eaLnBrk="0" fontAlgn="base" latinLnBrk="0" hangingPunct="0">
-              <a:lnSpc>
-                <a:spcPct val="100000"/>
-              </a:lnSpc>
-              <a:spcBef>
-                <a:spcPct val="0"/>
-              </a:spcBef>
-              <a:spcAft>
-                <a:spcPct val="0"/>
-              </a:spcAft>
-              <a:buClrTx/>
-              <a:buSzTx/>
-              <a:buFontTx/>
-              <a:buChar char="•"/>
-              <a:tabLst/>
-            </a:pPr>
-            <a:r>
-              <a:rPr kumimoji="0" lang="es-CL" altLang="es-CL" sz="1800" b="0" i="0" u="none" strike="noStrike" cap="none" normalizeH="0" baseline="0" dirty="0">
-                <a:ln>
-                  <a:noFill/>
-                </a:ln>
-                <a:solidFill>
-                  <a:schemeClr val="tx1"/>
-                </a:solidFill>
-                <a:effectLst/>
-                <a:latin typeface="Arial" panose="020B0604020202020204" pitchFamily="34" charset="0"/>
-              </a:rPr>
-              <a:t>Autenticación: JWT con roles (Paciente, Médico, Administrador)</a:t>
-            </a:r>
-          </a:p>
-          <a:p>
-            <a:pPr marL="0" marR="0" lvl="0" indent="0" algn="l" defTabSz="914400" rtl="0" eaLnBrk="0" fontAlgn="base" latinLnBrk="0" hangingPunct="0">
-              <a:lnSpc>
-                <a:spcPct val="100000"/>
-              </a:lnSpc>
-              <a:spcBef>
-                <a:spcPct val="0"/>
-              </a:spcBef>
-              <a:spcAft>
-                <a:spcPct val="0"/>
-              </a:spcAft>
-              <a:buClrTx/>
-              <a:buSzTx/>
-              <a:buFontTx/>
-              <a:buChar char="•"/>
-              <a:tabLst/>
-            </a:pPr>
-            <a:r>
-              <a:rPr kumimoji="0" lang="es-CL" altLang="es-CL" sz="1800" b="0" i="0" u="none" strike="noStrike" cap="none" normalizeH="0" baseline="0" dirty="0" err="1">
-                <a:ln>
-                  <a:noFill/>
-                </a:ln>
-                <a:solidFill>
-                  <a:schemeClr val="tx1"/>
-                </a:solidFill>
-                <a:effectLst/>
-                <a:latin typeface="Arial" panose="020B0604020202020204" pitchFamily="34" charset="0"/>
-              </a:rPr>
-              <a:t>Observabilidad</a:t>
-            </a:r>
-            <a:r>
-              <a:rPr kumimoji="0" lang="es-CL" altLang="es-CL" sz="1800" b="0" i="0" u="none" strike="noStrike" cap="none" normalizeH="0" baseline="0" dirty="0">
-                <a:ln>
-                  <a:noFill/>
-                </a:ln>
-                <a:solidFill>
-                  <a:schemeClr val="tx1"/>
-                </a:solidFill>
-                <a:effectLst/>
-                <a:latin typeface="Arial" panose="020B0604020202020204" pitchFamily="34" charset="0"/>
-              </a:rPr>
-              <a:t>: logs estructurados y métricas básicas</a:t>
-            </a:r>
-          </a:p>
-        </p:txBody>
-      </p:sp>
-    </p:spTree>
-    <p:extLst>
-      <p:ext uri="{BB962C8B-B14F-4D97-AF65-F5344CB8AC3E}">
-        <p14:creationId xmlns:p14="http://schemas.microsoft.com/office/powerpoint/2010/main" val="348460117"/>
-      </p:ext>
-    </p:extLst>
-  </p:cSld>
-  <p:clrMapOvr>
-    <a:masterClrMapping/>
-  </p:clrMapOvr>
-</p:sld>
-</file>
-
-<file path=ppt/slides/slide19.xml><?xml version="1.0" encoding="utf-8"?>
 <p:sld xmlns:a="http://schemas.openxmlformats.org/drawingml/2006/main" xmlns:r="http://schemas.openxmlformats.org/officeDocument/2006/relationships" xmlns:p="http://schemas.openxmlformats.org/presentationml/2006/main">
   <p:cSld>
     <p:spTree>
@@ -9592,6 +7387,89 @@
     <p:extLst>
       <p:ext uri="{BB962C8B-B14F-4D97-AF65-F5344CB8AC3E}">
         <p14:creationId xmlns:p14="http://schemas.microsoft.com/office/powerpoint/2010/main" val="2795812136"/>
+      </p:ext>
+    </p:extLst>
+  </p:cSld>
+  <p:clrMapOvr>
+    <a:masterClrMapping/>
+  </p:clrMapOvr>
+</p:sld>
+</file>
+
+<file path=ppt/slides/slide15.xml><?xml version="1.0" encoding="utf-8"?>
+<p:sld xmlns:a="http://schemas.openxmlformats.org/drawingml/2006/main" xmlns:r="http://schemas.openxmlformats.org/officeDocument/2006/relationships" xmlns:p="http://schemas.openxmlformats.org/presentationml/2006/main">
+  <p:cSld>
+    <p:spTree>
+      <p:nvGrpSpPr>
+        <p:cNvPr id="1" name="">
+          <a:extLst>
+            <a:ext uri="{FF2B5EF4-FFF2-40B4-BE49-F238E27FC236}">
+              <a16:creationId xmlns:a16="http://schemas.microsoft.com/office/drawing/2014/main" id="{8686BD5C-45C9-F1FE-5B2B-29665E9830B2}"/>
+            </a:ext>
+          </a:extLst>
+        </p:cNvPr>
+        <p:cNvGrpSpPr/>
+        <p:nvPr/>
+      </p:nvGrpSpPr>
+      <p:grpSpPr>
+        <a:xfrm>
+          <a:off x="0" y="0"/>
+          <a:ext cx="0" cy="0"/>
+          <a:chOff x="0" y="0"/>
+          <a:chExt cx="0" cy="0"/>
+        </a:xfrm>
+      </p:grpSpPr>
+      <p:sp>
+        <p:nvSpPr>
+          <p:cNvPr id="2" name="Text 0">
+            <a:extLst>
+              <a:ext uri="{FF2B5EF4-FFF2-40B4-BE49-F238E27FC236}">
+                <a16:creationId xmlns:a16="http://schemas.microsoft.com/office/drawing/2014/main" id="{23B898BD-CD4C-C20E-DD22-C201D3AA7B0E}"/>
+              </a:ext>
+            </a:extLst>
+          </p:cNvPr>
+          <p:cNvSpPr/>
+          <p:nvPr/>
+        </p:nvSpPr>
+        <p:spPr>
+          <a:xfrm>
+            <a:off x="2637986" y="3057993"/>
+            <a:ext cx="8604918" cy="1850863"/>
+          </a:xfrm>
+          <a:prstGeom prst="rect">
+            <a:avLst/>
+          </a:prstGeom>
+          <a:noFill/>
+          <a:ln/>
+        </p:spPr>
+        <p:txBody>
+          <a:bodyPr wrap="none" lIns="0" tIns="0" rIns="0" bIns="0" rtlCol="0" anchor="t"/>
+          <a:lstStyle/>
+          <a:p>
+            <a:pPr marL="0" indent="0" algn="ctr">
+              <a:lnSpc>
+                <a:spcPts val="4400"/>
+              </a:lnSpc>
+              <a:buNone/>
+            </a:pPr>
+            <a:r>
+              <a:rPr lang="es-419" sz="8000" noProof="0" dirty="0">
+                <a:solidFill>
+                  <a:srgbClr val="D73AD7"/>
+                </a:solidFill>
+                <a:latin typeface="Source Serif 4 Semi Bold" pitchFamily="34" charset="0"/>
+                <a:ea typeface="Source Serif 4 Semi Bold" pitchFamily="34" charset="-122"/>
+                <a:cs typeface="Source Serif 4 Semi Bold" pitchFamily="34" charset="-120"/>
+              </a:rPr>
+              <a:t>¿Preguntas?</a:t>
+            </a:r>
+          </a:p>
+        </p:txBody>
+      </p:sp>
+    </p:spTree>
+    <p:extLst>
+      <p:ext uri="{BB962C8B-B14F-4D97-AF65-F5344CB8AC3E}">
+        <p14:creationId xmlns:p14="http://schemas.microsoft.com/office/powerpoint/2010/main" val="2588198695"/>
       </p:ext>
     </p:extLst>
   </p:cSld>
@@ -9618,47 +7496,6 @@
           <a:chExt cx="0" cy="0"/>
         </a:xfrm>
       </p:grpSpPr>
-      <p:sp>
-        <p:nvSpPr>
-          <p:cNvPr id="2" name="Text 0"/>
-          <p:cNvSpPr/>
-          <p:nvPr/>
-        </p:nvSpPr>
-        <p:spPr>
-          <a:xfrm>
-            <a:off x="837724" y="754975"/>
-            <a:ext cx="10223566" cy="1693257"/>
-          </a:xfrm>
-          <a:prstGeom prst="rect">
-            <a:avLst/>
-          </a:prstGeom>
-          <a:noFill/>
-          <a:ln/>
-        </p:spPr>
-        <p:txBody>
-          <a:bodyPr wrap="none" lIns="0" tIns="0" rIns="0" bIns="0" rtlCol="0" anchor="t"/>
-          <a:lstStyle/>
-          <a:p>
-            <a:pPr marL="0" indent="0" algn="l">
-              <a:lnSpc>
-                <a:spcPts val="4950"/>
-              </a:lnSpc>
-              <a:buNone/>
-            </a:pPr>
-            <a:r>
-              <a:rPr lang="es-419" sz="3950" noProof="0" dirty="0">
-                <a:solidFill>
-                  <a:srgbClr val="D73AD7"/>
-                </a:solidFill>
-                <a:latin typeface="Source Serif 4 Semi Bold" pitchFamily="34" charset="0"/>
-                <a:ea typeface="Source Serif 4 Semi Bold" pitchFamily="34" charset="-122"/>
-                <a:cs typeface="Source Serif 4 Semi Bold" pitchFamily="34" charset="-120"/>
-              </a:rPr>
-              <a:t>Objetivo General</a:t>
-            </a:r>
-          </a:p>
-        </p:txBody>
-      </p:sp>
       <p:pic>
         <p:nvPicPr>
           <p:cNvPr id="3" name="Image 0" descr="preencoded.png"/>
@@ -9691,8 +7528,8 @@
         </p:nvSpPr>
         <p:spPr>
           <a:xfrm>
-            <a:off x="7315200" y="754976"/>
-            <a:ext cx="6477475" cy="5291864"/>
+            <a:off x="1432798" y="588764"/>
+            <a:ext cx="4088130" cy="506849"/>
           </a:xfrm>
           <a:prstGeom prst="rect">
             <a:avLst/>
@@ -9725,53 +7562,16 @@
           </a:p>
         </p:txBody>
       </p:sp>
-    </p:spTree>
-  </p:cSld>
-  <p:clrMapOvr>
-    <a:masterClrMapping/>
-  </p:clrMapOvr>
-</p:sld>
-</file>
-
-<file path=ppt/slides/slide20.xml><?xml version="1.0" encoding="utf-8"?>
-<p:sld xmlns:a="http://schemas.openxmlformats.org/drawingml/2006/main" xmlns:r="http://schemas.openxmlformats.org/officeDocument/2006/relationships" xmlns:p="http://schemas.openxmlformats.org/presentationml/2006/main">
-  <p:cSld>
-    <p:spTree>
-      <p:nvGrpSpPr>
-        <p:cNvPr id="1" name="">
-          <a:extLst>
-            <a:ext uri="{FF2B5EF4-FFF2-40B4-BE49-F238E27FC236}">
-              <a16:creationId xmlns:a16="http://schemas.microsoft.com/office/drawing/2014/main" id="{8686BD5C-45C9-F1FE-5B2B-29665E9830B2}"/>
-            </a:ext>
-          </a:extLst>
-        </p:cNvPr>
-        <p:cNvGrpSpPr/>
-        <p:nvPr/>
-      </p:nvGrpSpPr>
-      <p:grpSpPr>
-        <a:xfrm>
-          <a:off x="0" y="0"/>
-          <a:ext cx="0" cy="0"/>
-          <a:chOff x="0" y="0"/>
-          <a:chExt cx="0" cy="0"/>
-        </a:xfrm>
-      </p:grpSpPr>
-      <p:sp>
-        <p:nvSpPr>
-          <p:cNvPr id="2" name="Text 0">
-            <a:extLst>
-              <a:ext uri="{FF2B5EF4-FFF2-40B4-BE49-F238E27FC236}">
-                <a16:creationId xmlns:a16="http://schemas.microsoft.com/office/drawing/2014/main" id="{23B898BD-CD4C-C20E-DD22-C201D3AA7B0E}"/>
-              </a:ext>
-            </a:extLst>
-          </p:cNvPr>
+      <p:sp>
+        <p:nvSpPr>
+          <p:cNvPr id="5" name="Text 2"/>
           <p:cNvSpPr/>
           <p:nvPr/>
         </p:nvSpPr>
         <p:spPr>
           <a:xfrm>
-            <a:off x="2637986" y="3057993"/>
-            <a:ext cx="8604918" cy="1850863"/>
+            <a:off x="6895780" y="1831232"/>
+            <a:ext cx="6214705" cy="689134"/>
           </a:xfrm>
           <a:prstGeom prst="rect">
             <a:avLst/>
@@ -9780,35 +7580,128 @@
           <a:ln/>
         </p:spPr>
         <p:txBody>
-          <a:bodyPr wrap="none" lIns="0" tIns="0" rIns="0" bIns="0" rtlCol="0" anchor="t"/>
-          <a:lstStyle/>
-          <a:p>
-            <a:pPr marL="0" indent="0" algn="ctr">
+          <a:bodyPr wrap="square" lIns="0" tIns="0" rIns="0" bIns="0" rtlCol="0" anchor="t"/>
+          <a:lstStyle/>
+          <a:p>
+            <a:pPr marL="0" indent="0" algn="l">
               <a:lnSpc>
-                <a:spcPts val="4400"/>
+                <a:spcPts val="2700"/>
               </a:lnSpc>
               <a:buNone/>
             </a:pPr>
             <a:r>
-              <a:rPr lang="es-419" sz="8000" noProof="0" dirty="0">
-                <a:solidFill>
-                  <a:srgbClr val="D73AD7"/>
-                </a:solidFill>
-                <a:latin typeface="Source Serif 4 Semi Bold" pitchFamily="34" charset="0"/>
-                <a:ea typeface="Source Serif 4 Semi Bold" pitchFamily="34" charset="-122"/>
-                <a:cs typeface="Source Serif 4 Semi Bold" pitchFamily="34" charset="-120"/>
+              <a:rPr lang="es-419" sz="2000" noProof="0" dirty="0">
+                <a:solidFill>
+                  <a:srgbClr val="D75BE2"/>
+                </a:solidFill>
+                <a:latin typeface="Source Sans 3" pitchFamily="34" charset="0"/>
+                <a:ea typeface="Source Sans 3" pitchFamily="34" charset="-122"/>
+                <a:cs typeface="Source Sans 3" pitchFamily="34" charset="-120"/>
               </a:rPr>
-              <a:t>¿Preguntas?</a:t>
-            </a:r>
+              <a:t>Sobrecarga y mala orientación</a:t>
+            </a:r>
+            <a:r>
+              <a:rPr lang="es-419" sz="2000" noProof="0" dirty="0">
+                <a:solidFill>
+                  <a:srgbClr val="272525"/>
+                </a:solidFill>
+                <a:latin typeface="Source Sans 3" pitchFamily="34" charset="0"/>
+                <a:ea typeface="Source Sans 3" pitchFamily="34" charset="-122"/>
+                <a:cs typeface="Source Sans 3" pitchFamily="34" charset="-120"/>
+              </a:rPr>
+              <a:t> en agendas médicas: un problema generalizado que afecta a pacientes y profesionales.</a:t>
+            </a:r>
+            <a:endParaRPr lang="es-419" sz="2000" noProof="0" dirty="0"/>
+          </a:p>
+        </p:txBody>
+      </p:sp>
+      <p:sp>
+        <p:nvSpPr>
+          <p:cNvPr id="6" name="Text 3"/>
+          <p:cNvSpPr/>
+          <p:nvPr/>
+        </p:nvSpPr>
+        <p:spPr>
+          <a:xfrm>
+            <a:off x="6895780" y="3645396"/>
+            <a:ext cx="6214705" cy="689134"/>
+          </a:xfrm>
+          <a:prstGeom prst="rect">
+            <a:avLst/>
+          </a:prstGeom>
+          <a:noFill/>
+          <a:ln/>
+        </p:spPr>
+        <p:txBody>
+          <a:bodyPr wrap="square" lIns="0" tIns="0" rIns="0" bIns="0" rtlCol="0" anchor="t"/>
+          <a:lstStyle/>
+          <a:p>
+            <a:pPr marL="342900" indent="-342900" algn="l">
+              <a:lnSpc>
+                <a:spcPts val="2700"/>
+              </a:lnSpc>
+              <a:buSzPct val="100000"/>
+              <a:buChar char="•"/>
+            </a:pPr>
+            <a:r>
+              <a:rPr lang="es-419" sz="2000" noProof="0" dirty="0">
+                <a:solidFill>
+                  <a:srgbClr val="272525"/>
+                </a:solidFill>
+                <a:latin typeface="Source Sans 3" pitchFamily="34" charset="0"/>
+                <a:ea typeface="Source Sans 3" pitchFamily="34" charset="-122"/>
+                <a:cs typeface="Source Sans 3" pitchFamily="34" charset="-120"/>
+              </a:rPr>
+              <a:t>Pacientes que reservan citas en especialidades incorrectas, retrasando diagnósticos.</a:t>
+            </a:r>
+            <a:endParaRPr lang="es-419" sz="2000" noProof="0" dirty="0"/>
+          </a:p>
+        </p:txBody>
+      </p:sp>
+      <p:sp>
+        <p:nvSpPr>
+          <p:cNvPr id="7" name="Text 4"/>
+          <p:cNvSpPr/>
+          <p:nvPr/>
+        </p:nvSpPr>
+        <p:spPr>
+          <a:xfrm>
+            <a:off x="6895780" y="4641414"/>
+            <a:ext cx="6214705" cy="689134"/>
+          </a:xfrm>
+          <a:prstGeom prst="rect">
+            <a:avLst/>
+          </a:prstGeom>
+          <a:noFill/>
+          <a:ln/>
+        </p:spPr>
+        <p:txBody>
+          <a:bodyPr wrap="square" lIns="0" tIns="0" rIns="0" bIns="0" rtlCol="0" anchor="t"/>
+          <a:lstStyle/>
+          <a:p>
+            <a:pPr marL="342900" indent="-342900" algn="l">
+              <a:lnSpc>
+                <a:spcPts val="2700"/>
+              </a:lnSpc>
+              <a:buSzPct val="100000"/>
+              <a:buChar char="•"/>
+            </a:pPr>
+            <a:r>
+              <a:rPr lang="es-419" sz="2000" noProof="0" dirty="0">
+                <a:solidFill>
+                  <a:srgbClr val="272525"/>
+                </a:solidFill>
+                <a:latin typeface="Source Sans 3" pitchFamily="34" charset="0"/>
+                <a:ea typeface="Source Sans 3" pitchFamily="34" charset="-122"/>
+                <a:cs typeface="Source Sans 3" pitchFamily="34" charset="-120"/>
+              </a:rPr>
+              <a:t>Ineficiencia en la gestión de recursos médicos, generando esperas innecesarias.</a:t>
+            </a:r>
+            <a:endParaRPr lang="es-419" sz="2000" noProof="0" dirty="0"/>
           </a:p>
         </p:txBody>
       </p:sp>
     </p:spTree>
-    <p:extLst>
-      <p:ext uri="{BB962C8B-B14F-4D97-AF65-F5344CB8AC3E}">
-        <p14:creationId xmlns:p14="http://schemas.microsoft.com/office/powerpoint/2010/main" val="2588198695"/>
-      </p:ext>
-    </p:extLst>
   </p:cSld>
   <p:clrMapOvr>
     <a:masterClrMapping/>
@@ -10466,7 +8359,29 @@
                 <a:ea typeface="Source Sans 3" pitchFamily="34" charset="-122"/>
                 <a:cs typeface="Source Sans 3" pitchFamily="34" charset="-120"/>
               </a:rPr>
-              <a:t>Panel de médicos para una gestión eficiente y visualización del triage previo.</a:t>
+              <a:t>Panel de médicos para una gestión eficiente y visualización del </a:t>
+            </a:r>
+            <a:r>
+              <a:rPr lang="es-419" sz="1850" noProof="0" dirty="0" err="1">
+                <a:solidFill>
+                  <a:srgbClr val="272525"/>
+                </a:solidFill>
+                <a:latin typeface="Source Sans 3" pitchFamily="34" charset="0"/>
+                <a:ea typeface="Source Sans 3" pitchFamily="34" charset="-122"/>
+                <a:cs typeface="Source Sans 3" pitchFamily="34" charset="-120"/>
+              </a:rPr>
+              <a:t>triage</a:t>
+            </a:r>
+            <a:r>
+              <a:rPr lang="es-419" sz="1850" noProof="0" dirty="0">
+                <a:solidFill>
+                  <a:srgbClr val="272525"/>
+                </a:solidFill>
+                <a:latin typeface="Source Sans 3" pitchFamily="34" charset="0"/>
+                <a:ea typeface="Source Sans 3" pitchFamily="34" charset="-122"/>
+                <a:cs typeface="Source Sans 3" pitchFamily="34" charset="-120"/>
+              </a:rPr>
+              <a:t> previo.</a:t>
             </a:r>
             <a:endParaRPr lang="es-419" sz="1850" noProof="0" dirty="0"/>
           </a:p>
@@ -10497,48 +8412,6 @@
           <a:chExt cx="0" cy="0"/>
         </a:xfrm>
       </p:grpSpPr>
-      <p:sp>
-        <p:nvSpPr>
-          <p:cNvPr id="2" name="Text 0"/>
-          <p:cNvSpPr/>
-          <p:nvPr/>
-        </p:nvSpPr>
-        <p:spPr>
-          <a:xfrm>
-            <a:off x="837724" y="837962"/>
-            <a:ext cx="6945035" cy="704017"/>
-          </a:xfrm>
-          <a:prstGeom prst="rect">
-            <a:avLst/>
-          </a:prstGeom>
-          <a:noFill/>
-          <a:ln/>
-        </p:spPr>
-        <p:txBody>
-          <a:bodyPr wrap="none" lIns="0" tIns="0" rIns="0" bIns="0" rtlCol="0" anchor="t"/>
-          <a:lstStyle/>
-          <a:p>
-            <a:pPr marL="0" indent="0" algn="l">
-              <a:lnSpc>
-                <a:spcPts val="5500"/>
-              </a:lnSpc>
-              <a:buNone/>
-            </a:pPr>
-            <a:r>
-              <a:rPr lang="es-419" sz="4400" noProof="0" dirty="0">
-                <a:solidFill>
-                  <a:srgbClr val="D73AD7"/>
-                </a:solidFill>
-                <a:latin typeface="Source Serif 4 Semi Bold" pitchFamily="34" charset="0"/>
-                <a:ea typeface="Source Serif 4 Semi Bold" pitchFamily="34" charset="-122"/>
-                <a:cs typeface="Source Serif 4 Semi Bold" pitchFamily="34" charset="-120"/>
-              </a:rPr>
-              <a:t>Hoja de Ruta del Proyecto</a:t>
-            </a:r>
-            <a:endParaRPr lang="es-419" sz="4400" noProof="0" dirty="0"/>
-          </a:p>
-        </p:txBody>
-      </p:sp>
       <p:pic>
         <p:nvPicPr>
           <p:cNvPr id="3" name="Image 0" descr="preencoded.png"/>
@@ -10571,8 +8444,8 @@
         </p:nvSpPr>
         <p:spPr>
           <a:xfrm>
-            <a:off x="7210026" y="1843858"/>
-            <a:ext cx="4843701" cy="563285"/>
+            <a:off x="680103" y="783051"/>
+            <a:ext cx="5583439" cy="563285"/>
           </a:xfrm>
           <a:prstGeom prst="rect">
             <a:avLst/>
@@ -10591,7 +8464,7 @@
               <a:buNone/>
             </a:pPr>
             <a:r>
-              <a:rPr lang="es-419" sz="3500" noProof="0" dirty="0">
+              <a:rPr lang="es-419" sz="4000" noProof="0" dirty="0">
                 <a:solidFill>
                   <a:srgbClr val="D73AD7"/>
                 </a:solidFill>
@@ -10601,7 +8474,7 @@
               </a:rPr>
               <a:t>Objetivos del Proyecto</a:t>
             </a:r>
-            <a:endParaRPr lang="es-419" sz="3500" noProof="0" dirty="0"/>
+            <a:endParaRPr lang="es-419" sz="4000" noProof="0" dirty="0"/>
           </a:p>
         </p:txBody>
       </p:sp>
@@ -10613,7 +8486,7 @@
         </p:nvSpPr>
         <p:spPr>
           <a:xfrm>
-            <a:off x="7210026" y="2646459"/>
+            <a:off x="6222535" y="1424641"/>
             <a:ext cx="6185535" cy="383024"/>
           </a:xfrm>
           <a:prstGeom prst="rect">
@@ -10655,8 +8528,8 @@
         </p:nvSpPr>
         <p:spPr>
           <a:xfrm>
-            <a:off x="7210026" y="3244867"/>
-            <a:ext cx="6185535" cy="766048"/>
+            <a:off x="5803709" y="2085161"/>
+            <a:ext cx="7988967" cy="1176632"/>
           </a:xfrm>
           <a:prstGeom prst="rect">
             <a:avLst/>
@@ -10684,7 +8557,7 @@
                 <a:ea typeface="Source Sans 3" pitchFamily="34" charset="-122"/>
                 <a:cs typeface="Source Sans 3" pitchFamily="34" charset="-120"/>
               </a:rPr>
-              <a:t>Desarrollar una plataforma web para la gestión de citas médicas con triage IA y motor de reglas integrado.</a:t>
+              <a:t>Lograr que los pacientes obtengan la atención correcta en el primer intento, reduciendo re-agendamientos y tiempos de espera, con mejor experiencia para pacientes y equipos clínicos.</a:t>
             </a:r>
             <a:endParaRPr lang="es-419" sz="1850" noProof="0" dirty="0"/>
           </a:p>
@@ -10698,7 +8571,7 @@
         </p:nvSpPr>
         <p:spPr>
           <a:xfrm>
-            <a:off x="7210026" y="4226299"/>
+            <a:off x="6222534" y="3619837"/>
             <a:ext cx="6185535" cy="383024"/>
           </a:xfrm>
           <a:prstGeom prst="rect">
@@ -10740,8 +8613,8 @@
         </p:nvSpPr>
         <p:spPr>
           <a:xfrm>
-            <a:off x="7210026" y="4824707"/>
-            <a:ext cx="6185535" cy="383024"/>
+            <a:off x="7210026" y="4824706"/>
+            <a:ext cx="6185535" cy="2731125"/>
           </a:xfrm>
           <a:prstGeom prst="rect">
             <a:avLst/>
@@ -10753,12 +8626,11 @@
           <a:bodyPr wrap="none" lIns="0" tIns="0" rIns="0" bIns="0" rtlCol="0" anchor="t"/>
           <a:lstStyle/>
           <a:p>
-            <a:pPr marL="342900" indent="-342900" algn="l">
+            <a:pPr algn="l">
               <a:lnSpc>
                 <a:spcPts val="3000"/>
               </a:lnSpc>
               <a:buSzPct val="100000"/>
-              <a:buChar char="•"/>
             </a:pPr>
             <a:r>
               <a:rPr lang="es-419" sz="1850" noProof="0" dirty="0">
@@ -10769,7 +8641,7 @@
                 <a:ea typeface="Source Sans 3" pitchFamily="34" charset="-122"/>
                 <a:cs typeface="Source Sans 3" pitchFamily="34" charset="-120"/>
               </a:rPr>
-              <a:t>Implementar autenticación y gestión de usuarios robusta.</a:t>
+              <a:t>.</a:t>
             </a:r>
             <a:endParaRPr lang="es-419" sz="1850" noProof="0" dirty="0"/>
           </a:p>
@@ -10777,130 +8649,120 @@
       </p:sp>
       <p:sp>
         <p:nvSpPr>
-          <p:cNvPr id="9" name="Text 6"/>
-          <p:cNvSpPr/>
+          <p:cNvPr id="13" name="CuadroTexto 12">
+            <a:extLst>
+              <a:ext uri="{FF2B5EF4-FFF2-40B4-BE49-F238E27FC236}">
+                <a16:creationId xmlns:a16="http://schemas.microsoft.com/office/drawing/2014/main" id="{4B4DCBAC-DF4A-7D5C-D47B-4099059443D2}"/>
+              </a:ext>
+            </a:extLst>
+          </p:cNvPr>
+          <p:cNvSpPr txBox="1"/>
           <p:nvPr/>
         </p:nvSpPr>
         <p:spPr>
           <a:xfrm>
-            <a:off x="7210026" y="5291432"/>
-            <a:ext cx="6185535" cy="383024"/>
+            <a:off x="5935579" y="4360905"/>
+            <a:ext cx="7323220" cy="2191947"/>
           </a:xfrm>
           <a:prstGeom prst="rect">
             <a:avLst/>
           </a:prstGeom>
           <a:noFill/>
-          <a:ln/>
-        </p:spPr>
-        <p:txBody>
-          <a:bodyPr wrap="none" lIns="0" tIns="0" rIns="0" bIns="0" rtlCol="0" anchor="t"/>
-          <a:lstStyle/>
-          <a:p>
-            <a:pPr marL="342900" indent="-342900" algn="l">
+        </p:spPr>
+        <p:txBody>
+          <a:bodyPr wrap="square">
+            <a:spAutoFit/>
+          </a:bodyPr>
+          <a:lstStyle/>
+          <a:p>
+            <a:pPr marL="285750" indent="-285750">
               <a:lnSpc>
-                <a:spcPts val="3000"/>
+                <a:spcPct val="150000"/>
               </a:lnSpc>
-              <a:buSzPct val="100000"/>
+              <a:buFont typeface="Arial" panose="020B0604020202020204" pitchFamily="34" charset="0"/>
               <a:buChar char="•"/>
             </a:pPr>
             <a:r>
-              <a:rPr lang="es-419" sz="1850" noProof="0" dirty="0">
+              <a:rPr lang="es-419" sz="1850" dirty="0">
                 <a:solidFill>
                   <a:srgbClr val="272525"/>
                 </a:solidFill>
                 <a:latin typeface="Source Sans 3" pitchFamily="34" charset="0"/>
-                <a:ea typeface="Source Sans 3" pitchFamily="34" charset="-122"/>
-                <a:cs typeface="Source Sans 3" pitchFamily="34" charset="-120"/>
               </a:rPr>
-              <a:t>Diseñar un modelo de datos escalable para agenda y citas.</a:t>
-            </a:r>
-            <a:endParaRPr lang="es-419" sz="1850" noProof="0" dirty="0"/>
-          </a:p>
-        </p:txBody>
-      </p:sp>
-      <p:sp>
-        <p:nvSpPr>
-          <p:cNvPr id="10" name="Text 7"/>
-          <p:cNvSpPr/>
-          <p:nvPr/>
-        </p:nvSpPr>
-        <p:spPr>
-          <a:xfrm>
-            <a:off x="7210026" y="5758157"/>
-            <a:ext cx="6185535" cy="766048"/>
-          </a:xfrm>
-          <a:prstGeom prst="rect">
-            <a:avLst/>
-          </a:prstGeom>
-          <a:noFill/>
-          <a:ln/>
-        </p:spPr>
-        <p:txBody>
-          <a:bodyPr wrap="square" lIns="0" tIns="0" rIns="0" bIns="0" rtlCol="0" anchor="t"/>
-          <a:lstStyle/>
-          <a:p>
-            <a:pPr marL="342900" indent="-342900" algn="l">
+              <a:t>Disminuir re-agendamientos por elección de especialidad</a:t>
+            </a:r>
+          </a:p>
+          <a:p>
+            <a:pPr marL="285750" indent="-285750">
               <a:lnSpc>
-                <a:spcPts val="3000"/>
+                <a:spcPct val="150000"/>
               </a:lnSpc>
-              <a:buSzPct val="100000"/>
+              <a:buFont typeface="Arial" panose="020B0604020202020204" pitchFamily="34" charset="0"/>
               <a:buChar char="•"/>
             </a:pPr>
             <a:r>
-              <a:rPr lang="es-419" sz="1850" noProof="0" dirty="0">
+              <a:rPr lang="es-419" sz="1850" dirty="0">
                 <a:solidFill>
                   <a:srgbClr val="272525"/>
                 </a:solidFill>
                 <a:latin typeface="Source Sans 3" pitchFamily="34" charset="0"/>
-                <a:ea typeface="Source Sans 3" pitchFamily="34" charset="-122"/>
-                <a:cs typeface="Source Sans 3" pitchFamily="34" charset="-120"/>
               </a:rPr>
-              <a:t>Integrar un servicio de IA para orientación precisa de urgencia y especialidad.</a:t>
-            </a:r>
-            <a:endParaRPr lang="es-419" sz="1850" noProof="0" dirty="0"/>
-          </a:p>
-        </p:txBody>
-      </p:sp>
-      <p:sp>
-        <p:nvSpPr>
-          <p:cNvPr id="11" name="Text 8"/>
-          <p:cNvSpPr/>
-          <p:nvPr/>
-        </p:nvSpPr>
-        <p:spPr>
-          <a:xfrm>
-            <a:off x="7202406" y="6442886"/>
-            <a:ext cx="6185535" cy="383024"/>
-          </a:xfrm>
-          <a:prstGeom prst="rect">
-            <a:avLst/>
-          </a:prstGeom>
-          <a:noFill/>
-          <a:ln/>
-        </p:spPr>
-        <p:txBody>
-          <a:bodyPr wrap="none" lIns="0" tIns="0" rIns="0" bIns="0" rtlCol="0" anchor="t"/>
-          <a:lstStyle/>
-          <a:p>
-            <a:pPr marL="342900" indent="-342900" algn="l">
+              <a:t>.Acortar el tiempo desde la solicitud hasta la atención.</a:t>
+            </a:r>
+          </a:p>
+          <a:p>
+            <a:pPr marL="285750" indent="-285750">
               <a:lnSpc>
-                <a:spcPts val="3000"/>
+                <a:spcPct val="150000"/>
               </a:lnSpc>
-              <a:buSzPct val="100000"/>
+              <a:buFont typeface="Arial" panose="020B0604020202020204" pitchFamily="34" charset="0"/>
               <a:buChar char="•"/>
             </a:pPr>
             <a:r>
-              <a:rPr lang="es-419" sz="1850" noProof="0" dirty="0">
+              <a:rPr lang="es-419" sz="1850" dirty="0">
                 <a:solidFill>
                   <a:srgbClr val="272525"/>
                 </a:solidFill>
                 <a:latin typeface="Source Sans 3" pitchFamily="34" charset="0"/>
-                <a:ea typeface="Source Sans 3" pitchFamily="34" charset="-122"/>
-                <a:cs typeface="Source Sans 3" pitchFamily="34" charset="-120"/>
               </a:rPr>
-              <a:t>Crear reportes básicos y un panel de médicos intuitivo.</a:t>
-            </a:r>
-            <a:endParaRPr lang="es-419" sz="1850" noProof="0" dirty="0"/>
+              <a:t>Reducir ausencias (no-show)</a:t>
+            </a:r>
+          </a:p>
+          <a:p>
+            <a:pPr marL="285750" indent="-285750">
+              <a:lnSpc>
+                <a:spcPct val="150000"/>
+              </a:lnSpc>
+              <a:buFont typeface="Arial" panose="020B0604020202020204" pitchFamily="34" charset="0"/>
+              <a:buChar char="•"/>
+            </a:pPr>
+            <a:r>
+              <a:rPr lang="es-419" sz="1850" dirty="0">
+                <a:solidFill>
+                  <a:srgbClr val="272525"/>
+                </a:solidFill>
+                <a:latin typeface="Source Sans 3" pitchFamily="34" charset="0"/>
+              </a:rPr>
+              <a:t>Aumentar la satisfacción del paciente</a:t>
+            </a:r>
+          </a:p>
+          <a:p>
+            <a:pPr marL="285750" indent="-285750">
+              <a:lnSpc>
+                <a:spcPct val="150000"/>
+              </a:lnSpc>
+              <a:buFont typeface="Arial" panose="020B0604020202020204" pitchFamily="34" charset="0"/>
+              <a:buChar char="•"/>
+            </a:pPr>
+            <a:r>
+              <a:rPr lang="es-419" sz="1850" dirty="0">
+                <a:solidFill>
+                  <a:srgbClr val="272525"/>
+                </a:solidFill>
+                <a:latin typeface="Source Sans 3" pitchFamily="34" charset="0"/>
+              </a:rPr>
+              <a:t>Bajar la carga operativa del equipo.</a:t>
+            </a:r>
           </a:p>
         </p:txBody>
       </p:sp>
@@ -10913,6 +8775,306 @@
 </file>
 
 <file path=ppt/slides/slide6.xml><?xml version="1.0" encoding="utf-8"?>
+<p:sld xmlns:a="http://schemas.openxmlformats.org/drawingml/2006/main" xmlns:r="http://schemas.openxmlformats.org/officeDocument/2006/relationships" xmlns:p="http://schemas.openxmlformats.org/presentationml/2006/main">
+  <p:cSld name="Slide 10">
+    <p:spTree>
+      <p:nvGrpSpPr>
+        <p:cNvPr id="1" name=""/>
+        <p:cNvGrpSpPr/>
+        <p:nvPr/>
+      </p:nvGrpSpPr>
+      <p:grpSpPr>
+        <a:xfrm>
+          <a:off x="0" y="0"/>
+          <a:ext cx="0" cy="0"/>
+          <a:chOff x="0" y="0"/>
+          <a:chExt cx="0" cy="0"/>
+        </a:xfrm>
+      </p:grpSpPr>
+      <p:sp>
+        <p:nvSpPr>
+          <p:cNvPr id="2" name="Text 0"/>
+          <p:cNvSpPr/>
+          <p:nvPr/>
+        </p:nvSpPr>
+        <p:spPr>
+          <a:xfrm>
+            <a:off x="2347675" y="487620"/>
+            <a:ext cx="7053143" cy="563285"/>
+          </a:xfrm>
+          <a:prstGeom prst="rect">
+            <a:avLst/>
+          </a:prstGeom>
+          <a:noFill/>
+          <a:ln/>
+        </p:spPr>
+        <p:txBody>
+          <a:bodyPr wrap="none" lIns="0" tIns="0" rIns="0" bIns="0" rtlCol="0" anchor="t"/>
+          <a:lstStyle/>
+          <a:p>
+            <a:pPr marL="0" indent="0" algn="l">
+              <a:lnSpc>
+                <a:spcPts val="4400"/>
+              </a:lnSpc>
+              <a:buNone/>
+            </a:pPr>
+            <a:r>
+              <a:rPr lang="es-419" sz="3500" noProof="0" dirty="0">
+                <a:solidFill>
+                  <a:srgbClr val="D73AD7"/>
+                </a:solidFill>
+                <a:latin typeface="Source Serif 4 Semi Bold" pitchFamily="34" charset="0"/>
+                <a:ea typeface="Source Serif 4 Semi Bold" pitchFamily="34" charset="-122"/>
+                <a:cs typeface="Source Serif 4 Semi Bold" pitchFamily="34" charset="-120"/>
+              </a:rPr>
+              <a:t>Alcances</a:t>
+            </a:r>
+            <a:endParaRPr lang="es-419" sz="3500" noProof="0" dirty="0"/>
+          </a:p>
+        </p:txBody>
+      </p:sp>
+      <p:pic>
+        <p:nvPicPr>
+          <p:cNvPr id="6" name="Image 1" descr="preencoded.png"/>
+          <p:cNvPicPr>
+            <a:picLocks noChangeAspect="1"/>
+          </p:cNvPicPr>
+          <p:nvPr/>
+        </p:nvPicPr>
+        <p:blipFill>
+          <a:blip r:embed="rId3"/>
+          <a:stretch>
+            <a:fillRect/>
+          </a:stretch>
+        </p:blipFill>
+        <p:spPr>
+          <a:xfrm>
+            <a:off x="432672" y="1269237"/>
+            <a:ext cx="957501" cy="1148953"/>
+          </a:xfrm>
+          <a:prstGeom prst="rect">
+            <a:avLst/>
+          </a:prstGeom>
+        </p:spPr>
+      </p:pic>
+      <p:pic>
+        <p:nvPicPr>
+          <p:cNvPr id="9" name="Image 2" descr="preencoded.png"/>
+          <p:cNvPicPr>
+            <a:picLocks noChangeAspect="1"/>
+          </p:cNvPicPr>
+          <p:nvPr/>
+        </p:nvPicPr>
+        <p:blipFill>
+          <a:blip r:embed="rId4"/>
+          <a:stretch>
+            <a:fillRect/>
+          </a:stretch>
+        </p:blipFill>
+        <p:spPr>
+          <a:xfrm>
+            <a:off x="432671" y="2527355"/>
+            <a:ext cx="957501" cy="1148953"/>
+          </a:xfrm>
+          <a:prstGeom prst="rect">
+            <a:avLst/>
+          </a:prstGeom>
+        </p:spPr>
+      </p:pic>
+      <p:pic>
+        <p:nvPicPr>
+          <p:cNvPr id="12" name="Image 3" descr="preencoded.png"/>
+          <p:cNvPicPr>
+            <a:picLocks noChangeAspect="1"/>
+          </p:cNvPicPr>
+          <p:nvPr/>
+        </p:nvPicPr>
+        <p:blipFill>
+          <a:blip r:embed="rId5"/>
+          <a:stretch>
+            <a:fillRect/>
+          </a:stretch>
+        </p:blipFill>
+        <p:spPr>
+          <a:xfrm>
+            <a:off x="432673" y="3765929"/>
+            <a:ext cx="957501" cy="1148953"/>
+          </a:xfrm>
+          <a:prstGeom prst="rect">
+            <a:avLst/>
+          </a:prstGeom>
+        </p:spPr>
+      </p:pic>
+      <p:pic>
+        <p:nvPicPr>
+          <p:cNvPr id="15" name="Image 4" descr="preencoded.png"/>
+          <p:cNvPicPr>
+            <a:picLocks noChangeAspect="1"/>
+          </p:cNvPicPr>
+          <p:nvPr/>
+        </p:nvPicPr>
+        <p:blipFill>
+          <a:blip r:embed="rId6"/>
+          <a:stretch>
+            <a:fillRect/>
+          </a:stretch>
+        </p:blipFill>
+        <p:spPr>
+          <a:xfrm>
+            <a:off x="432670" y="5024047"/>
+            <a:ext cx="957501" cy="1148953"/>
+          </a:xfrm>
+          <a:prstGeom prst="rect">
+            <a:avLst/>
+          </a:prstGeom>
+        </p:spPr>
+      </p:pic>
+      <p:sp>
+        <p:nvSpPr>
+          <p:cNvPr id="4" name="CuadroTexto 3">
+            <a:extLst>
+              <a:ext uri="{FF2B5EF4-FFF2-40B4-BE49-F238E27FC236}">
+                <a16:creationId xmlns:a16="http://schemas.microsoft.com/office/drawing/2014/main" id="{22BA08B4-2126-A1C1-38CD-C296C5B9F327}"/>
+              </a:ext>
+            </a:extLst>
+          </p:cNvPr>
+          <p:cNvSpPr txBox="1"/>
+          <p:nvPr/>
+        </p:nvSpPr>
+        <p:spPr>
+          <a:xfrm>
+            <a:off x="1684565" y="1199842"/>
+            <a:ext cx="9972517" cy="5132174"/>
+          </a:xfrm>
+          <a:prstGeom prst="rect">
+            <a:avLst/>
+          </a:prstGeom>
+          <a:noFill/>
+        </p:spPr>
+        <p:txBody>
+          <a:bodyPr wrap="square">
+            <a:spAutoFit/>
+          </a:bodyPr>
+          <a:lstStyle/>
+          <a:p>
+            <a:pPr marL="285750" indent="-285750">
+              <a:lnSpc>
+                <a:spcPct val="150000"/>
+              </a:lnSpc>
+              <a:buFont typeface="Arial" panose="020B0604020202020204" pitchFamily="34" charset="0"/>
+              <a:buChar char="•"/>
+            </a:pPr>
+            <a:r>
+              <a:rPr lang="es-419" sz="2000" dirty="0">
+                <a:solidFill>
+                  <a:srgbClr val="272525"/>
+                </a:solidFill>
+                <a:latin typeface="Source Sans 3" pitchFamily="34" charset="0"/>
+              </a:rPr>
+              <a:t>Obtención orientación inicial que sugiere especialidad y nivel de urgencia antes de reservar.</a:t>
+            </a:r>
+          </a:p>
+          <a:p>
+            <a:pPr marL="285750" indent="-285750">
+              <a:lnSpc>
+                <a:spcPct val="150000"/>
+              </a:lnSpc>
+              <a:buFont typeface="Arial" panose="020B0604020202020204" pitchFamily="34" charset="0"/>
+              <a:buChar char="•"/>
+            </a:pPr>
+            <a:r>
+              <a:rPr lang="es-419" sz="2000" dirty="0">
+                <a:solidFill>
+                  <a:srgbClr val="272525"/>
+                </a:solidFill>
+                <a:latin typeface="Source Sans 3" pitchFamily="34" charset="0"/>
+              </a:rPr>
+              <a:t>Menor tiempo a la cita: reserva en un paso con horarios visibles y opción de próxima atención disponible.</a:t>
+            </a:r>
+          </a:p>
+          <a:p>
+            <a:pPr marL="285750" indent="-285750">
+              <a:lnSpc>
+                <a:spcPct val="150000"/>
+              </a:lnSpc>
+              <a:buFont typeface="Arial" panose="020B0604020202020204" pitchFamily="34" charset="0"/>
+              <a:buChar char="•"/>
+            </a:pPr>
+            <a:r>
+              <a:rPr lang="es-419" sz="2000" dirty="0">
+                <a:solidFill>
+                  <a:srgbClr val="272525"/>
+                </a:solidFill>
+                <a:latin typeface="Source Sans 3" pitchFamily="34" charset="0"/>
+              </a:rPr>
+              <a:t>Menos ausencias: confirmaciones y recordatorios previos a la cita.</a:t>
+            </a:r>
+          </a:p>
+          <a:p>
+            <a:pPr marL="285750" indent="-285750">
+              <a:lnSpc>
+                <a:spcPct val="150000"/>
+              </a:lnSpc>
+              <a:buFont typeface="Arial" panose="020B0604020202020204" pitchFamily="34" charset="0"/>
+              <a:buChar char="•"/>
+            </a:pPr>
+            <a:r>
+              <a:rPr lang="es-419" sz="2000" dirty="0">
+                <a:solidFill>
+                  <a:srgbClr val="272525"/>
+                </a:solidFill>
+                <a:latin typeface="Source Sans 3" pitchFamily="34" charset="0"/>
+              </a:rPr>
+              <a:t>Mejor experiencia: información clara de lugar, indicaciones y preparación; estado de la cita siempre visible.</a:t>
+            </a:r>
+          </a:p>
+          <a:p>
+            <a:pPr marL="285750" indent="-285750">
+              <a:lnSpc>
+                <a:spcPct val="150000"/>
+              </a:lnSpc>
+              <a:buFont typeface="Arial" panose="020B0604020202020204" pitchFamily="34" charset="0"/>
+              <a:buChar char="•"/>
+            </a:pPr>
+            <a:r>
+              <a:rPr lang="es-419" sz="2000" dirty="0">
+                <a:solidFill>
+                  <a:srgbClr val="272525"/>
+                </a:solidFill>
+                <a:latin typeface="Source Sans 3" pitchFamily="34" charset="0"/>
+              </a:rPr>
+              <a:t>Menos carga operativa: cambio de hora guiado desde el mismo lugar (sin llamadas ni correos).</a:t>
+            </a:r>
+          </a:p>
+          <a:p>
+            <a:pPr marL="285750" indent="-285750">
+              <a:lnSpc>
+                <a:spcPct val="150000"/>
+              </a:lnSpc>
+              <a:buFont typeface="Arial" panose="020B0604020202020204" pitchFamily="34" charset="0"/>
+              <a:buChar char="•"/>
+            </a:pPr>
+            <a:r>
+              <a:rPr lang="es-419" sz="2000" dirty="0">
+                <a:solidFill>
+                  <a:srgbClr val="272525"/>
+                </a:solidFill>
+                <a:latin typeface="Source Sans 3" pitchFamily="34" charset="0"/>
+              </a:rPr>
+              <a:t>Seguimiento de resultados: registro básico de re-agendamientos, tiempo a cita, ausencias y satisfacción.</a:t>
+            </a:r>
+          </a:p>
+        </p:txBody>
+      </p:sp>
+    </p:spTree>
+  </p:cSld>
+  <p:clrMapOvr>
+    <a:masterClrMapping/>
+  </p:clrMapOvr>
+</p:sld>
+</file>
+
+<file path=ppt/slides/slide7.xml><?xml version="1.0" encoding="utf-8"?>
 <p:sld xmlns:a="http://schemas.openxmlformats.org/drawingml/2006/main" xmlns:r="http://schemas.openxmlformats.org/officeDocument/2006/relationships" xmlns:p="http://schemas.openxmlformats.org/presentationml/2006/main">
   <p:cSld name="Slide 6">
     <p:spTree>
@@ -10937,7 +9099,7 @@
         </p:nvSpPr>
         <p:spPr>
           <a:xfrm>
-            <a:off x="837724" y="1632704"/>
+            <a:off x="1022508" y="333294"/>
             <a:ext cx="5903119" cy="704017"/>
           </a:xfrm>
           <a:prstGeom prst="rect">
@@ -10979,8 +9141,8 @@
         </p:nvSpPr>
         <p:spPr>
           <a:xfrm>
-            <a:off x="837724" y="3174444"/>
-            <a:ext cx="6357818" cy="3422452"/>
+            <a:off x="552955" y="1708861"/>
+            <a:ext cx="6357818" cy="3964293"/>
           </a:xfrm>
           <a:prstGeom prst="roundRect">
             <a:avLst>
@@ -11018,7 +9180,7 @@
         </p:blipFill>
         <p:spPr>
           <a:xfrm>
-            <a:off x="837724" y="3143964"/>
+            <a:off x="567809" y="1607931"/>
             <a:ext cx="6357818" cy="121920"/>
           </a:xfrm>
           <a:prstGeom prst="rect">
@@ -11050,40 +9212,16 @@
           </a:prstGeom>
         </p:spPr>
       </p:pic>
-      <p:pic>
-        <p:nvPicPr>
-          <p:cNvPr id="6" name="Image 2" descr="preencoded.png"/>
-          <p:cNvPicPr>
-            <a:picLocks noChangeAspect="1"/>
-          </p:cNvPicPr>
-          <p:nvPr/>
-        </p:nvPicPr>
-        <p:blipFill>
-          <a:blip r:embed="rId5"/>
-          <a:stretch>
-            <a:fillRect/>
-          </a:stretch>
-        </p:blipFill>
-        <p:spPr>
-          <a:xfrm>
-            <a:off x="3872925" y="2995017"/>
-            <a:ext cx="287179" cy="358973"/>
-          </a:xfrm>
-          <a:prstGeom prst="rect">
-            <a:avLst/>
-          </a:prstGeom>
-        </p:spPr>
-      </p:pic>
-      <p:sp>
-        <p:nvSpPr>
-          <p:cNvPr id="7" name="Text 2"/>
+      <p:sp>
+        <p:nvSpPr>
+          <p:cNvPr id="8" name="Text 3"/>
           <p:cNvSpPr/>
           <p:nvPr/>
         </p:nvSpPr>
         <p:spPr>
           <a:xfrm>
-            <a:off x="1107519" y="3772852"/>
-            <a:ext cx="2911197" cy="351949"/>
+            <a:off x="708869" y="2247810"/>
+            <a:ext cx="6075697" cy="3733980"/>
           </a:xfrm>
           <a:prstGeom prst="rect">
             <a:avLst/>
@@ -11092,102 +9230,68 @@
           <a:ln/>
         </p:spPr>
         <p:txBody>
-          <a:bodyPr wrap="none" lIns="0" tIns="0" rIns="0" bIns="0" rtlCol="0" anchor="t"/>
-          <a:lstStyle/>
-          <a:p>
-            <a:pPr marL="0" indent="0" algn="l">
-              <a:lnSpc>
-                <a:spcPts val="2750"/>
-              </a:lnSpc>
-              <a:buNone/>
-            </a:pPr>
-            <a:r>
-              <a:rPr lang="es-419" sz="2200" noProof="0" dirty="0">
+          <a:bodyPr wrap="square" lIns="0" tIns="0" rIns="0" bIns="0" rtlCol="0" anchor="t"/>
+          <a:lstStyle/>
+          <a:p>
+            <a:r>
+              <a:rPr lang="es-419" sz="2400" b="1" dirty="0">
                 <a:solidFill>
                   <a:srgbClr val="272525"/>
                 </a:solidFill>
-                <a:latin typeface="Source Serif 4 Semi Bold" pitchFamily="34" charset="0"/>
-                <a:ea typeface="Source Serif 4 Semi Bold" pitchFamily="34" charset="-122"/>
-                <a:cs typeface="Source Serif 4 Semi Bold" pitchFamily="34" charset="-120"/>
+                <a:latin typeface="Source Sans 3" pitchFamily="34" charset="0"/>
               </a:rPr>
-              <a:t>Enfoque Ágil (Scrum)</a:t>
-            </a:r>
-            <a:endParaRPr lang="es-419" sz="2200" noProof="0" dirty="0"/>
-          </a:p>
-        </p:txBody>
-      </p:sp>
-      <p:sp>
-        <p:nvSpPr>
-          <p:cNvPr id="8" name="Text 3"/>
-          <p:cNvSpPr/>
-          <p:nvPr/>
-        </p:nvSpPr>
-        <p:spPr>
-          <a:xfrm>
-            <a:off x="1107519" y="4268391"/>
-            <a:ext cx="5818227" cy="1532096"/>
-          </a:xfrm>
-          <a:prstGeom prst="rect">
-            <a:avLst/>
-          </a:prstGeom>
-          <a:noFill/>
-          <a:ln/>
-        </p:spPr>
-        <p:txBody>
-          <a:bodyPr wrap="square" lIns="0" tIns="0" rIns="0" bIns="0" rtlCol="0" anchor="t"/>
-          <a:lstStyle/>
-          <a:p>
-            <a:pPr marL="0" indent="0" algn="l">
-              <a:lnSpc>
-                <a:spcPts val="3000"/>
-              </a:lnSpc>
-              <a:buNone/>
-            </a:pPr>
-            <a:r>
-              <a:rPr lang="es-419" sz="1850" noProof="0" dirty="0">
+              <a:t>Usaremos un enfoque Tradicional por Fases</a:t>
+            </a:r>
+          </a:p>
+          <a:p>
+            <a:r>
+              <a:rPr lang="es-419" sz="2400" b="1" dirty="0">
                 <a:solidFill>
                   <a:srgbClr val="272525"/>
                 </a:solidFill>
                 <a:latin typeface="Source Sans 3" pitchFamily="34" charset="0"/>
-                <a:ea typeface="Source Sans 3" pitchFamily="34" charset="-122"/>
-                <a:cs typeface="Source Sans 3" pitchFamily="34" charset="-120"/>
               </a:rPr>
-              <a:t>Trabajaremos con </a:t>
-            </a:r>
-            <a:r>
-              <a:rPr lang="es-419" sz="1850" b="1" noProof="0" dirty="0" err="1">
+              <a:t> </a:t>
+            </a:r>
+            <a:r>
+              <a:rPr lang="es-419" sz="1850" b="1" dirty="0">
                 <a:solidFill>
                   <a:srgbClr val="272525"/>
                 </a:solidFill>
                 <a:latin typeface="Source Sans 3" pitchFamily="34" charset="0"/>
-                <a:ea typeface="Source Sans 3" pitchFamily="34" charset="-122"/>
-                <a:cs typeface="Source Sans 3" pitchFamily="34" charset="-120"/>
               </a:rPr>
-              <a:t>sprints</a:t>
-            </a:r>
-            <a:r>
-              <a:rPr lang="es-419" sz="1850" b="1" noProof="0" dirty="0">
+              <a:t>(Cascada/Stage-Gate), avanzando de forma secuencial por</a:t>
+            </a:r>
+          </a:p>
+          <a:p>
+            <a:endParaRPr lang="es-419" sz="1850" b="1" dirty="0">
+              <a:solidFill>
+                <a:srgbClr val="272525"/>
+              </a:solidFill>
+              <a:latin typeface="Source Sans 3" pitchFamily="34" charset="0"/>
+            </a:endParaRPr>
+          </a:p>
+          <a:p>
+            <a:r>
+              <a:rPr lang="es-419" sz="1850" b="1" dirty="0">
                 <a:solidFill>
                   <a:srgbClr val="272525"/>
                 </a:solidFill>
                 <a:latin typeface="Source Sans 3" pitchFamily="34" charset="0"/>
-                <a:ea typeface="Source Sans 3" pitchFamily="34" charset="-122"/>
-                <a:cs typeface="Source Sans 3" pitchFamily="34" charset="-120"/>
               </a:rPr>
-              <a:t> de 2 semanas</a:t>
-            </a:r>
-            <a:r>
-              <a:rPr lang="es-419" sz="1850" noProof="0" dirty="0">
+              <a:t> Fase 1 → Fase 2 → Fase 3, con una revisión y aprobación (Gate) al final de cada etapa.</a:t>
+            </a:r>
+          </a:p>
+          <a:p>
+            <a:r>
+              <a:rPr lang="es-419" sz="1850" b="1" dirty="0">
                 <a:solidFill>
                   <a:srgbClr val="272525"/>
                 </a:solidFill>
                 <a:latin typeface="Source Sans 3" pitchFamily="34" charset="0"/>
-                <a:ea typeface="Source Sans 3" pitchFamily="34" charset="-122"/>
-                <a:cs typeface="Source Sans 3" pitchFamily="34" charset="-120"/>
               </a:rPr>
-              <a:t>, garantizando iteraciones rápidas y entregas continuas. Cada sprint incluirá planificación, diseño, desarrollo, pruebas y documentación.</a:t>
-            </a:r>
-            <a:endParaRPr lang="es-419" sz="1850" noProof="0" dirty="0"/>
+              <a:t> En Fase 1 (Semanas 1–2) definimos el problema, la solución, los alcances (qué incluye/excluye), riesgos, cronograma y los criterios de salida para asegurar claridad antes de construir.</a:t>
+            </a:r>
           </a:p>
         </p:txBody>
       </p:sp>
@@ -11199,8 +9303,8 @@
         </p:nvSpPr>
         <p:spPr>
           <a:xfrm>
-            <a:off x="7434858" y="3174444"/>
-            <a:ext cx="6357818" cy="3422452"/>
+            <a:off x="7465337" y="1893002"/>
+            <a:ext cx="6345613" cy="4523840"/>
           </a:xfrm>
           <a:prstGeom prst="roundRect">
             <a:avLst>
@@ -11238,7 +9342,7 @@
         </p:blipFill>
         <p:spPr>
           <a:xfrm>
-            <a:off x="7434858" y="3143964"/>
+            <a:off x="7315200" y="1603700"/>
             <a:ext cx="6357818" cy="121920"/>
           </a:xfrm>
           <a:prstGeom prst="rect">
@@ -11279,7 +9383,7 @@
           <p:nvPr/>
         </p:nvPicPr>
         <p:blipFill>
-          <a:blip r:embed="rId6"/>
+          <a:blip r:embed="rId5"/>
           <a:stretch>
             <a:fillRect/>
           </a:stretch>
@@ -11294,48 +9398,6 @@
           </a:prstGeom>
         </p:spPr>
       </p:pic>
-      <p:sp>
-        <p:nvSpPr>
-          <p:cNvPr id="13" name="Text 5"/>
-          <p:cNvSpPr/>
-          <p:nvPr/>
-        </p:nvSpPr>
-        <p:spPr>
-          <a:xfrm>
-            <a:off x="7704653" y="3772852"/>
-            <a:ext cx="2816185" cy="351949"/>
-          </a:xfrm>
-          <a:prstGeom prst="rect">
-            <a:avLst/>
-          </a:prstGeom>
-          <a:noFill/>
-          <a:ln/>
-        </p:spPr>
-        <p:txBody>
-          <a:bodyPr wrap="none" lIns="0" tIns="0" rIns="0" bIns="0" rtlCol="0" anchor="t"/>
-          <a:lstStyle/>
-          <a:p>
-            <a:pPr marL="0" indent="0" algn="l">
-              <a:lnSpc>
-                <a:spcPts val="2750"/>
-              </a:lnSpc>
-              <a:buNone/>
-            </a:pPr>
-            <a:r>
-              <a:rPr lang="es-419" sz="2200" noProof="0" dirty="0">
-                <a:solidFill>
-                  <a:srgbClr val="272525"/>
-                </a:solidFill>
-                <a:latin typeface="Source Serif 4 Semi Bold" pitchFamily="34" charset="0"/>
-                <a:ea typeface="Source Serif 4 Semi Bold" pitchFamily="34" charset="-122"/>
-                <a:cs typeface="Source Serif 4 Semi Bold" pitchFamily="34" charset="-120"/>
-              </a:rPr>
-              <a:t>Roles del Equipo</a:t>
-            </a:r>
-            <a:endParaRPr lang="es-419" sz="2200" noProof="0" dirty="0"/>
-          </a:p>
-        </p:txBody>
-      </p:sp>
       <p:sp>
         <p:nvSpPr>
           <p:cNvPr id="14" name="Text 6"/>
@@ -11363,50 +9425,6 @@
               </a:lnSpc>
               <a:buNone/>
             </a:pPr>
-            <a:r>
-              <a:rPr lang="es-419" sz="1850" b="1" noProof="0" dirty="0">
-                <a:solidFill>
-                  <a:srgbClr val="272525"/>
-                </a:solidFill>
-                <a:latin typeface="Source Sans 3" pitchFamily="34" charset="0"/>
-                <a:ea typeface="Source Sans 3" pitchFamily="34" charset="-122"/>
-                <a:cs typeface="Source Sans 3" pitchFamily="34" charset="-120"/>
-              </a:rPr>
-              <a:t>Matías:</a:t>
-            </a:r>
-            <a:r>
-              <a:rPr lang="es-419" sz="1850" noProof="0" dirty="0">
-                <a:solidFill>
-                  <a:srgbClr val="272525"/>
-                </a:solidFill>
-                <a:latin typeface="Source Sans 3" pitchFamily="34" charset="0"/>
-                <a:ea typeface="Source Sans 3" pitchFamily="34" charset="-122"/>
-                <a:cs typeface="Source Sans 3" pitchFamily="34" charset="-120"/>
-              </a:rPr>
-              <a:t> Líder técnico, encargado del </a:t>
-            </a:r>
-            <a:r>
-              <a:rPr lang="es-419" sz="1850" noProof="0" dirty="0" err="1">
-                <a:solidFill>
-                  <a:srgbClr val="272525"/>
-                </a:solidFill>
-                <a:latin typeface="Source Sans 3" pitchFamily="34" charset="0"/>
-                <a:ea typeface="Source Sans 3" pitchFamily="34" charset="-122"/>
-                <a:cs typeface="Source Sans 3" pitchFamily="34" charset="-120"/>
-              </a:rPr>
-              <a:t>backend</a:t>
-            </a:r>
-            <a:r>
-              <a:rPr lang="es-419" sz="1850" noProof="0" dirty="0">
-                <a:solidFill>
-                  <a:srgbClr val="272525"/>
-                </a:solidFill>
-                <a:latin typeface="Source Sans 3" pitchFamily="34" charset="0"/>
-                <a:ea typeface="Source Sans 3" pitchFamily="34" charset="-122"/>
-                <a:cs typeface="Source Sans 3" pitchFamily="34" charset="-120"/>
-              </a:rPr>
-              <a:t> y la documentación crucial del proyecto.</a:t>
-            </a:r>
             <a:endParaRPr lang="es-419" sz="1850" noProof="0" dirty="0"/>
           </a:p>
         </p:txBody>
@@ -11419,8 +9437,8 @@
         </p:nvSpPr>
         <p:spPr>
           <a:xfrm>
-            <a:off x="7704653" y="5178028"/>
-            <a:ext cx="5818227" cy="1149072"/>
+            <a:off x="7614695" y="2093005"/>
+            <a:ext cx="6058323" cy="4123834"/>
           </a:xfrm>
           <a:prstGeom prst="rect">
             <a:avLst/>
@@ -11447,10 +9465,10 @@
                 <a:ea typeface="Source Sans 3" pitchFamily="34" charset="-122"/>
                 <a:cs typeface="Source Sans 3" pitchFamily="34" charset="-120"/>
               </a:rPr>
-              <a:t>Raúl:</a:t>
-            </a:r>
-            <a:r>
-              <a:rPr lang="es-419" sz="1850" noProof="0" dirty="0">
+              <a:t>En Fase 2 (Semanas 3–11) diseñamos y construimos lo comprometido: inicio de sesión y registro, vistas simples por perfil (Paciente, Médico, Admin), reservar/confirmar/cancelar y reagendar citas, sugerencia por síntomas (</a:t>
+            </a:r>
+            <a:r>
+              <a:rPr lang="es-419" sz="1850" b="1" noProof="0" dirty="0" err="1">
                 <a:solidFill>
                   <a:srgbClr val="272525"/>
                 </a:solidFill>
@@ -11458,10 +9476,10 @@
                 <a:ea typeface="Source Sans 3" pitchFamily="34" charset="-122"/>
                 <a:cs typeface="Source Sans 3" pitchFamily="34" charset="-120"/>
               </a:rPr>
-              <a:t> Responsable del </a:t>
-            </a:r>
-            <a:r>
-              <a:rPr lang="es-419" sz="1850" noProof="0" dirty="0" err="1">
+              <a:t>triage</a:t>
+            </a:r>
+            <a:r>
+              <a:rPr lang="es-419" sz="1850" b="1" noProof="0" dirty="0">
                 <a:solidFill>
                   <a:srgbClr val="272525"/>
                 </a:solidFill>
@@ -11469,10 +9487,34 @@
                 <a:ea typeface="Source Sans 3" pitchFamily="34" charset="-122"/>
                 <a:cs typeface="Source Sans 3" pitchFamily="34" charset="-120"/>
               </a:rPr>
-              <a:t>frontend</a:t>
-            </a:r>
-            <a:r>
-              <a:rPr lang="es-419" sz="1850" noProof="0" dirty="0">
+              <a:t> orientativo) y gestión de doctores y sucursales, dejando evidencias y pruebas básicas.</a:t>
+            </a:r>
+          </a:p>
+          <a:p>
+            <a:pPr marL="0" indent="0" algn="l">
+              <a:lnSpc>
+                <a:spcPts val="3000"/>
+              </a:lnSpc>
+              <a:buNone/>
+            </a:pPr>
+            <a:endParaRPr lang="es-419" sz="1850" b="1" noProof="0" dirty="0">
+              <a:solidFill>
+                <a:srgbClr val="272525"/>
+              </a:solidFill>
+              <a:latin typeface="Source Sans 3" pitchFamily="34" charset="0"/>
+              <a:ea typeface="Source Sans 3" pitchFamily="34" charset="-122"/>
+              <a:cs typeface="Source Sans 3" pitchFamily="34" charset="-120"/>
+            </a:endParaRPr>
+          </a:p>
+          <a:p>
+            <a:pPr marL="0" indent="0" algn="l">
+              <a:lnSpc>
+                <a:spcPts val="3000"/>
+              </a:lnSpc>
+              <a:buNone/>
+            </a:pPr>
+            <a:r>
+              <a:rPr lang="es-419" sz="1850" b="1" noProof="0" dirty="0">
                 <a:solidFill>
                   <a:srgbClr val="272525"/>
                 </a:solidFill>
@@ -11480,9 +9522,8 @@
                 <a:ea typeface="Source Sans 3" pitchFamily="34" charset="-122"/>
                 <a:cs typeface="Source Sans 3" pitchFamily="34" charset="-120"/>
               </a:rPr>
-              <a:t>, pruebas de calidad y el diseño de la interfaz de usuario para una experiencia óptima.</a:t>
-            </a:r>
-            <a:endParaRPr lang="es-419" sz="1850" noProof="0" dirty="0"/>
+              <a:t> En Fase 3 (Semanas 12–14 + 15 buffer) cerramos con documentación final, PPT y demo, manteniendo reuniones semanales, actas y control de cambios para cuidar foco, calidad y fechas.</a:t>
+            </a:r>
           </a:p>
         </p:txBody>
       </p:sp>
@@ -11494,7 +9535,7 @@
 </p:sld>
 </file>
 
-<file path=ppt/slides/slide7.xml><?xml version="1.0" encoding="utf-8"?>
+<file path=ppt/slides/slide8.xml><?xml version="1.0" encoding="utf-8"?>
 <p:sld xmlns:a="http://schemas.openxmlformats.org/drawingml/2006/main" xmlns:r="http://schemas.openxmlformats.org/officeDocument/2006/relationships" xmlns:p="http://schemas.openxmlformats.org/presentationml/2006/main">
   <p:cSld name="Slide 7">
     <p:spTree>
@@ -11597,14 +9638,14 @@
           <p:nvPr>
             <p:extLst>
               <p:ext uri="{D42A27DB-BD31-4B8C-83A1-F6EECF244321}">
-                <p14:modId xmlns:p14="http://schemas.microsoft.com/office/powerpoint/2010/main" val="1558104067"/>
+                <p14:modId xmlns:p14="http://schemas.microsoft.com/office/powerpoint/2010/main" val="586567005"/>
               </p:ext>
             </p:extLst>
           </p:nvPr>
         </p:nvGraphicFramePr>
         <p:xfrm>
           <a:off x="1798819" y="1199212"/>
-          <a:ext cx="10538085" cy="5831175"/>
+          <a:ext cx="10538085" cy="5053685"/>
         </p:xfrm>
         <a:graphic>
           <a:graphicData uri="http://schemas.openxmlformats.org/drawingml/2006/table">
@@ -11645,12 +9686,12 @@
                         <a:buNone/>
                       </a:pPr>
                       <a:r>
-                        <a:rPr lang="es-419" sz="2000" u="none" strike="noStrike">
+                        <a:rPr lang="es-419" sz="2000" u="none" strike="noStrike" dirty="0">
                           <a:effectLst/>
                         </a:rPr>
                         <a:t>Actividad</a:t>
                       </a:r>
-                      <a:endParaRPr lang="es-419" sz="2000" b="1" i="0" u="none" strike="noStrike">
+                      <a:endParaRPr lang="es-419" sz="2000" b="1" i="0" u="none" strike="noStrike" dirty="0">
                         <a:solidFill>
                           <a:srgbClr val="000000"/>
                         </a:solidFill>
@@ -12433,12 +10474,12 @@
                         <a:buNone/>
                       </a:pPr>
                       <a:r>
-                        <a:rPr lang="es-419" sz="2000" u="none" strike="noStrike">
+                        <a:rPr lang="es-419" sz="2000" u="none" strike="noStrike" dirty="0">
                           <a:effectLst/>
                         </a:rPr>
                         <a:t>Semanas 10, 11</a:t>
                       </a:r>
-                      <a:endParaRPr lang="es-419" sz="2000" b="0" i="0" u="none" strike="noStrike">
+                      <a:endParaRPr lang="es-419" sz="2000" b="0" i="0" u="none" strike="noStrike" dirty="0">
                         <a:solidFill>
                           <a:srgbClr val="000000"/>
                         </a:solidFill>
@@ -12629,176 +10670,12 @@
                         <a:buNone/>
                       </a:pPr>
                       <a:r>
-                        <a:rPr lang="es-419" sz="2000" u="none" strike="noStrike">
-                          <a:effectLst/>
-                        </a:rPr>
-                        <a:t>Preparación presentación final</a:t>
-                      </a:r>
-                      <a:endParaRPr lang="es-419" sz="2000" b="0" i="0" u="none" strike="noStrike">
-                        <a:solidFill>
-                          <a:srgbClr val="000000"/>
-                        </a:solidFill>
-                        <a:effectLst/>
-                        <a:latin typeface="Aptos Narrow" panose="020B0004020202020204" pitchFamily="34" charset="0"/>
-                      </a:endParaRPr>
-                    </a:p>
-                  </a:txBody>
-                  <a:tcPr marL="9525" marR="9525" marT="9525" marB="0" anchor="b"/>
-                </a:tc>
-                <a:tc>
-                  <a:txBody>
-                    <a:bodyPr/>
-                    <a:lstStyle/>
-                    <a:p>
-                      <a:pPr algn="l" fontAlgn="b">
-                        <a:buNone/>
-                      </a:pPr>
-                      <a:r>
-                        <a:rPr lang="es-419" sz="2000" u="none" strike="noStrike">
-                          <a:effectLst/>
-                        </a:rPr>
-                        <a:t>Ambos</a:t>
-                      </a:r>
-                      <a:endParaRPr lang="es-419" sz="2000" b="0" i="0" u="none" strike="noStrike">
-                        <a:solidFill>
-                          <a:srgbClr val="000000"/>
-                        </a:solidFill>
-                        <a:effectLst/>
-                        <a:latin typeface="Aptos Narrow" panose="020B0004020202020204" pitchFamily="34" charset="0"/>
-                      </a:endParaRPr>
-                    </a:p>
-                  </a:txBody>
-                  <a:tcPr marL="9525" marR="9525" marT="9525" marB="0" anchor="b"/>
-                </a:tc>
-                <a:tc>
-                  <a:txBody>
-                    <a:bodyPr/>
-                    <a:lstStyle/>
-                    <a:p>
-                      <a:pPr algn="l" fontAlgn="b">
-                        <a:buNone/>
-                      </a:pPr>
-                      <a:r>
-                        <a:rPr lang="es-419" sz="2000" u="none" strike="noStrike">
-                          <a:effectLst/>
-                        </a:rPr>
-                        <a:t>Semana 15</a:t>
-                      </a:r>
-                      <a:endParaRPr lang="es-419" sz="2000" b="0" i="0" u="none" strike="noStrike">
-                        <a:solidFill>
-                          <a:srgbClr val="000000"/>
-                        </a:solidFill>
-                        <a:effectLst/>
-                        <a:latin typeface="Aptos Narrow" panose="020B0004020202020204" pitchFamily="34" charset="0"/>
-                      </a:endParaRPr>
-                    </a:p>
-                  </a:txBody>
-                  <a:tcPr marL="9525" marR="9525" marT="9525" marB="0" anchor="b"/>
-                </a:tc>
-                <a:extLst>
-                  <a:ext uri="{0D108BD9-81ED-4DB2-BD59-A6C34878D82A}">
-                    <a16:rowId xmlns:a16="http://schemas.microsoft.com/office/drawing/2014/main" val="2135243974"/>
-                  </a:ext>
-                </a:extLst>
-              </a:tr>
-              <a:tr h="388745">
-                <a:tc>
-                  <a:txBody>
-                    <a:bodyPr/>
-                    <a:lstStyle/>
-                    <a:p>
-                      <a:pPr algn="l" fontAlgn="b">
-                        <a:buNone/>
-                      </a:pPr>
-                      <a:r>
-                        <a:rPr lang="es-419" sz="2000" u="none" strike="noStrike">
-                          <a:effectLst/>
-                        </a:rPr>
-                        <a:t>Entrega final + exposición</a:t>
-                      </a:r>
-                      <a:endParaRPr lang="es-419" sz="2000" b="0" i="0" u="none" strike="noStrike">
-                        <a:solidFill>
-                          <a:srgbClr val="000000"/>
-                        </a:solidFill>
-                        <a:effectLst/>
-                        <a:latin typeface="Aptos Narrow" panose="020B0004020202020204" pitchFamily="34" charset="0"/>
-                      </a:endParaRPr>
-                    </a:p>
-                  </a:txBody>
-                  <a:tcPr marL="9525" marR="9525" marT="9525" marB="0" anchor="b"/>
-                </a:tc>
-                <a:tc>
-                  <a:txBody>
-                    <a:bodyPr/>
-                    <a:lstStyle/>
-                    <a:p>
-                      <a:pPr algn="l" fontAlgn="b">
-                        <a:buNone/>
-                      </a:pPr>
-                      <a:r>
-                        <a:rPr lang="es-419" sz="2000" u="none" strike="noStrike">
-                          <a:effectLst/>
-                        </a:rPr>
-                        <a:t>Ambos</a:t>
-                      </a:r>
-                      <a:endParaRPr lang="es-419" sz="2000" b="0" i="0" u="none" strike="noStrike">
-                        <a:solidFill>
-                          <a:srgbClr val="000000"/>
-                        </a:solidFill>
-                        <a:effectLst/>
-                        <a:latin typeface="Aptos Narrow" panose="020B0004020202020204" pitchFamily="34" charset="0"/>
-                      </a:endParaRPr>
-                    </a:p>
-                  </a:txBody>
-                  <a:tcPr marL="9525" marR="9525" marT="9525" marB="0" anchor="b"/>
-                </a:tc>
-                <a:tc>
-                  <a:txBody>
-                    <a:bodyPr/>
-                    <a:lstStyle/>
-                    <a:p>
-                      <a:pPr algn="l" fontAlgn="b">
-                        <a:buNone/>
-                      </a:pPr>
-                      <a:r>
-                        <a:rPr lang="es-419" sz="2000" u="none" strike="noStrike">
-                          <a:effectLst/>
-                        </a:rPr>
-                        <a:t>Semana 16</a:t>
-                      </a:r>
-                      <a:endParaRPr lang="es-419" sz="2000" b="0" i="0" u="none" strike="noStrike">
-                        <a:solidFill>
-                          <a:srgbClr val="000000"/>
-                        </a:solidFill>
-                        <a:effectLst/>
-                        <a:latin typeface="Aptos Narrow" panose="020B0004020202020204" pitchFamily="34" charset="0"/>
-                      </a:endParaRPr>
-                    </a:p>
-                  </a:txBody>
-                  <a:tcPr marL="9525" marR="9525" marT="9525" marB="0" anchor="b"/>
-                </a:tc>
-                <a:extLst>
-                  <a:ext uri="{0D108BD9-81ED-4DB2-BD59-A6C34878D82A}">
-                    <a16:rowId xmlns:a16="http://schemas.microsoft.com/office/drawing/2014/main" val="556122012"/>
-                  </a:ext>
-                </a:extLst>
-              </a:tr>
-              <a:tr h="388745">
-                <a:tc>
-                  <a:txBody>
-                    <a:bodyPr/>
-                    <a:lstStyle/>
-                    <a:p>
-                      <a:pPr algn="l" fontAlgn="b">
-                        <a:buNone/>
-                      </a:pPr>
-                      <a:r>
-                        <a:rPr lang="es-419" sz="2000" u="none" strike="noStrike">
+                        <a:rPr lang="es-419" sz="2000" u="none" strike="noStrike" dirty="0">
                           <a:effectLst/>
                         </a:rPr>
                         <a:t>Semanas buffer</a:t>
                       </a:r>
-                      <a:endParaRPr lang="es-419" sz="2000" b="0" i="0" u="none" strike="noStrike">
+                      <a:endParaRPr lang="es-419" sz="2000" b="0" i="0" u="none" strike="noStrike" dirty="0">
                         <a:solidFill>
                           <a:srgbClr val="000000"/>
                         </a:solidFill>
@@ -12846,7 +10723,7 @@
                         <a:rPr lang="es-419" sz="2000" u="none" strike="noStrike" dirty="0">
                           <a:effectLst/>
                         </a:rPr>
-                        <a:t>Semanas 17, 18</a:t>
+                        <a:t>Semana 15</a:t>
                       </a:r>
                       <a:endParaRPr lang="es-419" sz="2000" b="0" i="0" u="none" strike="noStrike" dirty="0">
                         <a:solidFill>
@@ -12861,7 +10738,7 @@
                 </a:tc>
                 <a:extLst>
                   <a:ext uri="{0D108BD9-81ED-4DB2-BD59-A6C34878D82A}">
-                    <a16:rowId xmlns:a16="http://schemas.microsoft.com/office/drawing/2014/main" val="2874714941"/>
+                    <a16:rowId xmlns:a16="http://schemas.microsoft.com/office/drawing/2014/main" val="2135243974"/>
                   </a:ext>
                 </a:extLst>
               </a:tr>
@@ -12869,738 +10746,6 @@
           </a:graphicData>
         </a:graphic>
       </p:graphicFrame>
-    </p:spTree>
-  </p:cSld>
-  <p:clrMapOvr>
-    <a:masterClrMapping/>
-  </p:clrMapOvr>
-</p:sld>
-</file>
-
-<file path=ppt/slides/slide8.xml><?xml version="1.0" encoding="utf-8"?>
-<p:sld xmlns:a="http://schemas.openxmlformats.org/drawingml/2006/main" xmlns:r="http://schemas.openxmlformats.org/officeDocument/2006/relationships" xmlns:p="http://schemas.openxmlformats.org/presentationml/2006/main">
-  <p:cSld name="Slide 8">
-    <p:spTree>
-      <p:nvGrpSpPr>
-        <p:cNvPr id="1" name=""/>
-        <p:cNvGrpSpPr/>
-        <p:nvPr/>
-      </p:nvGrpSpPr>
-      <p:grpSpPr>
-        <a:xfrm>
-          <a:off x="0" y="0"/>
-          <a:ext cx="0" cy="0"/>
-          <a:chOff x="0" y="0"/>
-          <a:chExt cx="0" cy="0"/>
-        </a:xfrm>
-      </p:grpSpPr>
-      <p:sp>
-        <p:nvSpPr>
-          <p:cNvPr id="2" name="Text 0"/>
-          <p:cNvSpPr/>
-          <p:nvPr/>
-        </p:nvSpPr>
-        <p:spPr>
-          <a:xfrm>
-            <a:off x="837724" y="1130618"/>
-            <a:ext cx="5632490" cy="704017"/>
-          </a:xfrm>
-          <a:prstGeom prst="rect">
-            <a:avLst/>
-          </a:prstGeom>
-          <a:noFill/>
-          <a:ln/>
-        </p:spPr>
-        <p:txBody>
-          <a:bodyPr wrap="none" lIns="0" tIns="0" rIns="0" bIns="0" rtlCol="0" anchor="t"/>
-          <a:lstStyle/>
-          <a:p>
-            <a:pPr marL="0" indent="0" algn="l">
-              <a:lnSpc>
-                <a:spcPts val="5500"/>
-              </a:lnSpc>
-              <a:buNone/>
-            </a:pPr>
-            <a:r>
-              <a:rPr lang="es-419" sz="4400" noProof="0" dirty="0">
-                <a:solidFill>
-                  <a:srgbClr val="D73AD7"/>
-                </a:solidFill>
-                <a:latin typeface="Source Serif 4 Semi Bold" pitchFamily="34" charset="0"/>
-                <a:ea typeface="Source Serif 4 Semi Bold" pitchFamily="34" charset="-122"/>
-                <a:cs typeface="Source Serif 4 Semi Bold" pitchFamily="34" charset="-120"/>
-              </a:rPr>
-              <a:t>Avance por </a:t>
-            </a:r>
-            <a:r>
-              <a:rPr lang="es-419" sz="4400" noProof="0" dirty="0" err="1">
-                <a:solidFill>
-                  <a:srgbClr val="D73AD7"/>
-                </a:solidFill>
-                <a:latin typeface="Source Serif 4 Semi Bold" pitchFamily="34" charset="0"/>
-                <a:ea typeface="Source Serif 4 Semi Bold" pitchFamily="34" charset="-122"/>
-                <a:cs typeface="Source Serif 4 Semi Bold" pitchFamily="34" charset="-120"/>
-              </a:rPr>
-              <a:t>Sprints</a:t>
-            </a:r>
-            <a:endParaRPr lang="es-419" sz="4400" noProof="0" dirty="0"/>
-          </a:p>
-        </p:txBody>
-      </p:sp>
-      <p:sp>
-        <p:nvSpPr>
-          <p:cNvPr id="3" name="Text 1"/>
-          <p:cNvSpPr/>
-          <p:nvPr/>
-        </p:nvSpPr>
-        <p:spPr>
-          <a:xfrm>
-            <a:off x="837724" y="2313384"/>
-            <a:ext cx="12954952" cy="383024"/>
-          </a:xfrm>
-          <a:prstGeom prst="rect">
-            <a:avLst/>
-          </a:prstGeom>
-          <a:noFill/>
-          <a:ln/>
-        </p:spPr>
-        <p:txBody>
-          <a:bodyPr wrap="none" lIns="0" tIns="0" rIns="0" bIns="0" rtlCol="0" anchor="t"/>
-          <a:lstStyle/>
-          <a:p>
-            <a:pPr marL="0" indent="0" algn="l">
-              <a:lnSpc>
-                <a:spcPts val="3000"/>
-              </a:lnSpc>
-              <a:buNone/>
-            </a:pPr>
-            <a:r>
-              <a:rPr lang="es-419" sz="1850" noProof="0" dirty="0">
-                <a:solidFill>
-                  <a:srgbClr val="272525"/>
-                </a:solidFill>
-                <a:latin typeface="Source Sans 3" pitchFamily="34" charset="0"/>
-                <a:ea typeface="Source Sans 3" pitchFamily="34" charset="-122"/>
-                <a:cs typeface="Source Sans 3" pitchFamily="34" charset="-120"/>
-              </a:rPr>
-              <a:t>Nuestro plan de trabajo se estructura en </a:t>
-            </a:r>
-            <a:r>
-              <a:rPr lang="es-419" sz="1850" noProof="0" dirty="0" err="1">
-                <a:solidFill>
-                  <a:srgbClr val="272525"/>
-                </a:solidFill>
-                <a:latin typeface="Source Sans 3" pitchFamily="34" charset="0"/>
-                <a:ea typeface="Source Sans 3" pitchFamily="34" charset="-122"/>
-                <a:cs typeface="Source Sans 3" pitchFamily="34" charset="-120"/>
-              </a:rPr>
-              <a:t>sprints</a:t>
-            </a:r>
-            <a:r>
-              <a:rPr lang="es-419" sz="1850" noProof="0" dirty="0">
-                <a:solidFill>
-                  <a:srgbClr val="272525"/>
-                </a:solidFill>
-                <a:latin typeface="Source Sans 3" pitchFamily="34" charset="0"/>
-                <a:ea typeface="Source Sans 3" pitchFamily="34" charset="-122"/>
-                <a:cs typeface="Source Sans 3" pitchFamily="34" charset="-120"/>
-              </a:rPr>
-              <a:t> quincenales, asegurando un desarrollo modular y eficiente.</a:t>
-            </a:r>
-            <a:endParaRPr lang="es-419" sz="1850" noProof="0" dirty="0"/>
-          </a:p>
-        </p:txBody>
-      </p:sp>
-      <p:sp>
-        <p:nvSpPr>
-          <p:cNvPr id="4" name="Shape 2"/>
-          <p:cNvSpPr/>
-          <p:nvPr/>
-        </p:nvSpPr>
-        <p:spPr>
-          <a:xfrm>
-            <a:off x="837724" y="2965609"/>
-            <a:ext cx="4158734" cy="2138482"/>
-          </a:xfrm>
-          <a:prstGeom prst="roundRect">
-            <a:avLst>
-              <a:gd name="adj" fmla="val 26865"/>
-            </a:avLst>
-          </a:prstGeom>
-          <a:solidFill>
-            <a:srgbClr val="F4D4F7"/>
-          </a:solidFill>
-          <a:ln w="7620">
-            <a:solidFill>
-              <a:srgbClr val="DABADD"/>
-            </a:solidFill>
-            <a:prstDash val="solid"/>
-          </a:ln>
-        </p:spPr>
-        <p:txBody>
-          <a:bodyPr/>
-          <a:lstStyle/>
-          <a:p>
-            <a:endParaRPr lang="es-419" noProof="0" dirty="0"/>
-          </a:p>
-        </p:txBody>
-      </p:sp>
-      <p:sp>
-        <p:nvSpPr>
-          <p:cNvPr id="5" name="Text 3"/>
-          <p:cNvSpPr/>
-          <p:nvPr/>
-        </p:nvSpPr>
-        <p:spPr>
-          <a:xfrm>
-            <a:off x="1084659" y="3212544"/>
-            <a:ext cx="3015139" cy="351949"/>
-          </a:xfrm>
-          <a:prstGeom prst="rect">
-            <a:avLst/>
-          </a:prstGeom>
-          <a:noFill/>
-          <a:ln/>
-        </p:spPr>
-        <p:txBody>
-          <a:bodyPr wrap="none" lIns="0" tIns="0" rIns="0" bIns="0" rtlCol="0" anchor="t"/>
-          <a:lstStyle/>
-          <a:p>
-            <a:pPr marL="0" indent="0" algn="l">
-              <a:lnSpc>
-                <a:spcPts val="2750"/>
-              </a:lnSpc>
-              <a:buNone/>
-            </a:pPr>
-            <a:r>
-              <a:rPr lang="es-419" sz="2200" noProof="0" dirty="0">
-                <a:solidFill>
-                  <a:srgbClr val="272525"/>
-                </a:solidFill>
-                <a:latin typeface="Source Serif 4 Semi Bold" pitchFamily="34" charset="0"/>
-                <a:ea typeface="Source Serif 4 Semi Bold" pitchFamily="34" charset="-122"/>
-                <a:cs typeface="Source Serif 4 Semi Bold" pitchFamily="34" charset="-120"/>
-              </a:rPr>
-              <a:t>Sprint 1 (Semanas 1-2)</a:t>
-            </a:r>
-            <a:endParaRPr lang="es-419" sz="2200" noProof="0" dirty="0"/>
-          </a:p>
-        </p:txBody>
-      </p:sp>
-      <p:sp>
-        <p:nvSpPr>
-          <p:cNvPr id="6" name="Text 4"/>
-          <p:cNvSpPr/>
-          <p:nvPr/>
-        </p:nvSpPr>
-        <p:spPr>
-          <a:xfrm>
-            <a:off x="1084659" y="3708083"/>
-            <a:ext cx="3664863" cy="1149072"/>
-          </a:xfrm>
-          <a:prstGeom prst="rect">
-            <a:avLst/>
-          </a:prstGeom>
-          <a:noFill/>
-          <a:ln/>
-        </p:spPr>
-        <p:txBody>
-          <a:bodyPr wrap="square" lIns="0" tIns="0" rIns="0" bIns="0" rtlCol="0" anchor="t"/>
-          <a:lstStyle/>
-          <a:p>
-            <a:pPr marL="0" indent="0" algn="l">
-              <a:lnSpc>
-                <a:spcPts val="3000"/>
-              </a:lnSpc>
-              <a:buNone/>
-            </a:pPr>
-            <a:r>
-              <a:rPr lang="es-419" sz="1850" noProof="0" dirty="0">
-                <a:solidFill>
-                  <a:srgbClr val="272525"/>
-                </a:solidFill>
-                <a:latin typeface="Source Sans 3" pitchFamily="34" charset="0"/>
-                <a:ea typeface="Source Sans 3" pitchFamily="34" charset="-122"/>
-                <a:cs typeface="Source Sans 3" pitchFamily="34" charset="-120"/>
-              </a:rPr>
-              <a:t>Planificación inicial, levantamiento de requerimientos y prototipo conceptual.</a:t>
-            </a:r>
-            <a:endParaRPr lang="es-419" sz="1850" noProof="0" dirty="0"/>
-          </a:p>
-        </p:txBody>
-      </p:sp>
-      <p:sp>
-        <p:nvSpPr>
-          <p:cNvPr id="7" name="Shape 5"/>
-          <p:cNvSpPr/>
-          <p:nvPr/>
-        </p:nvSpPr>
-        <p:spPr>
-          <a:xfrm>
-            <a:off x="5235773" y="2965609"/>
-            <a:ext cx="4158734" cy="2138482"/>
-          </a:xfrm>
-          <a:prstGeom prst="roundRect">
-            <a:avLst>
-              <a:gd name="adj" fmla="val 26865"/>
-            </a:avLst>
-          </a:prstGeom>
-          <a:solidFill>
-            <a:srgbClr val="F4D4F7"/>
-          </a:solidFill>
-          <a:ln w="7620">
-            <a:solidFill>
-              <a:srgbClr val="DABADD"/>
-            </a:solidFill>
-            <a:prstDash val="solid"/>
-          </a:ln>
-        </p:spPr>
-        <p:txBody>
-          <a:bodyPr/>
-          <a:lstStyle/>
-          <a:p>
-            <a:endParaRPr lang="es-419" noProof="0" dirty="0"/>
-          </a:p>
-        </p:txBody>
-      </p:sp>
-      <p:sp>
-        <p:nvSpPr>
-          <p:cNvPr id="8" name="Text 6"/>
-          <p:cNvSpPr/>
-          <p:nvPr/>
-        </p:nvSpPr>
-        <p:spPr>
-          <a:xfrm>
-            <a:off x="5482709" y="3212544"/>
-            <a:ext cx="3015139" cy="351949"/>
-          </a:xfrm>
-          <a:prstGeom prst="rect">
-            <a:avLst/>
-          </a:prstGeom>
-          <a:noFill/>
-          <a:ln/>
-        </p:spPr>
-        <p:txBody>
-          <a:bodyPr wrap="none" lIns="0" tIns="0" rIns="0" bIns="0" rtlCol="0" anchor="t"/>
-          <a:lstStyle/>
-          <a:p>
-            <a:pPr marL="0" indent="0" algn="l">
-              <a:lnSpc>
-                <a:spcPts val="2750"/>
-              </a:lnSpc>
-              <a:buNone/>
-            </a:pPr>
-            <a:r>
-              <a:rPr lang="es-419" sz="2200" noProof="0" dirty="0">
-                <a:solidFill>
-                  <a:srgbClr val="272525"/>
-                </a:solidFill>
-                <a:latin typeface="Source Serif 4 Semi Bold" pitchFamily="34" charset="0"/>
-                <a:ea typeface="Source Serif 4 Semi Bold" pitchFamily="34" charset="-122"/>
-                <a:cs typeface="Source Serif 4 Semi Bold" pitchFamily="34" charset="-120"/>
-              </a:rPr>
-              <a:t>Sprint 2 (Semanas 3-4)</a:t>
-            </a:r>
-            <a:endParaRPr lang="es-419" sz="2200" noProof="0" dirty="0"/>
-          </a:p>
-        </p:txBody>
-      </p:sp>
-      <p:sp>
-        <p:nvSpPr>
-          <p:cNvPr id="9" name="Text 7"/>
-          <p:cNvSpPr/>
-          <p:nvPr/>
-        </p:nvSpPr>
-        <p:spPr>
-          <a:xfrm>
-            <a:off x="5482709" y="3708083"/>
-            <a:ext cx="3664863" cy="766048"/>
-          </a:xfrm>
-          <a:prstGeom prst="rect">
-            <a:avLst/>
-          </a:prstGeom>
-          <a:noFill/>
-          <a:ln/>
-        </p:spPr>
-        <p:txBody>
-          <a:bodyPr wrap="square" lIns="0" tIns="0" rIns="0" bIns="0" rtlCol="0" anchor="t"/>
-          <a:lstStyle/>
-          <a:p>
-            <a:pPr marL="0" indent="0" algn="l">
-              <a:lnSpc>
-                <a:spcPts val="3000"/>
-              </a:lnSpc>
-              <a:buNone/>
-            </a:pPr>
-            <a:r>
-              <a:rPr lang="es-419" sz="1850" noProof="0" dirty="0">
-                <a:solidFill>
-                  <a:srgbClr val="272525"/>
-                </a:solidFill>
-                <a:latin typeface="Source Sans 3" pitchFamily="34" charset="0"/>
-                <a:ea typeface="Source Sans 3" pitchFamily="34" charset="-122"/>
-                <a:cs typeface="Source Sans 3" pitchFamily="34" charset="-120"/>
-              </a:rPr>
-              <a:t>Implementación de la autenticación de usuarios y módulos de gestión.</a:t>
-            </a:r>
-            <a:endParaRPr lang="es-419" sz="1850" noProof="0" dirty="0"/>
-          </a:p>
-        </p:txBody>
-      </p:sp>
-      <p:sp>
-        <p:nvSpPr>
-          <p:cNvPr id="10" name="Shape 8"/>
-          <p:cNvSpPr/>
-          <p:nvPr/>
-        </p:nvSpPr>
-        <p:spPr>
-          <a:xfrm>
-            <a:off x="9633823" y="2965609"/>
-            <a:ext cx="4158853" cy="2138482"/>
-          </a:xfrm>
-          <a:prstGeom prst="roundRect">
-            <a:avLst>
-              <a:gd name="adj" fmla="val 26865"/>
-            </a:avLst>
-          </a:prstGeom>
-          <a:solidFill>
-            <a:srgbClr val="F4D4F7"/>
-          </a:solidFill>
-          <a:ln w="7620">
-            <a:solidFill>
-              <a:srgbClr val="DABADD"/>
-            </a:solidFill>
-            <a:prstDash val="solid"/>
-          </a:ln>
-        </p:spPr>
-        <p:txBody>
-          <a:bodyPr/>
-          <a:lstStyle/>
-          <a:p>
-            <a:endParaRPr lang="es-419" noProof="0" dirty="0"/>
-          </a:p>
-        </p:txBody>
-      </p:sp>
-      <p:sp>
-        <p:nvSpPr>
-          <p:cNvPr id="11" name="Text 9"/>
-          <p:cNvSpPr/>
-          <p:nvPr/>
-        </p:nvSpPr>
-        <p:spPr>
-          <a:xfrm>
-            <a:off x="9880759" y="3212544"/>
-            <a:ext cx="3015139" cy="351949"/>
-          </a:xfrm>
-          <a:prstGeom prst="rect">
-            <a:avLst/>
-          </a:prstGeom>
-          <a:noFill/>
-          <a:ln/>
-        </p:spPr>
-        <p:txBody>
-          <a:bodyPr wrap="none" lIns="0" tIns="0" rIns="0" bIns="0" rtlCol="0" anchor="t"/>
-          <a:lstStyle/>
-          <a:p>
-            <a:pPr marL="0" indent="0" algn="l">
-              <a:lnSpc>
-                <a:spcPts val="2750"/>
-              </a:lnSpc>
-              <a:buNone/>
-            </a:pPr>
-            <a:r>
-              <a:rPr lang="es-419" sz="2200" noProof="0" dirty="0">
-                <a:solidFill>
-                  <a:srgbClr val="272525"/>
-                </a:solidFill>
-                <a:latin typeface="Source Serif 4 Semi Bold" pitchFamily="34" charset="0"/>
-                <a:ea typeface="Source Serif 4 Semi Bold" pitchFamily="34" charset="-122"/>
-                <a:cs typeface="Source Serif 4 Semi Bold" pitchFamily="34" charset="-120"/>
-              </a:rPr>
-              <a:t>Sprint 3 (Semanas 5-6)</a:t>
-            </a:r>
-            <a:endParaRPr lang="es-419" sz="2200" noProof="0" dirty="0"/>
-          </a:p>
-        </p:txBody>
-      </p:sp>
-      <p:sp>
-        <p:nvSpPr>
-          <p:cNvPr id="12" name="Text 10"/>
-          <p:cNvSpPr/>
-          <p:nvPr/>
-        </p:nvSpPr>
-        <p:spPr>
-          <a:xfrm>
-            <a:off x="9880759" y="3708083"/>
-            <a:ext cx="3664982" cy="1149072"/>
-          </a:xfrm>
-          <a:prstGeom prst="rect">
-            <a:avLst/>
-          </a:prstGeom>
-          <a:noFill/>
-          <a:ln/>
-        </p:spPr>
-        <p:txBody>
-          <a:bodyPr wrap="square" lIns="0" tIns="0" rIns="0" bIns="0" rtlCol="0" anchor="t"/>
-          <a:lstStyle/>
-          <a:p>
-            <a:pPr marL="0" indent="0" algn="l">
-              <a:lnSpc>
-                <a:spcPts val="3000"/>
-              </a:lnSpc>
-              <a:buNone/>
-            </a:pPr>
-            <a:r>
-              <a:rPr lang="es-419" sz="1850" noProof="0" dirty="0">
-                <a:solidFill>
-                  <a:srgbClr val="272525"/>
-                </a:solidFill>
-                <a:latin typeface="Source Sans 3" pitchFamily="34" charset="0"/>
-                <a:ea typeface="Source Sans 3" pitchFamily="34" charset="-122"/>
-                <a:cs typeface="Source Sans 3" pitchFamily="34" charset="-120"/>
-              </a:rPr>
-              <a:t>Desarrollo del cuestionario de síntomas y el motor de reglas para el triage.</a:t>
-            </a:r>
-            <a:endParaRPr lang="es-419" sz="1850" noProof="0" dirty="0"/>
-          </a:p>
-        </p:txBody>
-      </p:sp>
-      <p:sp>
-        <p:nvSpPr>
-          <p:cNvPr id="13" name="Shape 11"/>
-          <p:cNvSpPr/>
-          <p:nvPr/>
-        </p:nvSpPr>
-        <p:spPr>
-          <a:xfrm>
-            <a:off x="837724" y="5343406"/>
-            <a:ext cx="6357818" cy="1755458"/>
-          </a:xfrm>
-          <a:prstGeom prst="roundRect">
-            <a:avLst>
-              <a:gd name="adj" fmla="val 32727"/>
-            </a:avLst>
-          </a:prstGeom>
-          <a:solidFill>
-            <a:srgbClr val="F4D4F7"/>
-          </a:solidFill>
-          <a:ln w="7620">
-            <a:solidFill>
-              <a:srgbClr val="DABADD"/>
-            </a:solidFill>
-            <a:prstDash val="solid"/>
-          </a:ln>
-        </p:spPr>
-        <p:txBody>
-          <a:bodyPr/>
-          <a:lstStyle/>
-          <a:p>
-            <a:endParaRPr lang="es-419" noProof="0" dirty="0"/>
-          </a:p>
-        </p:txBody>
-      </p:sp>
-      <p:sp>
-        <p:nvSpPr>
-          <p:cNvPr id="14" name="Text 12"/>
-          <p:cNvSpPr/>
-          <p:nvPr/>
-        </p:nvSpPr>
-        <p:spPr>
-          <a:xfrm>
-            <a:off x="1084659" y="5590342"/>
-            <a:ext cx="3015139" cy="351949"/>
-          </a:xfrm>
-          <a:prstGeom prst="rect">
-            <a:avLst/>
-          </a:prstGeom>
-          <a:noFill/>
-          <a:ln/>
-        </p:spPr>
-        <p:txBody>
-          <a:bodyPr wrap="none" lIns="0" tIns="0" rIns="0" bIns="0" rtlCol="0" anchor="t"/>
-          <a:lstStyle/>
-          <a:p>
-            <a:pPr marL="0" indent="0" algn="l">
-              <a:lnSpc>
-                <a:spcPts val="2750"/>
-              </a:lnSpc>
-              <a:buNone/>
-            </a:pPr>
-            <a:r>
-              <a:rPr lang="es-419" sz="2200" noProof="0" dirty="0">
-                <a:solidFill>
-                  <a:srgbClr val="272525"/>
-                </a:solidFill>
-                <a:latin typeface="Source Serif 4 Semi Bold" pitchFamily="34" charset="0"/>
-                <a:ea typeface="Source Serif 4 Semi Bold" pitchFamily="34" charset="-122"/>
-                <a:cs typeface="Source Serif 4 Semi Bold" pitchFamily="34" charset="-120"/>
-              </a:rPr>
-              <a:t>Sprint 4 (Semanas 7-8)</a:t>
-            </a:r>
-            <a:endParaRPr lang="es-419" sz="2200" noProof="0" dirty="0"/>
-          </a:p>
-        </p:txBody>
-      </p:sp>
-      <p:sp>
-        <p:nvSpPr>
-          <p:cNvPr id="15" name="Text 13"/>
-          <p:cNvSpPr/>
-          <p:nvPr/>
-        </p:nvSpPr>
-        <p:spPr>
-          <a:xfrm>
-            <a:off x="1084659" y="6085880"/>
-            <a:ext cx="5863947" cy="766048"/>
-          </a:xfrm>
-          <a:prstGeom prst="rect">
-            <a:avLst/>
-          </a:prstGeom>
-          <a:noFill/>
-          <a:ln/>
-        </p:spPr>
-        <p:txBody>
-          <a:bodyPr wrap="square" lIns="0" tIns="0" rIns="0" bIns="0" rtlCol="0" anchor="t"/>
-          <a:lstStyle/>
-          <a:p>
-            <a:pPr marL="0" indent="0" algn="l">
-              <a:lnSpc>
-                <a:spcPts val="3000"/>
-              </a:lnSpc>
-              <a:buNone/>
-            </a:pPr>
-            <a:r>
-              <a:rPr lang="es-419" sz="1850" noProof="0" dirty="0">
-                <a:solidFill>
-                  <a:srgbClr val="272525"/>
-                </a:solidFill>
-                <a:latin typeface="Source Sans 3" pitchFamily="34" charset="0"/>
-                <a:ea typeface="Source Sans 3" pitchFamily="34" charset="-122"/>
-                <a:cs typeface="Source Sans 3" pitchFamily="34" charset="-120"/>
-              </a:rPr>
-              <a:t>Integración del módulo de IA y diseño del panel médico para una gestión eficaz.</a:t>
-            </a:r>
-            <a:endParaRPr lang="es-419" sz="1850" noProof="0" dirty="0"/>
-          </a:p>
-        </p:txBody>
-      </p:sp>
-      <p:sp>
-        <p:nvSpPr>
-          <p:cNvPr id="16" name="Shape 14"/>
-          <p:cNvSpPr/>
-          <p:nvPr/>
-        </p:nvSpPr>
-        <p:spPr>
-          <a:xfrm>
-            <a:off x="7434858" y="5343406"/>
-            <a:ext cx="6357818" cy="1755458"/>
-          </a:xfrm>
-          <a:prstGeom prst="roundRect">
-            <a:avLst>
-              <a:gd name="adj" fmla="val 32727"/>
-            </a:avLst>
-          </a:prstGeom>
-          <a:solidFill>
-            <a:srgbClr val="F4D4F7"/>
-          </a:solidFill>
-          <a:ln w="7620">
-            <a:solidFill>
-              <a:srgbClr val="DABADD"/>
-            </a:solidFill>
-            <a:prstDash val="solid"/>
-          </a:ln>
-        </p:spPr>
-        <p:txBody>
-          <a:bodyPr/>
-          <a:lstStyle/>
-          <a:p>
-            <a:endParaRPr lang="es-419" noProof="0" dirty="0"/>
-          </a:p>
-        </p:txBody>
-      </p:sp>
-      <p:sp>
-        <p:nvSpPr>
-          <p:cNvPr id="17" name="Text 15"/>
-          <p:cNvSpPr/>
-          <p:nvPr/>
-        </p:nvSpPr>
-        <p:spPr>
-          <a:xfrm>
-            <a:off x="7681793" y="5590342"/>
-            <a:ext cx="3169087" cy="351949"/>
-          </a:xfrm>
-          <a:prstGeom prst="rect">
-            <a:avLst/>
-          </a:prstGeom>
-          <a:noFill/>
-          <a:ln/>
-        </p:spPr>
-        <p:txBody>
-          <a:bodyPr wrap="none" lIns="0" tIns="0" rIns="0" bIns="0" rtlCol="0" anchor="t"/>
-          <a:lstStyle/>
-          <a:p>
-            <a:pPr marL="0" indent="0" algn="l">
-              <a:lnSpc>
-                <a:spcPts val="2750"/>
-              </a:lnSpc>
-              <a:buNone/>
-            </a:pPr>
-            <a:r>
-              <a:rPr lang="es-419" sz="2200" noProof="0" dirty="0">
-                <a:solidFill>
-                  <a:srgbClr val="272525"/>
-                </a:solidFill>
-                <a:latin typeface="Source Serif 4 Semi Bold" pitchFamily="34" charset="0"/>
-                <a:ea typeface="Source Serif 4 Semi Bold" pitchFamily="34" charset="-122"/>
-                <a:cs typeface="Source Serif 4 Semi Bold" pitchFamily="34" charset="-120"/>
-              </a:rPr>
-              <a:t>Sprint 5 (Semanas 9-10)</a:t>
-            </a:r>
-            <a:endParaRPr lang="es-419" sz="2200" noProof="0" dirty="0"/>
-          </a:p>
-        </p:txBody>
-      </p:sp>
-      <p:sp>
-        <p:nvSpPr>
-          <p:cNvPr id="18" name="Text 16"/>
-          <p:cNvSpPr/>
-          <p:nvPr/>
-        </p:nvSpPr>
-        <p:spPr>
-          <a:xfrm>
-            <a:off x="7681793" y="6085880"/>
-            <a:ext cx="5863947" cy="766048"/>
-          </a:xfrm>
-          <a:prstGeom prst="rect">
-            <a:avLst/>
-          </a:prstGeom>
-          <a:noFill/>
-          <a:ln/>
-        </p:spPr>
-        <p:txBody>
-          <a:bodyPr wrap="square" lIns="0" tIns="0" rIns="0" bIns="0" rtlCol="0" anchor="t"/>
-          <a:lstStyle/>
-          <a:p>
-            <a:pPr marL="0" indent="0" algn="l">
-              <a:lnSpc>
-                <a:spcPts val="3000"/>
-              </a:lnSpc>
-              <a:buNone/>
-            </a:pPr>
-            <a:r>
-              <a:rPr lang="es-419" sz="1850" noProof="0" dirty="0">
-                <a:solidFill>
-                  <a:srgbClr val="272525"/>
-                </a:solidFill>
-                <a:latin typeface="Source Sans 3" pitchFamily="34" charset="0"/>
-                <a:ea typeface="Source Sans 3" pitchFamily="34" charset="-122"/>
-                <a:cs typeface="Source Sans 3" pitchFamily="34" charset="-120"/>
-              </a:rPr>
-              <a:t>Fase de pruebas exhaustivas, ajustes finales, documentación y la demo de MediTriage.</a:t>
-            </a:r>
-            <a:endParaRPr lang="es-419" sz="1850" noProof="0" dirty="0"/>
-          </a:p>
-        </p:txBody>
-      </p:sp>
     </p:spTree>
   </p:cSld>
   <p:clrMapOvr>
